--- a/lectures/Lecture_01_course_introduction.pptx
+++ b/lectures/Lecture_01_course_introduction.pptx
@@ -2,63 +2,70 @@
 <file path=ppt/presentation.xml><?xml version="1.0" encoding="utf-8"?>
 <p:presentation xmlns:a="http://schemas.openxmlformats.org/drawingml/2006/main" xmlns:r="http://schemas.openxmlformats.org/officeDocument/2006/relationships" xmlns:mc="http://schemas.openxmlformats.org/markup-compatibility/2006" xmlns:mv="urn:schemas-microsoft-com:mac:vml" xmlns:p="http://schemas.openxmlformats.org/presentationml/2006/main" xmlns:c="http://schemas.openxmlformats.org/drawingml/2006/chart" xmlns:dgm="http://schemas.openxmlformats.org/drawingml/2006/diagram" xmlns:o="urn:schemas-microsoft-com:office:office" xmlns:v="urn:schemas-microsoft-com:vml" xmlns:pvml="urn:schemas-microsoft-com:office:powerpoint" xmlns:com="http://schemas.openxmlformats.org/drawingml/2006/compatibility" xmlns:p14="http://schemas.microsoft.com/office/powerpoint/2010/main" xmlns:p15="http://schemas.microsoft.com/office/powerpoint/2012/main" xmlns:ahyp="http://schemas.microsoft.com/office/drawing/2018/hyperlinkcolor" autoCompressPictures="0" embedTrueTypeFonts="1" strictFirstAndLastChars="0" saveSubsetFonts="1">
   <p:sldMasterIdLst>
-    <p:sldMasterId id="2147483659" r:id="rId4"/>
+    <p:sldMasterId id="2147483659" r:id="rId5"/>
   </p:sldMasterIdLst>
   <p:notesMasterIdLst>
-    <p:notesMasterId r:id="rId5"/>
+    <p:notesMasterId r:id="rId6"/>
   </p:notesMasterIdLst>
   <p:sldIdLst>
-    <p:sldId id="256" r:id="rId6"/>
-    <p:sldId id="257" r:id="rId7"/>
-    <p:sldId id="258" r:id="rId8"/>
-    <p:sldId id="259" r:id="rId9"/>
-    <p:sldId id="260" r:id="rId10"/>
-    <p:sldId id="261" r:id="rId11"/>
-    <p:sldId id="262" r:id="rId12"/>
-    <p:sldId id="263" r:id="rId13"/>
-    <p:sldId id="264" r:id="rId14"/>
-    <p:sldId id="265" r:id="rId15"/>
-    <p:sldId id="266" r:id="rId16"/>
-    <p:sldId id="267" r:id="rId17"/>
-    <p:sldId id="268" r:id="rId18"/>
-    <p:sldId id="269" r:id="rId19"/>
-    <p:sldId id="270" r:id="rId20"/>
-    <p:sldId id="271" r:id="rId21"/>
-    <p:sldId id="272" r:id="rId22"/>
-    <p:sldId id="273" r:id="rId23"/>
-    <p:sldId id="274" r:id="rId24"/>
-    <p:sldId id="275" r:id="rId25"/>
-    <p:sldId id="276" r:id="rId26"/>
-    <p:sldId id="277" r:id="rId27"/>
-    <p:sldId id="278" r:id="rId28"/>
-    <p:sldId id="279" r:id="rId29"/>
-    <p:sldId id="280" r:id="rId30"/>
-    <p:sldId id="281" r:id="rId31"/>
+    <p:sldId id="256" r:id="rId7"/>
+    <p:sldId id="257" r:id="rId8"/>
+    <p:sldId id="258" r:id="rId9"/>
+    <p:sldId id="259" r:id="rId10"/>
+    <p:sldId id="260" r:id="rId11"/>
+    <p:sldId id="261" r:id="rId12"/>
+    <p:sldId id="262" r:id="rId13"/>
+    <p:sldId id="263" r:id="rId14"/>
+    <p:sldId id="264" r:id="rId15"/>
+    <p:sldId id="265" r:id="rId16"/>
+    <p:sldId id="266" r:id="rId17"/>
+    <p:sldId id="267" r:id="rId18"/>
+    <p:sldId id="268" r:id="rId19"/>
+    <p:sldId id="269" r:id="rId20"/>
+    <p:sldId id="270" r:id="rId21"/>
+    <p:sldId id="271" r:id="rId22"/>
+    <p:sldId id="272" r:id="rId23"/>
+    <p:sldId id="273" r:id="rId24"/>
+    <p:sldId id="274" r:id="rId25"/>
+    <p:sldId id="275" r:id="rId26"/>
+    <p:sldId id="276" r:id="rId27"/>
+    <p:sldId id="277" r:id="rId28"/>
+    <p:sldId id="278" r:id="rId29"/>
+    <p:sldId id="279" r:id="rId30"/>
+    <p:sldId id="280" r:id="rId31"/>
+    <p:sldId id="281" r:id="rId32"/>
   </p:sldIdLst>
   <p:sldSz cy="5143500" cx="9144000"/>
   <p:notesSz cx="6858000" cy="9144000"/>
   <p:embeddedFontLst>
     <p:embeddedFont>
       <p:font typeface="Inter SemiBold"/>
-      <p:regular r:id="rId32"/>
-      <p:bold r:id="rId33"/>
-      <p:italic r:id="rId34"/>
-      <p:boldItalic r:id="rId35"/>
+      <p:regular r:id="rId33"/>
+      <p:bold r:id="rId34"/>
+      <p:italic r:id="rId35"/>
+      <p:boldItalic r:id="rId36"/>
     </p:embeddedFont>
     <p:embeddedFont>
       <p:font typeface="Montserrat"/>
-      <p:bold r:id="rId36"/>
-      <p:boldItalic r:id="rId37"/>
+      <p:bold r:id="rId37"/>
+      <p:boldItalic r:id="rId38"/>
     </p:embeddedFont>
     <p:embeddedFont>
       <p:font typeface="Inter"/>
-      <p:bold r:id="rId38"/>
-      <p:boldItalic r:id="rId39"/>
+      <p:bold r:id="rId39"/>
+      <p:boldItalic r:id="rId40"/>
     </p:embeddedFont>
     <p:embeddedFont>
       <p:font typeface="Inter ExtraBold"/>
-      <p:bold r:id="rId40"/>
-      <p:boldItalic r:id="rId41"/>
+      <p:bold r:id="rId41"/>
+      <p:boldItalic r:id="rId42"/>
+    </p:embeddedFont>
+    <p:embeddedFont>
+      <p:font typeface="Inter Medium"/>
+      <p:regular r:id="rId43"/>
+      <p:bold r:id="rId44"/>
+      <p:italic r:id="rId45"/>
+      <p:boldItalic r:id="rId46"/>
     </p:embeddedFont>
   </p:embeddedFontLst>
   <p:defaultTextStyle>
@@ -839,7 +846,7 @@
   <p:cSld>
     <p:spTree>
       <p:nvGrpSpPr>
-        <p:cNvPr id="137" name="Shape 137"/>
+        <p:cNvPr id="143" name="Shape 143"/>
         <p:cNvGrpSpPr/>
         <p:nvPr/>
       </p:nvGrpSpPr>
@@ -853,7 +860,7 @@
       </p:grpSpPr>
       <p:sp>
         <p:nvSpPr>
-          <p:cNvPr id="138" name="Google Shape;138;g364c02cc92f_0_86:notes"/>
+          <p:cNvPr id="144" name="Google Shape;144;g3f40202e321_120_180:notes"/>
           <p:cNvSpPr/>
           <p:nvPr>
             <p:ph idx="2" type="sldImg"/>
@@ -888,7 +895,7 @@
       </p:sp>
       <p:sp>
         <p:nvSpPr>
-          <p:cNvPr id="139" name="Google Shape;139;g364c02cc92f_0_86:notes"/>
+          <p:cNvPr id="145" name="Google Shape;145;g3f40202e321_120_180:notes"/>
           <p:cNvSpPr txBox="1"/>
           <p:nvPr>
             <p:ph idx="1" type="body"/>
@@ -938,7 +945,7 @@
   <p:cSld>
     <p:spTree>
       <p:nvGrpSpPr>
-        <p:cNvPr id="143" name="Shape 143"/>
+        <p:cNvPr id="162" name="Shape 162"/>
         <p:cNvGrpSpPr/>
         <p:nvPr/>
       </p:nvGrpSpPr>
@@ -952,7 +959,7 @@
       </p:grpSpPr>
       <p:sp>
         <p:nvSpPr>
-          <p:cNvPr id="144" name="Google Shape;144;g3f4019a4882_0_62:notes"/>
+          <p:cNvPr id="163" name="Google Shape;163;g3f4019a4882_0_62:notes"/>
           <p:cNvSpPr/>
           <p:nvPr>
             <p:ph idx="2" type="sldImg"/>
@@ -987,7 +994,7 @@
       </p:sp>
       <p:sp>
         <p:nvSpPr>
-          <p:cNvPr id="145" name="Google Shape;145;g3f4019a4882_0_62:notes"/>
+          <p:cNvPr id="164" name="Google Shape;164;g3f4019a4882_0_62:notes"/>
           <p:cNvSpPr txBox="1"/>
           <p:nvPr>
             <p:ph idx="1" type="body"/>
@@ -1037,7 +1044,7 @@
   <p:cSld>
     <p:spTree>
       <p:nvGrpSpPr>
-        <p:cNvPr id="160" name="Shape 160"/>
+        <p:cNvPr id="179" name="Shape 179"/>
         <p:cNvGrpSpPr/>
         <p:nvPr/>
       </p:nvGrpSpPr>
@@ -1051,7 +1058,7 @@
       </p:grpSpPr>
       <p:sp>
         <p:nvSpPr>
-          <p:cNvPr id="161" name="Google Shape;161;g364c02cc92f_0_96:notes"/>
+          <p:cNvPr id="180" name="Google Shape;180;g364c02cc92f_0_96:notes"/>
           <p:cNvSpPr/>
           <p:nvPr>
             <p:ph idx="2" type="sldImg"/>
@@ -1086,7 +1093,7 @@
       </p:sp>
       <p:sp>
         <p:nvSpPr>
-          <p:cNvPr id="162" name="Google Shape;162;g364c02cc92f_0_96:notes"/>
+          <p:cNvPr id="181" name="Google Shape;181;g364c02cc92f_0_96:notes"/>
           <p:cNvSpPr txBox="1"/>
           <p:nvPr>
             <p:ph idx="1" type="body"/>
@@ -1136,7 +1143,7 @@
   <p:cSld>
     <p:spTree>
       <p:nvGrpSpPr>
-        <p:cNvPr id="175" name="Shape 175"/>
+        <p:cNvPr id="194" name="Shape 194"/>
         <p:cNvGrpSpPr/>
         <p:nvPr/>
       </p:nvGrpSpPr>
@@ -1150,7 +1157,7 @@
       </p:grpSpPr>
       <p:sp>
         <p:nvSpPr>
-          <p:cNvPr id="176" name="Google Shape;176;g364c02cc92f_0_102:notes"/>
+          <p:cNvPr id="195" name="Google Shape;195;g364c02cc92f_0_102:notes"/>
           <p:cNvSpPr/>
           <p:nvPr>
             <p:ph idx="2" type="sldImg"/>
@@ -1185,7 +1192,7 @@
       </p:sp>
       <p:sp>
         <p:nvSpPr>
-          <p:cNvPr id="177" name="Google Shape;177;g364c02cc92f_0_102:notes"/>
+          <p:cNvPr id="196" name="Google Shape;196;g364c02cc92f_0_102:notes"/>
           <p:cNvSpPr txBox="1"/>
           <p:nvPr>
             <p:ph idx="1" type="body"/>
@@ -1235,7 +1242,7 @@
   <p:cSld>
     <p:spTree>
       <p:nvGrpSpPr>
-        <p:cNvPr id="181" name="Shape 181"/>
+        <p:cNvPr id="211" name="Shape 211"/>
         <p:cNvGrpSpPr/>
         <p:nvPr/>
       </p:nvGrpSpPr>
@@ -1249,7 +1256,7 @@
       </p:grpSpPr>
       <p:sp>
         <p:nvSpPr>
-          <p:cNvPr id="182" name="Google Shape;182;g364c02cc92f_0_107:notes"/>
+          <p:cNvPr id="212" name="Google Shape;212;g364c02cc92f_0_107:notes"/>
           <p:cNvSpPr/>
           <p:nvPr>
             <p:ph idx="2" type="sldImg"/>
@@ -1284,7 +1291,7 @@
       </p:sp>
       <p:sp>
         <p:nvSpPr>
-          <p:cNvPr id="183" name="Google Shape;183;g364c02cc92f_0_107:notes"/>
+          <p:cNvPr id="213" name="Google Shape;213;g364c02cc92f_0_107:notes"/>
           <p:cNvSpPr txBox="1"/>
           <p:nvPr>
             <p:ph idx="1" type="body"/>
@@ -1334,7 +1341,7 @@
   <p:cSld>
     <p:spTree>
       <p:nvGrpSpPr>
-        <p:cNvPr id="186" name="Shape 186"/>
+        <p:cNvPr id="216" name="Shape 216"/>
         <p:cNvGrpSpPr/>
         <p:nvPr/>
       </p:nvGrpSpPr>
@@ -1348,7 +1355,7 @@
       </p:grpSpPr>
       <p:sp>
         <p:nvSpPr>
-          <p:cNvPr id="187" name="Google Shape;187;g364c02cc92f_0_111:notes"/>
+          <p:cNvPr id="217" name="Google Shape;217;g364c02cc92f_0_111:notes"/>
           <p:cNvSpPr/>
           <p:nvPr>
             <p:ph idx="2" type="sldImg"/>
@@ -1383,7 +1390,7 @@
       </p:sp>
       <p:sp>
         <p:nvSpPr>
-          <p:cNvPr id="188" name="Google Shape;188;g364c02cc92f_0_111:notes"/>
+          <p:cNvPr id="218" name="Google Shape;218;g364c02cc92f_0_111:notes"/>
           <p:cNvSpPr txBox="1"/>
           <p:nvPr>
             <p:ph idx="1" type="body"/>
@@ -1433,7 +1440,7 @@
   <p:cSld>
     <p:spTree>
       <p:nvGrpSpPr>
-        <p:cNvPr id="191" name="Shape 191"/>
+        <p:cNvPr id="221" name="Shape 221"/>
         <p:cNvGrpSpPr/>
         <p:nvPr/>
       </p:nvGrpSpPr>
@@ -1447,7 +1454,7 @@
       </p:grpSpPr>
       <p:sp>
         <p:nvSpPr>
-          <p:cNvPr id="192" name="Google Shape;192;g3f84df5010e_0_67:notes"/>
+          <p:cNvPr id="222" name="Google Shape;222;g3f84df5010e_0_67:notes"/>
           <p:cNvSpPr/>
           <p:nvPr>
             <p:ph idx="2" type="sldImg"/>
@@ -1482,7 +1489,7 @@
       </p:sp>
       <p:sp>
         <p:nvSpPr>
-          <p:cNvPr id="193" name="Google Shape;193;g3f84df5010e_0_67:notes"/>
+          <p:cNvPr id="223" name="Google Shape;223;g3f84df5010e_0_67:notes"/>
           <p:cNvSpPr txBox="1"/>
           <p:nvPr>
             <p:ph idx="1" type="body"/>
@@ -1532,7 +1539,7 @@
   <p:cSld>
     <p:spTree>
       <p:nvGrpSpPr>
-        <p:cNvPr id="214" name="Shape 214"/>
+        <p:cNvPr id="244" name="Shape 244"/>
         <p:cNvGrpSpPr/>
         <p:nvPr/>
       </p:nvGrpSpPr>
@@ -1546,7 +1553,7 @@
       </p:grpSpPr>
       <p:sp>
         <p:nvSpPr>
-          <p:cNvPr id="215" name="Google Shape;215;g3f4019a4882_0_669:notes"/>
+          <p:cNvPr id="245" name="Google Shape;245;g3f4019a4882_0_669:notes"/>
           <p:cNvSpPr/>
           <p:nvPr>
             <p:ph idx="2" type="sldImg"/>
@@ -1581,7 +1588,7 @@
       </p:sp>
       <p:sp>
         <p:nvSpPr>
-          <p:cNvPr id="216" name="Google Shape;216;g3f4019a4882_0_669:notes"/>
+          <p:cNvPr id="246" name="Google Shape;246;g3f4019a4882_0_669:notes"/>
           <p:cNvSpPr txBox="1"/>
           <p:nvPr>
             <p:ph idx="1" type="body"/>
@@ -1631,7 +1638,7 @@
   <p:cSld>
     <p:spTree>
       <p:nvGrpSpPr>
-        <p:cNvPr id="233" name="Shape 233"/>
+        <p:cNvPr id="263" name="Shape 263"/>
         <p:cNvGrpSpPr/>
         <p:nvPr/>
       </p:nvGrpSpPr>
@@ -1645,7 +1652,7 @@
       </p:grpSpPr>
       <p:sp>
         <p:nvSpPr>
-          <p:cNvPr id="234" name="Google Shape;234;g364c02cc92f_0_151:notes"/>
+          <p:cNvPr id="264" name="Google Shape;264;g364c02cc92f_0_151:notes"/>
           <p:cNvSpPr/>
           <p:nvPr>
             <p:ph idx="2" type="sldImg"/>
@@ -1680,7 +1687,7 @@
       </p:sp>
       <p:sp>
         <p:nvSpPr>
-          <p:cNvPr id="235" name="Google Shape;235;g364c02cc92f_0_151:notes"/>
+          <p:cNvPr id="265" name="Google Shape;265;g364c02cc92f_0_151:notes"/>
           <p:cNvSpPr txBox="1"/>
           <p:nvPr>
             <p:ph idx="1" type="body"/>
@@ -1730,7 +1737,7 @@
   <p:cSld>
     <p:spTree>
       <p:nvGrpSpPr>
-        <p:cNvPr id="252" name="Shape 252"/>
+        <p:cNvPr id="282" name="Shape 282"/>
         <p:cNvGrpSpPr/>
         <p:nvPr/>
       </p:nvGrpSpPr>
@@ -1744,7 +1751,7 @@
       </p:grpSpPr>
       <p:sp>
         <p:nvSpPr>
-          <p:cNvPr id="253" name="Google Shape;253;g364c02cc92f_0_138:notes"/>
+          <p:cNvPr id="283" name="Google Shape;283;g364c02cc92f_0_138:notes"/>
           <p:cNvSpPr/>
           <p:nvPr>
             <p:ph idx="2" type="sldImg"/>
@@ -1779,7 +1786,7 @@
       </p:sp>
       <p:sp>
         <p:nvSpPr>
-          <p:cNvPr id="254" name="Google Shape;254;g364c02cc92f_0_138:notes"/>
+          <p:cNvPr id="284" name="Google Shape;284;g364c02cc92f_0_138:notes"/>
           <p:cNvSpPr txBox="1"/>
           <p:nvPr>
             <p:ph idx="1" type="body"/>
@@ -1928,7 +1935,7 @@
   <p:cSld>
     <p:spTree>
       <p:nvGrpSpPr>
-        <p:cNvPr id="259" name="Shape 259"/>
+        <p:cNvPr id="289" name="Shape 289"/>
         <p:cNvGrpSpPr/>
         <p:nvPr/>
       </p:nvGrpSpPr>
@@ -1942,7 +1949,7 @@
       </p:grpSpPr>
       <p:sp>
         <p:nvSpPr>
-          <p:cNvPr id="260" name="Google Shape;260;g364c02cc92f_0_156:notes"/>
+          <p:cNvPr id="290" name="Google Shape;290;g364c02cc92f_0_156:notes"/>
           <p:cNvSpPr/>
           <p:nvPr>
             <p:ph idx="2" type="sldImg"/>
@@ -1977,7 +1984,7 @@
       </p:sp>
       <p:sp>
         <p:nvSpPr>
-          <p:cNvPr id="261" name="Google Shape;261;g364c02cc92f_0_156:notes"/>
+          <p:cNvPr id="291" name="Google Shape;291;g364c02cc92f_0_156:notes"/>
           <p:cNvSpPr txBox="1"/>
           <p:nvPr>
             <p:ph idx="1" type="body"/>
@@ -2027,7 +2034,7 @@
   <p:cSld>
     <p:spTree>
       <p:nvGrpSpPr>
-        <p:cNvPr id="266" name="Shape 266"/>
+        <p:cNvPr id="296" name="Shape 296"/>
         <p:cNvGrpSpPr/>
         <p:nvPr/>
       </p:nvGrpSpPr>
@@ -2041,7 +2048,7 @@
       </p:grpSpPr>
       <p:sp>
         <p:nvSpPr>
-          <p:cNvPr id="267" name="Google Shape;267;g364c02cc92f_0_165:notes"/>
+          <p:cNvPr id="297" name="Google Shape;297;g364c02cc92f_0_165:notes"/>
           <p:cNvSpPr/>
           <p:nvPr>
             <p:ph idx="2" type="sldImg"/>
@@ -2076,7 +2083,7 @@
       </p:sp>
       <p:sp>
         <p:nvSpPr>
-          <p:cNvPr id="268" name="Google Shape;268;g364c02cc92f_0_165:notes"/>
+          <p:cNvPr id="298" name="Google Shape;298;g364c02cc92f_0_165:notes"/>
           <p:cNvSpPr txBox="1"/>
           <p:nvPr>
             <p:ph idx="1" type="body"/>
@@ -2126,7 +2133,7 @@
   <p:cSld>
     <p:spTree>
       <p:nvGrpSpPr>
-        <p:cNvPr id="286" name="Shape 286"/>
+        <p:cNvPr id="316" name="Shape 316"/>
         <p:cNvGrpSpPr/>
         <p:nvPr/>
       </p:nvGrpSpPr>
@@ -2140,7 +2147,7 @@
       </p:grpSpPr>
       <p:sp>
         <p:nvSpPr>
-          <p:cNvPr id="287" name="Google Shape;287;g364c02cc92f_0_177:notes"/>
+          <p:cNvPr id="317" name="Google Shape;317;g364c02cc92f_0_177:notes"/>
           <p:cNvSpPr/>
           <p:nvPr>
             <p:ph idx="2" type="sldImg"/>
@@ -2175,7 +2182,7 @@
       </p:sp>
       <p:sp>
         <p:nvSpPr>
-          <p:cNvPr id="288" name="Google Shape;288;g364c02cc92f_0_177:notes"/>
+          <p:cNvPr id="318" name="Google Shape;318;g364c02cc92f_0_177:notes"/>
           <p:cNvSpPr txBox="1"/>
           <p:nvPr>
             <p:ph idx="1" type="body"/>
@@ -2225,7 +2232,7 @@
   <p:cSld>
     <p:spTree>
       <p:nvGrpSpPr>
-        <p:cNvPr id="294" name="Shape 294"/>
+        <p:cNvPr id="324" name="Shape 324"/>
         <p:cNvGrpSpPr/>
         <p:nvPr/>
       </p:nvGrpSpPr>
@@ -2239,7 +2246,7 @@
       </p:grpSpPr>
       <p:sp>
         <p:nvSpPr>
-          <p:cNvPr id="295" name="Google Shape;295;g364c02cc92f_0_185:notes"/>
+          <p:cNvPr id="325" name="Google Shape;325;g364c02cc92f_0_185:notes"/>
           <p:cNvSpPr/>
           <p:nvPr>
             <p:ph idx="2" type="sldImg"/>
@@ -2274,7 +2281,7 @@
       </p:sp>
       <p:sp>
         <p:nvSpPr>
-          <p:cNvPr id="296" name="Google Shape;296;g364c02cc92f_0_185:notes"/>
+          <p:cNvPr id="326" name="Google Shape;326;g364c02cc92f_0_185:notes"/>
           <p:cNvSpPr txBox="1"/>
           <p:nvPr>
             <p:ph idx="1" type="body"/>
@@ -2324,7 +2331,7 @@
   <p:cSld>
     <p:spTree>
       <p:nvGrpSpPr>
-        <p:cNvPr id="303" name="Shape 303"/>
+        <p:cNvPr id="333" name="Shape 333"/>
         <p:cNvGrpSpPr/>
         <p:nvPr/>
       </p:nvGrpSpPr>
@@ -2338,7 +2345,7 @@
       </p:grpSpPr>
       <p:sp>
         <p:nvSpPr>
-          <p:cNvPr id="304" name="Google Shape;304;g364c02cc92f_0_193:notes"/>
+          <p:cNvPr id="334" name="Google Shape;334;g364c02cc92f_0_193:notes"/>
           <p:cNvSpPr/>
           <p:nvPr>
             <p:ph idx="2" type="sldImg"/>
@@ -2373,7 +2380,7 @@
       </p:sp>
       <p:sp>
         <p:nvSpPr>
-          <p:cNvPr id="305" name="Google Shape;305;g364c02cc92f_0_193:notes"/>
+          <p:cNvPr id="335" name="Google Shape;335;g364c02cc92f_0_193:notes"/>
           <p:cNvSpPr txBox="1"/>
           <p:nvPr>
             <p:ph idx="1" type="body"/>
@@ -2423,7 +2430,7 @@
   <p:cSld>
     <p:spTree>
       <p:nvGrpSpPr>
-        <p:cNvPr id="309" name="Shape 309"/>
+        <p:cNvPr id="339" name="Shape 339"/>
         <p:cNvGrpSpPr/>
         <p:nvPr/>
       </p:nvGrpSpPr>
@@ -2437,7 +2444,7 @@
       </p:grpSpPr>
       <p:sp>
         <p:nvSpPr>
-          <p:cNvPr id="310" name="Google Shape;310;g364c02cc92f_0_172:notes"/>
+          <p:cNvPr id="340" name="Google Shape;340;g364c02cc92f_0_172:notes"/>
           <p:cNvSpPr/>
           <p:nvPr>
             <p:ph idx="2" type="sldImg"/>
@@ -2472,7 +2479,7 @@
       </p:sp>
       <p:sp>
         <p:nvSpPr>
-          <p:cNvPr id="311" name="Google Shape;311;g364c02cc92f_0_172:notes"/>
+          <p:cNvPr id="341" name="Google Shape;341;g364c02cc92f_0_172:notes"/>
           <p:cNvSpPr txBox="1"/>
           <p:nvPr>
             <p:ph idx="1" type="body"/>
@@ -2522,7 +2529,7 @@
   <p:cSld>
     <p:spTree>
       <p:nvGrpSpPr>
-        <p:cNvPr id="314" name="Shape 314"/>
+        <p:cNvPr id="344" name="Shape 344"/>
         <p:cNvGrpSpPr/>
         <p:nvPr/>
       </p:nvGrpSpPr>
@@ -2536,7 +2543,7 @@
       </p:grpSpPr>
       <p:sp>
         <p:nvSpPr>
-          <p:cNvPr id="315" name="Google Shape;315;g364c02cc92f_0_198:notes"/>
+          <p:cNvPr id="345" name="Google Shape;345;g364c02cc92f_0_198:notes"/>
           <p:cNvSpPr/>
           <p:nvPr>
             <p:ph idx="2" type="sldImg"/>
@@ -2571,7 +2578,7 @@
       </p:sp>
       <p:sp>
         <p:nvSpPr>
-          <p:cNvPr id="316" name="Google Shape;316;g364c02cc92f_0_198:notes"/>
+          <p:cNvPr id="346" name="Google Shape;346;g364c02cc92f_0_198:notes"/>
           <p:cNvSpPr txBox="1"/>
           <p:nvPr>
             <p:ph idx="1" type="body"/>
@@ -2918,7 +2925,7 @@
   <p:cSld>
     <p:spTree>
       <p:nvGrpSpPr>
-        <p:cNvPr id="91" name="Shape 91"/>
+        <p:cNvPr id="92" name="Shape 92"/>
         <p:cNvGrpSpPr/>
         <p:nvPr/>
       </p:nvGrpSpPr>
@@ -2932,7 +2939,7 @@
       </p:grpSpPr>
       <p:sp>
         <p:nvSpPr>
-          <p:cNvPr id="92" name="Google Shape;92;g364c02cc92f_0_21:notes"/>
+          <p:cNvPr id="93" name="Google Shape;93;g364c02cc92f_0_21:notes"/>
           <p:cNvSpPr/>
           <p:nvPr>
             <p:ph idx="2" type="sldImg"/>
@@ -2967,7 +2974,7 @@
       </p:sp>
       <p:sp>
         <p:nvSpPr>
-          <p:cNvPr id="93" name="Google Shape;93;g364c02cc92f_0_21:notes"/>
+          <p:cNvPr id="94" name="Google Shape;94;g364c02cc92f_0_21:notes"/>
           <p:cNvSpPr txBox="1"/>
           <p:nvPr>
             <p:ph idx="1" type="body"/>
@@ -3017,7 +3024,7 @@
   <p:cSld>
     <p:spTree>
       <p:nvGrpSpPr>
-        <p:cNvPr id="106" name="Shape 106"/>
+        <p:cNvPr id="107" name="Shape 107"/>
         <p:cNvGrpSpPr/>
         <p:nvPr/>
       </p:nvGrpSpPr>
@@ -3031,7 +3038,7 @@
       </p:grpSpPr>
       <p:sp>
         <p:nvSpPr>
-          <p:cNvPr id="107" name="Google Shape;107;g364c02cc92f_0_26:notes"/>
+          <p:cNvPr id="108" name="Google Shape;108;g364c02cc92f_0_26:notes"/>
           <p:cNvSpPr/>
           <p:nvPr>
             <p:ph idx="2" type="sldImg"/>
@@ -3066,7 +3073,7 @@
       </p:sp>
       <p:sp>
         <p:nvSpPr>
-          <p:cNvPr id="108" name="Google Shape;108;g364c02cc92f_0_26:notes"/>
+          <p:cNvPr id="109" name="Google Shape;109;g364c02cc92f_0_26:notes"/>
           <p:cNvSpPr txBox="1"/>
           <p:nvPr>
             <p:ph idx="1" type="body"/>
@@ -3116,7 +3123,7 @@
   <p:cSld>
     <p:spTree>
       <p:nvGrpSpPr>
-        <p:cNvPr id="126" name="Shape 126"/>
+        <p:cNvPr id="127" name="Shape 127"/>
         <p:cNvGrpSpPr/>
         <p:nvPr/>
       </p:nvGrpSpPr>
@@ -3130,7 +3137,7 @@
       </p:grpSpPr>
       <p:sp>
         <p:nvSpPr>
-          <p:cNvPr id="127" name="Google Shape;127;g364c02cc92f_0_31:notes"/>
+          <p:cNvPr id="128" name="Google Shape;128;g364c02cc92f_0_31:notes"/>
           <p:cNvSpPr/>
           <p:nvPr>
             <p:ph idx="2" type="sldImg"/>
@@ -3165,7 +3172,7 @@
       </p:sp>
       <p:sp>
         <p:nvSpPr>
-          <p:cNvPr id="128" name="Google Shape;128;g364c02cc92f_0_31:notes"/>
+          <p:cNvPr id="129" name="Google Shape;129;g364c02cc92f_0_31:notes"/>
           <p:cNvSpPr txBox="1"/>
           <p:nvPr>
             <p:ph idx="1" type="body"/>
@@ -3215,7 +3222,7 @@
   <p:cSld>
     <p:spTree>
       <p:nvGrpSpPr>
-        <p:cNvPr id="131" name="Shape 131"/>
+        <p:cNvPr id="132" name="Shape 132"/>
         <p:cNvGrpSpPr/>
         <p:nvPr/>
       </p:nvGrpSpPr>
@@ -3229,7 +3236,7 @@
       </p:grpSpPr>
       <p:sp>
         <p:nvSpPr>
-          <p:cNvPr id="132" name="Google Shape;132;g364c02cc92f_0_81:notes"/>
+          <p:cNvPr id="133" name="Google Shape;133;g364c02cc92f_0_81:notes"/>
           <p:cNvSpPr/>
           <p:nvPr>
             <p:ph idx="2" type="sldImg"/>
@@ -3264,7 +3271,7 @@
       </p:sp>
       <p:sp>
         <p:nvSpPr>
-          <p:cNvPr id="133" name="Google Shape;133;g364c02cc92f_0_81:notes"/>
+          <p:cNvPr id="134" name="Google Shape;134;g364c02cc92f_0_81:notes"/>
           <p:cNvSpPr txBox="1"/>
           <p:nvPr>
             <p:ph idx="1" type="body"/>
@@ -8132,7 +8139,7 @@
   <p:cSld>
     <p:spTree>
       <p:nvGrpSpPr>
-        <p:cNvPr id="140" name="Shape 140"/>
+        <p:cNvPr id="146" name="Shape 146"/>
         <p:cNvGrpSpPr/>
         <p:nvPr/>
       </p:nvGrpSpPr>
@@ -8144,424 +8151,922 @@
           <a:chExt cx="0" cy="0"/>
         </a:xfrm>
       </p:grpSpPr>
-      <p:sp>
-        <p:nvSpPr>
-          <p:cNvPr id="141" name="Google Shape;141;p22"/>
-          <p:cNvSpPr txBox="1"/>
-          <p:nvPr>
-            <p:ph type="title"/>
-          </p:nvPr>
-        </p:nvSpPr>
-        <p:spPr>
+      <p:grpSp>
+        <p:nvGrpSpPr>
+          <p:cNvPr id="147" name="Google Shape;147;p22"/>
+          <p:cNvGrpSpPr/>
+          <p:nvPr/>
+        </p:nvGrpSpPr>
+        <p:grpSpPr>
           <a:xfrm>
-            <a:off x="311700" y="445025"/>
-            <a:ext cx="8520600" cy="572700"/>
+            <a:off x="571500" y="476250"/>
+            <a:ext cx="8001000" cy="1047900"/>
+            <a:chOff x="0" y="0"/>
+            <a:chExt cx="8001000" cy="1047900"/>
           </a:xfrm>
-          <a:prstGeom prst="rect">
-            <a:avLst/>
-          </a:prstGeom>
-        </p:spPr>
-        <p:txBody>
-          <a:bodyPr anchorCtr="0" anchor="t" bIns="91425" lIns="91425" spcFirstLastPara="1" rIns="91425" wrap="square" tIns="91425">
-            <a:normAutofit fontScale="90000"/>
-          </a:bodyPr>
-          <a:lstStyle/>
-          <a:p>
-            <a:pPr indent="0" lvl="0" marL="0" rtl="0" algn="l">
-              <a:spcBef>
-                <a:spcPts val="0"/>
-              </a:spcBef>
-              <a:spcAft>
-                <a:spcPts val="0"/>
-              </a:spcAft>
-              <a:buNone/>
-            </a:pPr>
-            <a:r>
-              <a:rPr lang="en"/>
-              <a:t>What will you get out of this class?</a:t>
-            </a:r>
-            <a:endParaRPr/>
-          </a:p>
-        </p:txBody>
-      </p:sp>
-      <p:sp>
-        <p:nvSpPr>
-          <p:cNvPr id="142" name="Google Shape;142;p22"/>
-          <p:cNvSpPr txBox="1"/>
-          <p:nvPr>
-            <p:ph idx="1" type="body"/>
-          </p:nvPr>
-        </p:nvSpPr>
-        <p:spPr>
+        </p:grpSpPr>
+        <p:sp>
+          <p:nvSpPr>
+            <p:cNvPr id="148" name="Google Shape;148;p22"/>
+            <p:cNvSpPr/>
+            <p:nvPr/>
+          </p:nvSpPr>
+          <p:spPr>
+            <a:xfrm>
+              <a:off x="0" y="0"/>
+              <a:ext cx="8001000" cy="1047900"/>
+            </a:xfrm>
+            <a:prstGeom prst="rect">
+              <a:avLst/>
+            </a:prstGeom>
+            <a:solidFill>
+              <a:srgbClr val="000000">
+                <a:alpha val="0"/>
+              </a:srgbClr>
+            </a:solidFill>
+            <a:ln>
+              <a:noFill/>
+            </a:ln>
+          </p:spPr>
+          <p:txBody>
+            <a:bodyPr anchorCtr="0" anchor="ctr" bIns="0" lIns="0" spcFirstLastPara="1" rIns="0" wrap="square" tIns="0">
+              <a:noAutofit/>
+            </a:bodyPr>
+            <a:lstStyle/>
+            <a:p>
+              <a:pPr indent="0" lvl="0" marL="0" rtl="0" algn="l">
+                <a:spcBef>
+                  <a:spcPts val="0"/>
+                </a:spcBef>
+                <a:spcAft>
+                  <a:spcPts val="0"/>
+                </a:spcAft>
+                <a:buNone/>
+              </a:pPr>
+              <a:r>
+                <a:t/>
+              </a:r>
+              <a:endParaRPr/>
+            </a:p>
+          </p:txBody>
+        </p:sp>
+        <p:sp>
+          <p:nvSpPr>
+            <p:cNvPr id="149" name="Google Shape;149;p22"/>
+            <p:cNvSpPr txBox="1"/>
+            <p:nvPr/>
+          </p:nvSpPr>
+          <p:spPr>
+            <a:xfrm>
+              <a:off x="0" y="0"/>
+              <a:ext cx="8001000" cy="1047900"/>
+            </a:xfrm>
+            <a:prstGeom prst="rect">
+              <a:avLst/>
+            </a:prstGeom>
+            <a:noFill/>
+            <a:ln>
+              <a:noFill/>
+            </a:ln>
+          </p:spPr>
+          <p:txBody>
+            <a:bodyPr anchorCtr="0" anchor="t" bIns="0" lIns="0" spcFirstLastPara="1" rIns="0" wrap="square" tIns="0">
+              <a:noAutofit/>
+            </a:bodyPr>
+            <a:lstStyle/>
+            <a:p>
+              <a:pPr indent="0" lvl="0" marL="0" rtl="0" algn="l">
+                <a:spcBef>
+                  <a:spcPts val="0"/>
+                </a:spcBef>
+                <a:spcAft>
+                  <a:spcPts val="0"/>
+                </a:spcAft>
+                <a:buNone/>
+              </a:pPr>
+              <a:r>
+                <a:rPr b="0" i="0" lang="en" sz="3200">
+                  <a:solidFill>
+                    <a:srgbClr val="0F172A"/>
+                  </a:solidFill>
+                  <a:latin typeface="Inter ExtraBold"/>
+                  <a:ea typeface="Inter ExtraBold"/>
+                  <a:cs typeface="Inter ExtraBold"/>
+                  <a:sym typeface="Inter ExtraBold"/>
+                </a:rPr>
+                <a:t>What will you get out of this class?</a:t>
+              </a:r>
+              <a:endParaRPr b="0" i="0" sz="3200">
+                <a:solidFill>
+                  <a:srgbClr val="0F172A"/>
+                </a:solidFill>
+                <a:latin typeface="Inter ExtraBold"/>
+                <a:ea typeface="Inter ExtraBold"/>
+                <a:cs typeface="Inter ExtraBold"/>
+                <a:sym typeface="Inter ExtraBold"/>
+              </a:endParaRPr>
+            </a:p>
+            <a:p>
+              <a:pPr indent="0" lvl="0" marL="0" rtl="0" algn="l">
+                <a:spcBef>
+                  <a:spcPts val="600"/>
+                </a:spcBef>
+                <a:spcAft>
+                  <a:spcPts val="0"/>
+                </a:spcAft>
+                <a:buNone/>
+              </a:pPr>
+              <a:r>
+                <a:rPr b="0" i="0" lang="en" sz="1600">
+                  <a:solidFill>
+                    <a:srgbClr val="64748B"/>
+                  </a:solidFill>
+                  <a:latin typeface="Inter"/>
+                  <a:ea typeface="Inter"/>
+                  <a:cs typeface="Inter"/>
+                  <a:sym typeface="Inter"/>
+                </a:rPr>
+                <a:t>More specifically:</a:t>
+              </a:r>
+              <a:endParaRPr b="0" i="0" sz="1600">
+                <a:solidFill>
+                  <a:srgbClr val="64748B"/>
+                </a:solidFill>
+                <a:latin typeface="Inter"/>
+                <a:ea typeface="Inter"/>
+                <a:cs typeface="Inter"/>
+                <a:sym typeface="Inter"/>
+              </a:endParaRPr>
+            </a:p>
+          </p:txBody>
+        </p:sp>
+      </p:grpSp>
+      <p:grpSp>
+        <p:nvGrpSpPr>
+          <p:cNvPr id="150" name="Google Shape;150;p22"/>
+          <p:cNvGrpSpPr/>
+          <p:nvPr/>
+        </p:nvGrpSpPr>
+        <p:grpSpPr>
           <a:xfrm>
-            <a:off x="311700" y="1152475"/>
-            <a:ext cx="8520600" cy="3416400"/>
+            <a:off x="571500" y="1714500"/>
+            <a:ext cx="2476500" cy="2762400"/>
+            <a:chOff x="0" y="0"/>
+            <a:chExt cx="2476500" cy="2762400"/>
           </a:xfrm>
-          <a:prstGeom prst="rect">
-            <a:avLst/>
-          </a:prstGeom>
-        </p:spPr>
-        <p:txBody>
-          <a:bodyPr anchorCtr="0" anchor="t" bIns="91425" lIns="91425" spcFirstLastPara="1" rIns="91425" wrap="square" tIns="91425">
-            <a:normAutofit/>
-          </a:bodyPr>
-          <a:lstStyle/>
-          <a:p>
-            <a:pPr indent="0" lvl="0" marL="0" rtl="0" algn="l">
-              <a:spcBef>
-                <a:spcPts val="0"/>
-              </a:spcBef>
-              <a:spcAft>
-                <a:spcPts val="0"/>
-              </a:spcAft>
-              <a:buNone/>
-            </a:pPr>
-            <a:r>
-              <a:rPr lang="en"/>
-              <a:t>More specifically:</a:t>
-            </a:r>
-            <a:endParaRPr/>
-          </a:p>
-          <a:p>
-            <a:pPr indent="0" lvl="0" marL="0" rtl="0" algn="l">
-              <a:lnSpc>
-                <a:spcPct val="100000"/>
-              </a:lnSpc>
-              <a:spcBef>
-                <a:spcPts val="1200"/>
-              </a:spcBef>
-              <a:spcAft>
-                <a:spcPts val="0"/>
-              </a:spcAft>
-              <a:buNone/>
-            </a:pPr>
-            <a:r>
-              <a:rPr b="1" lang="en" sz="1500">
+        </p:grpSpPr>
+        <p:sp>
+          <p:nvSpPr>
+            <p:cNvPr id="151" name="Google Shape;151;p22"/>
+            <p:cNvSpPr/>
+            <p:nvPr/>
+          </p:nvSpPr>
+          <p:spPr>
+            <a:xfrm>
+              <a:off x="0" y="0"/>
+              <a:ext cx="2476500" cy="2762400"/>
+            </a:xfrm>
+            <a:prstGeom prst="roundRect">
+              <a:avLst>
+                <a:gd fmla="val 6153" name="adj"/>
+              </a:avLst>
+            </a:prstGeom>
+            <a:solidFill>
+              <a:srgbClr val="FFFFFF"/>
+            </a:solidFill>
+            <a:ln cap="flat" cmpd="sng" w="14300">
+              <a:solidFill>
+                <a:srgbClr val="E2E8F0"/>
+              </a:solidFill>
+              <a:prstDash val="solid"/>
+              <a:round/>
+              <a:headEnd len="sm" w="sm" type="none"/>
+              <a:tailEnd len="sm" w="sm" type="none"/>
+            </a:ln>
+          </p:spPr>
+          <p:txBody>
+            <a:bodyPr anchorCtr="0" anchor="ctr" bIns="0" lIns="0" spcFirstLastPara="1" rIns="0" wrap="square" tIns="0">
+              <a:noAutofit/>
+            </a:bodyPr>
+            <a:lstStyle/>
+            <a:p>
+              <a:pPr indent="0" lvl="0" marL="0" rtl="0" algn="l">
+                <a:spcBef>
+                  <a:spcPts val="0"/>
+                </a:spcBef>
+                <a:spcAft>
+                  <a:spcPts val="0"/>
+                </a:spcAft>
+                <a:buNone/>
+              </a:pPr>
+              <a:r>
+                <a:t/>
+              </a:r>
+              <a:endParaRPr/>
+            </a:p>
+          </p:txBody>
+        </p:sp>
+        <p:sp>
+          <p:nvSpPr>
+            <p:cNvPr id="152" name="Google Shape;152;p22"/>
+            <p:cNvSpPr/>
+            <p:nvPr/>
+          </p:nvSpPr>
+          <p:spPr>
+            <a:xfrm>
+              <a:off x="228600" y="228600"/>
+              <a:ext cx="571500" cy="57300"/>
+            </a:xfrm>
+            <a:prstGeom prst="roundRect">
+              <a:avLst>
+                <a:gd fmla="val 50000" name="adj"/>
+              </a:avLst>
+            </a:prstGeom>
+            <a:solidFill>
+              <a:srgbClr val="3B82F6"/>
+            </a:solidFill>
+            <a:ln>
+              <a:noFill/>
+            </a:ln>
+          </p:spPr>
+          <p:txBody>
+            <a:bodyPr anchorCtr="0" anchor="ctr" bIns="0" lIns="0" spcFirstLastPara="1" rIns="0" wrap="square" tIns="0">
+              <a:noAutofit/>
+            </a:bodyPr>
+            <a:lstStyle/>
+            <a:p>
+              <a:pPr indent="0" lvl="0" marL="0" rtl="0" algn="l">
+                <a:spcBef>
+                  <a:spcPts val="0"/>
+                </a:spcBef>
+                <a:spcAft>
+                  <a:spcPts val="0"/>
+                </a:spcAft>
+                <a:buNone/>
+              </a:pPr>
+              <a:r>
+                <a:t/>
+              </a:r>
+              <a:endParaRPr/>
+            </a:p>
+          </p:txBody>
+        </p:sp>
+        <p:sp>
+          <p:nvSpPr>
+            <p:cNvPr id="153" name="Google Shape;153;p22"/>
+            <p:cNvSpPr txBox="1"/>
+            <p:nvPr/>
+          </p:nvSpPr>
+          <p:spPr>
+            <a:xfrm>
+              <a:off x="0" y="0"/>
+              <a:ext cx="2476500" cy="2762400"/>
+            </a:xfrm>
+            <a:prstGeom prst="rect">
+              <a:avLst/>
+            </a:prstGeom>
+            <a:noFill/>
+            <a:ln>
+              <a:noFill/>
+            </a:ln>
+          </p:spPr>
+          <p:txBody>
+            <a:bodyPr anchorCtr="0" anchor="t" bIns="190500" lIns="228600" spcFirstLastPara="1" rIns="190500" wrap="square" tIns="381000">
+              <a:noAutofit/>
+            </a:bodyPr>
+            <a:lstStyle/>
+            <a:p>
+              <a:pPr indent="0" lvl="0" marL="0" rtl="0" algn="l">
+                <a:spcBef>
+                  <a:spcPts val="1200"/>
+                </a:spcBef>
+                <a:spcAft>
+                  <a:spcPts val="0"/>
+                </a:spcAft>
+                <a:buNone/>
+              </a:pPr>
+              <a:r>
+                <a:rPr b="1" lang="en" sz="1100">
+                  <a:solidFill>
+                    <a:srgbClr val="3B82F6"/>
+                  </a:solidFill>
+                  <a:latin typeface="Inter"/>
+                  <a:ea typeface="Inter"/>
+                  <a:cs typeface="Inter"/>
+                  <a:sym typeface="Inter"/>
+                </a:rPr>
+                <a:t>DATA &amp; VISUALIZATION</a:t>
+              </a:r>
+              <a:endParaRPr b="1" sz="1100">
                 <a:solidFill>
-                  <a:schemeClr val="dk1"/>
+                  <a:srgbClr val="3B82F6"/>
                 </a:solidFill>
-                <a:latin typeface="Calibri"/>
-                <a:ea typeface="Calibri"/>
-                <a:cs typeface="Calibri"/>
-                <a:sym typeface="Calibri"/>
-              </a:rPr>
-              <a:t>Student Learning Outcomes</a:t>
-            </a:r>
-            <a:endParaRPr b="1" sz="1500">
+                <a:latin typeface="Inter"/>
+                <a:ea typeface="Inter"/>
+                <a:cs typeface="Inter"/>
+                <a:sym typeface="Inter"/>
+              </a:endParaRPr>
+            </a:p>
+            <a:p>
+              <a:pPr indent="-307975" lvl="0" marL="457200" rtl="0" algn="l">
+                <a:spcBef>
+                  <a:spcPts val="1200"/>
+                </a:spcBef>
+                <a:spcAft>
+                  <a:spcPts val="0"/>
+                </a:spcAft>
+                <a:buClr>
+                  <a:srgbClr val="334155"/>
+                </a:buClr>
+                <a:buSzPts val="1250"/>
+                <a:buFont typeface="Inter"/>
+                <a:buChar char="●"/>
+              </a:pPr>
+              <a:r>
+                <a:rPr b="0" lang="en" sz="1250">
+                  <a:solidFill>
+                    <a:srgbClr val="334155"/>
+                  </a:solidFill>
+                  <a:latin typeface="Inter"/>
+                  <a:ea typeface="Inter"/>
+                  <a:cs typeface="Inter"/>
+                  <a:sym typeface="Inter"/>
+                </a:rPr>
+                <a:t>Load data into R &amp; perform common data-wrangling</a:t>
+              </a:r>
+              <a:endParaRPr b="0" sz="1250">
+                <a:solidFill>
+                  <a:srgbClr val="334155"/>
+                </a:solidFill>
+                <a:latin typeface="Inter"/>
+                <a:ea typeface="Inter"/>
+                <a:cs typeface="Inter"/>
+                <a:sym typeface="Inter"/>
+              </a:endParaRPr>
+            </a:p>
+            <a:p>
+              <a:pPr indent="-307975" lvl="0" marL="457200" rtl="0" algn="l">
+                <a:spcBef>
+                  <a:spcPts val="750"/>
+                </a:spcBef>
+                <a:spcAft>
+                  <a:spcPts val="750"/>
+                </a:spcAft>
+                <a:buClr>
+                  <a:srgbClr val="334155"/>
+                </a:buClr>
+                <a:buSzPts val="1250"/>
+                <a:buFont typeface="Inter"/>
+                <a:buChar char="●"/>
+              </a:pPr>
+              <a:r>
+                <a:rPr b="0" lang="en" sz="1250">
+                  <a:solidFill>
+                    <a:srgbClr val="334155"/>
+                  </a:solidFill>
+                  <a:latin typeface="Inter"/>
+                  <a:ea typeface="Inter"/>
+                  <a:cs typeface="Inter"/>
+                  <a:sym typeface="Inter"/>
+                </a:rPr>
+                <a:t>Create plots using base R &amp; ggplot2</a:t>
+              </a:r>
+              <a:endParaRPr b="0" sz="1250">
+                <a:solidFill>
+                  <a:srgbClr val="334155"/>
+                </a:solidFill>
+                <a:latin typeface="Inter"/>
+                <a:ea typeface="Inter"/>
+                <a:cs typeface="Inter"/>
+                <a:sym typeface="Inter"/>
+              </a:endParaRPr>
+            </a:p>
+          </p:txBody>
+        </p:sp>
+      </p:grpSp>
+      <p:grpSp>
+        <p:nvGrpSpPr>
+          <p:cNvPr id="154" name="Google Shape;154;p22"/>
+          <p:cNvGrpSpPr/>
+          <p:nvPr/>
+        </p:nvGrpSpPr>
+        <p:grpSpPr>
+          <a:xfrm>
+            <a:off x="3333750" y="1714500"/>
+            <a:ext cx="2476500" cy="2762400"/>
+            <a:chOff x="0" y="0"/>
+            <a:chExt cx="2476500" cy="2762400"/>
+          </a:xfrm>
+        </p:grpSpPr>
+        <p:sp>
+          <p:nvSpPr>
+            <p:cNvPr id="155" name="Google Shape;155;p22"/>
+            <p:cNvSpPr/>
+            <p:nvPr/>
+          </p:nvSpPr>
+          <p:spPr>
+            <a:xfrm>
+              <a:off x="0" y="0"/>
+              <a:ext cx="2476500" cy="2762400"/>
+            </a:xfrm>
+            <a:prstGeom prst="roundRect">
+              <a:avLst>
+                <a:gd fmla="val 6153" name="adj"/>
+              </a:avLst>
+            </a:prstGeom>
+            <a:solidFill>
+              <a:srgbClr val="FFFFFF"/>
+            </a:solidFill>
+            <a:ln cap="flat" cmpd="sng" w="14300">
               <a:solidFill>
-                <a:schemeClr val="dk1"/>
+                <a:srgbClr val="E2E8F0"/>
               </a:solidFill>
-              <a:latin typeface="Calibri"/>
-              <a:ea typeface="Calibri"/>
-              <a:cs typeface="Calibri"/>
-              <a:sym typeface="Calibri"/>
-            </a:endParaRPr>
-          </a:p>
-          <a:p>
-            <a:pPr indent="0" lvl="0" marL="342900" rtl="0" algn="l">
-              <a:lnSpc>
-                <a:spcPct val="100000"/>
-              </a:lnSpc>
-              <a:spcBef>
-                <a:spcPts val="0"/>
-              </a:spcBef>
-              <a:spcAft>
-                <a:spcPts val="0"/>
-              </a:spcAft>
-              <a:buClr>
-                <a:schemeClr val="dk1"/>
-              </a:buClr>
-              <a:buSzPts val="1100"/>
-              <a:buFont typeface="Arial"/>
-              <a:buNone/>
-            </a:pPr>
-            <a:r>
-              <a:t/>
-            </a:r>
-            <a:endParaRPr sz="1400">
+              <a:prstDash val="solid"/>
+              <a:round/>
+              <a:headEnd len="sm" w="sm" type="none"/>
+              <a:tailEnd len="sm" w="sm" type="none"/>
+            </a:ln>
+          </p:spPr>
+          <p:txBody>
+            <a:bodyPr anchorCtr="0" anchor="ctr" bIns="0" lIns="0" spcFirstLastPara="1" rIns="0" wrap="square" tIns="0">
+              <a:noAutofit/>
+            </a:bodyPr>
+            <a:lstStyle/>
+            <a:p>
+              <a:pPr indent="0" lvl="0" marL="0" rtl="0" algn="l">
+                <a:spcBef>
+                  <a:spcPts val="0"/>
+                </a:spcBef>
+                <a:spcAft>
+                  <a:spcPts val="0"/>
+                </a:spcAft>
+                <a:buNone/>
+              </a:pPr>
+              <a:r>
+                <a:t/>
+              </a:r>
+              <a:endParaRPr/>
+            </a:p>
+          </p:txBody>
+        </p:sp>
+        <p:sp>
+          <p:nvSpPr>
+            <p:cNvPr id="156" name="Google Shape;156;p22"/>
+            <p:cNvSpPr/>
+            <p:nvPr/>
+          </p:nvSpPr>
+          <p:spPr>
+            <a:xfrm>
+              <a:off x="228600" y="228600"/>
+              <a:ext cx="571500" cy="57300"/>
+            </a:xfrm>
+            <a:prstGeom prst="roundRect">
+              <a:avLst>
+                <a:gd fmla="val 50000" name="adj"/>
+              </a:avLst>
+            </a:prstGeom>
+            <a:solidFill>
+              <a:srgbClr val="10B981"/>
+            </a:solidFill>
+            <a:ln>
+              <a:noFill/>
+            </a:ln>
+          </p:spPr>
+          <p:txBody>
+            <a:bodyPr anchorCtr="0" anchor="ctr" bIns="0" lIns="0" spcFirstLastPara="1" rIns="0" wrap="square" tIns="0">
+              <a:noAutofit/>
+            </a:bodyPr>
+            <a:lstStyle/>
+            <a:p>
+              <a:pPr indent="0" lvl="0" marL="0" rtl="0" algn="l">
+                <a:spcBef>
+                  <a:spcPts val="0"/>
+                </a:spcBef>
+                <a:spcAft>
+                  <a:spcPts val="0"/>
+                </a:spcAft>
+                <a:buNone/>
+              </a:pPr>
+              <a:r>
+                <a:t/>
+              </a:r>
+              <a:endParaRPr/>
+            </a:p>
+          </p:txBody>
+        </p:sp>
+        <p:sp>
+          <p:nvSpPr>
+            <p:cNvPr id="157" name="Google Shape;157;p22"/>
+            <p:cNvSpPr txBox="1"/>
+            <p:nvPr/>
+          </p:nvSpPr>
+          <p:spPr>
+            <a:xfrm>
+              <a:off x="0" y="0"/>
+              <a:ext cx="2476500" cy="2762400"/>
+            </a:xfrm>
+            <a:prstGeom prst="rect">
+              <a:avLst/>
+            </a:prstGeom>
+            <a:noFill/>
+            <a:ln>
+              <a:noFill/>
+            </a:ln>
+          </p:spPr>
+          <p:txBody>
+            <a:bodyPr anchorCtr="0" anchor="t" bIns="190500" lIns="228600" spcFirstLastPara="1" rIns="190500" wrap="square" tIns="381000">
+              <a:noAutofit/>
+            </a:bodyPr>
+            <a:lstStyle/>
+            <a:p>
+              <a:pPr indent="0" lvl="0" marL="0" rtl="0" algn="l">
+                <a:spcBef>
+                  <a:spcPts val="1200"/>
+                </a:spcBef>
+                <a:spcAft>
+                  <a:spcPts val="0"/>
+                </a:spcAft>
+                <a:buNone/>
+              </a:pPr>
+              <a:r>
+                <a:rPr b="1" lang="en" sz="1100">
+                  <a:solidFill>
+                    <a:srgbClr val="10B981"/>
+                  </a:solidFill>
+                  <a:latin typeface="Inter"/>
+                  <a:ea typeface="Inter"/>
+                  <a:cs typeface="Inter"/>
+                  <a:sym typeface="Inter"/>
+                </a:rPr>
+                <a:t>STATS &amp; ANALYSIS</a:t>
+              </a:r>
+              <a:endParaRPr b="1" sz="1100">
+                <a:solidFill>
+                  <a:srgbClr val="10B981"/>
+                </a:solidFill>
+                <a:latin typeface="Inter"/>
+                <a:ea typeface="Inter"/>
+                <a:cs typeface="Inter"/>
+                <a:sym typeface="Inter"/>
+              </a:endParaRPr>
+            </a:p>
+            <a:p>
+              <a:pPr indent="-307975" lvl="0" marL="457200" rtl="0" algn="l">
+                <a:spcBef>
+                  <a:spcPts val="1200"/>
+                </a:spcBef>
+                <a:spcAft>
+                  <a:spcPts val="0"/>
+                </a:spcAft>
+                <a:buClr>
+                  <a:srgbClr val="334155"/>
+                </a:buClr>
+                <a:buSzPts val="1250"/>
+                <a:buFont typeface="Inter"/>
+                <a:buChar char="●"/>
+              </a:pPr>
+              <a:r>
+                <a:rPr b="0" lang="en" sz="1250">
+                  <a:solidFill>
+                    <a:srgbClr val="334155"/>
+                  </a:solidFill>
+                  <a:latin typeface="Inter"/>
+                  <a:ea typeface="Inter"/>
+                  <a:cs typeface="Inter"/>
+                  <a:sym typeface="Inter"/>
+                </a:rPr>
+                <a:t>Understand key statistical distributions and applications</a:t>
+              </a:r>
+              <a:endParaRPr b="0" sz="1250">
+                <a:solidFill>
+                  <a:srgbClr val="334155"/>
+                </a:solidFill>
+                <a:latin typeface="Inter"/>
+                <a:ea typeface="Inter"/>
+                <a:cs typeface="Inter"/>
+                <a:sym typeface="Inter"/>
+              </a:endParaRPr>
+            </a:p>
+            <a:p>
+              <a:pPr indent="-307975" lvl="0" marL="457200" rtl="0" algn="l">
+                <a:spcBef>
+                  <a:spcPts val="750"/>
+                </a:spcBef>
+                <a:spcAft>
+                  <a:spcPts val="750"/>
+                </a:spcAft>
+                <a:buClr>
+                  <a:srgbClr val="334155"/>
+                </a:buClr>
+                <a:buSzPts val="1250"/>
+                <a:buFont typeface="Inter"/>
+                <a:buChar char="●"/>
+              </a:pPr>
+              <a:r>
+                <a:rPr b="0" lang="en" sz="1250">
+                  <a:solidFill>
+                    <a:srgbClr val="334155"/>
+                  </a:solidFill>
+                  <a:latin typeface="Inter"/>
+                  <a:ea typeface="Inter"/>
+                  <a:cs typeface="Inter"/>
+                  <a:sym typeface="Inter"/>
+                </a:rPr>
+                <a:t>Select correct analyses for ecological datasets</a:t>
+              </a:r>
+              <a:endParaRPr b="0" sz="1250">
+                <a:solidFill>
+                  <a:srgbClr val="334155"/>
+                </a:solidFill>
+                <a:latin typeface="Inter"/>
+                <a:ea typeface="Inter"/>
+                <a:cs typeface="Inter"/>
+                <a:sym typeface="Inter"/>
+              </a:endParaRPr>
+            </a:p>
+          </p:txBody>
+        </p:sp>
+      </p:grpSp>
+      <p:grpSp>
+        <p:nvGrpSpPr>
+          <p:cNvPr id="158" name="Google Shape;158;p22"/>
+          <p:cNvGrpSpPr/>
+          <p:nvPr/>
+        </p:nvGrpSpPr>
+        <p:grpSpPr>
+          <a:xfrm>
+            <a:off x="6096000" y="1714500"/>
+            <a:ext cx="2476500" cy="2762400"/>
+            <a:chOff x="0" y="0"/>
+            <a:chExt cx="2476500" cy="2762400"/>
+          </a:xfrm>
+        </p:grpSpPr>
+        <p:sp>
+          <p:nvSpPr>
+            <p:cNvPr id="159" name="Google Shape;159;p22"/>
+            <p:cNvSpPr/>
+            <p:nvPr/>
+          </p:nvSpPr>
+          <p:spPr>
+            <a:xfrm>
+              <a:off x="0" y="0"/>
+              <a:ext cx="2476500" cy="2762400"/>
+            </a:xfrm>
+            <a:prstGeom prst="roundRect">
+              <a:avLst>
+                <a:gd fmla="val 6153" name="adj"/>
+              </a:avLst>
+            </a:prstGeom>
+            <a:solidFill>
+              <a:srgbClr val="FFFFFF"/>
+            </a:solidFill>
+            <a:ln cap="flat" cmpd="sng" w="14300">
               <a:solidFill>
-                <a:schemeClr val="dk1"/>
+                <a:srgbClr val="E2E8F0"/>
               </a:solidFill>
-              <a:latin typeface="Calibri"/>
-              <a:ea typeface="Calibri"/>
-              <a:cs typeface="Calibri"/>
-              <a:sym typeface="Calibri"/>
-            </a:endParaRPr>
-          </a:p>
-          <a:p>
-            <a:pPr indent="-323850" lvl="0" marL="457200" rtl="0" algn="l">
-              <a:lnSpc>
-                <a:spcPct val="100000"/>
-              </a:lnSpc>
-              <a:spcBef>
-                <a:spcPts val="0"/>
-              </a:spcBef>
-              <a:spcAft>
-                <a:spcPts val="0"/>
-              </a:spcAft>
-              <a:buClr>
-                <a:schemeClr val="dk1"/>
-              </a:buClr>
-              <a:buSzPts val="1500"/>
-              <a:buFont typeface="Calibri"/>
-              <a:buChar char="●"/>
-            </a:pPr>
-            <a:r>
-              <a:rPr lang="en" sz="1500">
+              <a:prstDash val="solid"/>
+              <a:round/>
+              <a:headEnd len="sm" w="sm" type="none"/>
+              <a:tailEnd len="sm" w="sm" type="none"/>
+            </a:ln>
+          </p:spPr>
+          <p:txBody>
+            <a:bodyPr anchorCtr="0" anchor="ctr" bIns="0" lIns="0" spcFirstLastPara="1" rIns="0" wrap="square" tIns="0">
+              <a:noAutofit/>
+            </a:bodyPr>
+            <a:lstStyle/>
+            <a:p>
+              <a:pPr indent="0" lvl="0" marL="0" rtl="0" algn="l">
+                <a:spcBef>
+                  <a:spcPts val="0"/>
+                </a:spcBef>
+                <a:spcAft>
+                  <a:spcPts val="0"/>
+                </a:spcAft>
+                <a:buNone/>
+              </a:pPr>
+              <a:r>
+                <a:t/>
+              </a:r>
+              <a:endParaRPr/>
+            </a:p>
+          </p:txBody>
+        </p:sp>
+        <p:sp>
+          <p:nvSpPr>
+            <p:cNvPr id="160" name="Google Shape;160;p22"/>
+            <p:cNvSpPr/>
+            <p:nvPr/>
+          </p:nvSpPr>
+          <p:spPr>
+            <a:xfrm>
+              <a:off x="228600" y="228600"/>
+              <a:ext cx="571500" cy="57300"/>
+            </a:xfrm>
+            <a:prstGeom prst="roundRect">
+              <a:avLst>
+                <a:gd fmla="val 50000" name="adj"/>
+              </a:avLst>
+            </a:prstGeom>
+            <a:solidFill>
+              <a:srgbClr val="6366F1"/>
+            </a:solidFill>
+            <a:ln>
+              <a:noFill/>
+            </a:ln>
+          </p:spPr>
+          <p:txBody>
+            <a:bodyPr anchorCtr="0" anchor="ctr" bIns="0" lIns="0" spcFirstLastPara="1" rIns="0" wrap="square" tIns="0">
+              <a:noAutofit/>
+            </a:bodyPr>
+            <a:lstStyle/>
+            <a:p>
+              <a:pPr indent="0" lvl="0" marL="0" rtl="0" algn="l">
+                <a:spcBef>
+                  <a:spcPts val="0"/>
+                </a:spcBef>
+                <a:spcAft>
+                  <a:spcPts val="0"/>
+                </a:spcAft>
+                <a:buNone/>
+              </a:pPr>
+              <a:r>
+                <a:t/>
+              </a:r>
+              <a:endParaRPr/>
+            </a:p>
+          </p:txBody>
+        </p:sp>
+        <p:sp>
+          <p:nvSpPr>
+            <p:cNvPr id="161" name="Google Shape;161;p22"/>
+            <p:cNvSpPr txBox="1"/>
+            <p:nvPr/>
+          </p:nvSpPr>
+          <p:spPr>
+            <a:xfrm>
+              <a:off x="0" y="0"/>
+              <a:ext cx="2476500" cy="2762400"/>
+            </a:xfrm>
+            <a:prstGeom prst="rect">
+              <a:avLst/>
+            </a:prstGeom>
+            <a:noFill/>
+            <a:ln>
+              <a:noFill/>
+            </a:ln>
+          </p:spPr>
+          <p:txBody>
+            <a:bodyPr anchorCtr="0" anchor="t" bIns="190500" lIns="228600" spcFirstLastPara="1" rIns="190500" wrap="square" tIns="381000">
+              <a:noAutofit/>
+            </a:bodyPr>
+            <a:lstStyle/>
+            <a:p>
+              <a:pPr indent="0" lvl="0" marL="0" rtl="0" algn="l">
+                <a:spcBef>
+                  <a:spcPts val="1200"/>
+                </a:spcBef>
+                <a:spcAft>
+                  <a:spcPts val="0"/>
+                </a:spcAft>
+                <a:buNone/>
+              </a:pPr>
+              <a:r>
+                <a:rPr b="1" lang="en" sz="1018">
+                  <a:solidFill>
+                    <a:srgbClr val="6366F1"/>
+                  </a:solidFill>
+                  <a:latin typeface="Inter"/>
+                  <a:ea typeface="Inter"/>
+                  <a:cs typeface="Inter"/>
+                  <a:sym typeface="Inter"/>
+                </a:rPr>
+                <a:t>PROBLEM SOLVING</a:t>
+              </a:r>
+              <a:endParaRPr b="1" sz="1018">
                 <a:solidFill>
-                  <a:schemeClr val="dk1"/>
+                  <a:srgbClr val="6366F1"/>
                 </a:solidFill>
-                <a:latin typeface="Calibri"/>
-                <a:ea typeface="Calibri"/>
-                <a:cs typeface="Calibri"/>
-                <a:sym typeface="Calibri"/>
-              </a:rPr>
-              <a:t>Load data into R and conduct common data-wrangling tasks</a:t>
-            </a:r>
-            <a:endParaRPr sz="1500">
-              <a:solidFill>
-                <a:schemeClr val="dk1"/>
-              </a:solidFill>
-              <a:latin typeface="Calibri"/>
-              <a:ea typeface="Calibri"/>
-              <a:cs typeface="Calibri"/>
-              <a:sym typeface="Calibri"/>
-            </a:endParaRPr>
-          </a:p>
-          <a:p>
-            <a:pPr indent="-323850" lvl="0" marL="457200" rtl="0" algn="l">
-              <a:lnSpc>
-                <a:spcPct val="100000"/>
-              </a:lnSpc>
-              <a:spcBef>
-                <a:spcPts val="0"/>
-              </a:spcBef>
-              <a:spcAft>
-                <a:spcPts val="0"/>
-              </a:spcAft>
-              <a:buClr>
-                <a:schemeClr val="dk1"/>
-              </a:buClr>
-              <a:buSzPts val="1500"/>
-              <a:buFont typeface="Calibri"/>
-              <a:buChar char="●"/>
-            </a:pPr>
-            <a:r>
-              <a:rPr lang="en" sz="1500">
+                <a:latin typeface="Inter"/>
+                <a:ea typeface="Inter"/>
+                <a:cs typeface="Inter"/>
+                <a:sym typeface="Inter"/>
+              </a:endParaRPr>
+            </a:p>
+            <a:p>
+              <a:pPr indent="-302022" lvl="0" marL="457200" rtl="0" algn="l">
+                <a:spcBef>
+                  <a:spcPts val="1200"/>
+                </a:spcBef>
+                <a:spcAft>
+                  <a:spcPts val="0"/>
+                </a:spcAft>
+                <a:buClr>
+                  <a:srgbClr val="334155"/>
+                </a:buClr>
+                <a:buSzPts val="1156"/>
+                <a:buFont typeface="Inter"/>
+                <a:buChar char="●"/>
+              </a:pPr>
+              <a:r>
+                <a:rPr b="0" lang="en" sz="1156">
+                  <a:solidFill>
+                    <a:srgbClr val="334155"/>
+                  </a:solidFill>
+                  <a:latin typeface="Inter"/>
+                  <a:ea typeface="Inter"/>
+                  <a:cs typeface="Inter"/>
+                  <a:sym typeface="Inter"/>
+                </a:rPr>
+                <a:t>Troubleshoot &amp; debug R code effectively</a:t>
+              </a:r>
+              <a:endParaRPr b="0" sz="1156">
                 <a:solidFill>
-                  <a:schemeClr val="dk1"/>
+                  <a:srgbClr val="334155"/>
                 </a:solidFill>
-                <a:latin typeface="Calibri"/>
-                <a:ea typeface="Calibri"/>
-                <a:cs typeface="Calibri"/>
-                <a:sym typeface="Calibri"/>
-              </a:rPr>
-              <a:t>Create data visualizations using base R and ggplot2</a:t>
-            </a:r>
-            <a:endParaRPr sz="1500">
-              <a:solidFill>
-                <a:schemeClr val="dk1"/>
-              </a:solidFill>
-              <a:latin typeface="Calibri"/>
-              <a:ea typeface="Calibri"/>
-              <a:cs typeface="Calibri"/>
-              <a:sym typeface="Calibri"/>
-            </a:endParaRPr>
-          </a:p>
-          <a:p>
-            <a:pPr indent="-323850" lvl="0" marL="457200" rtl="0" algn="l">
-              <a:lnSpc>
-                <a:spcPct val="100000"/>
-              </a:lnSpc>
-              <a:spcBef>
-                <a:spcPts val="0"/>
-              </a:spcBef>
-              <a:spcAft>
-                <a:spcPts val="0"/>
-              </a:spcAft>
-              <a:buClr>
-                <a:schemeClr val="dk1"/>
-              </a:buClr>
-              <a:buSzPts val="1500"/>
-              <a:buFont typeface="Calibri"/>
-              <a:buChar char="●"/>
-            </a:pPr>
-            <a:r>
-              <a:rPr lang="en" sz="1500">
+                <a:latin typeface="Inter"/>
+                <a:ea typeface="Inter"/>
+                <a:cs typeface="Inter"/>
+                <a:sym typeface="Inter"/>
+              </a:endParaRPr>
+            </a:p>
+            <a:p>
+              <a:pPr indent="-302022" lvl="0" marL="457200" rtl="0" algn="l">
+                <a:spcBef>
+                  <a:spcPts val="600"/>
+                </a:spcBef>
+                <a:spcAft>
+                  <a:spcPts val="0"/>
+                </a:spcAft>
+                <a:buClr>
+                  <a:srgbClr val="334155"/>
+                </a:buClr>
+                <a:buSzPts val="1156"/>
+                <a:buFont typeface="Inter"/>
+                <a:buChar char="●"/>
+              </a:pPr>
+              <a:r>
+                <a:rPr b="0" lang="en" sz="1156">
+                  <a:solidFill>
+                    <a:srgbClr val="334155"/>
+                  </a:solidFill>
+                  <a:latin typeface="Inter"/>
+                  <a:ea typeface="Inter"/>
+                  <a:cs typeface="Inter"/>
+                  <a:sym typeface="Inter"/>
+                </a:rPr>
+                <a:t>Approach novel coding challenges with confidence</a:t>
+              </a:r>
+              <a:endParaRPr b="0" sz="1156">
                 <a:solidFill>
-                  <a:schemeClr val="dk1"/>
+                  <a:srgbClr val="334155"/>
                 </a:solidFill>
-                <a:latin typeface="Calibri"/>
-                <a:ea typeface="Calibri"/>
-                <a:cs typeface="Calibri"/>
-                <a:sym typeface="Calibri"/>
-              </a:rPr>
-              <a:t>List the common types of statistical distribution and provide examples of when they might apply.</a:t>
-            </a:r>
-            <a:endParaRPr sz="1500">
-              <a:solidFill>
-                <a:schemeClr val="dk1"/>
-              </a:solidFill>
-              <a:latin typeface="Calibri"/>
-              <a:ea typeface="Calibri"/>
-              <a:cs typeface="Calibri"/>
-              <a:sym typeface="Calibri"/>
-            </a:endParaRPr>
-          </a:p>
-          <a:p>
-            <a:pPr indent="-323850" lvl="0" marL="457200" rtl="0" algn="l">
-              <a:lnSpc>
-                <a:spcPct val="100000"/>
-              </a:lnSpc>
-              <a:spcBef>
-                <a:spcPts val="0"/>
-              </a:spcBef>
-              <a:spcAft>
-                <a:spcPts val="0"/>
-              </a:spcAft>
-              <a:buClr>
-                <a:schemeClr val="dk1"/>
-              </a:buClr>
-              <a:buSzPts val="1500"/>
-              <a:buFont typeface="Calibri"/>
-              <a:buChar char="●"/>
-            </a:pPr>
-            <a:r>
-              <a:rPr lang="en" sz="1500">
+                <a:latin typeface="Inter"/>
+                <a:ea typeface="Inter"/>
+                <a:cs typeface="Inter"/>
+                <a:sym typeface="Inter"/>
+              </a:endParaRPr>
+            </a:p>
+            <a:p>
+              <a:pPr indent="-302022" lvl="0" marL="457200" rtl="0" algn="l">
+                <a:spcBef>
+                  <a:spcPts val="600"/>
+                </a:spcBef>
+                <a:spcAft>
+                  <a:spcPts val="600"/>
+                </a:spcAft>
+                <a:buClr>
+                  <a:srgbClr val="334155"/>
+                </a:buClr>
+                <a:buSzPts val="1156"/>
+                <a:buFont typeface="Inter"/>
+                <a:buChar char="●"/>
+              </a:pPr>
+              <a:r>
+                <a:rPr b="0" lang="en" sz="1156">
+                  <a:solidFill>
+                    <a:srgbClr val="334155"/>
+                  </a:solidFill>
+                  <a:latin typeface="Inter"/>
+                  <a:ea typeface="Inter"/>
+                  <a:cs typeface="Inter"/>
+                  <a:sym typeface="Inter"/>
+                </a:rPr>
+                <a:t>Apply new programming skills directly to your own work</a:t>
+              </a:r>
+              <a:endParaRPr b="0" sz="1156">
                 <a:solidFill>
-                  <a:schemeClr val="dk1"/>
+                  <a:srgbClr val="334155"/>
                 </a:solidFill>
-                <a:latin typeface="Calibri"/>
-                <a:ea typeface="Calibri"/>
-                <a:cs typeface="Calibri"/>
-                <a:sym typeface="Calibri"/>
-              </a:rPr>
-              <a:t>Choose appropriate analyses for given ecological questions and datasets.</a:t>
-            </a:r>
-            <a:endParaRPr sz="1500">
-              <a:solidFill>
-                <a:schemeClr val="dk1"/>
-              </a:solidFill>
-              <a:latin typeface="Calibri"/>
-              <a:ea typeface="Calibri"/>
-              <a:cs typeface="Calibri"/>
-              <a:sym typeface="Calibri"/>
-            </a:endParaRPr>
-          </a:p>
-          <a:p>
-            <a:pPr indent="-323850" lvl="0" marL="457200" rtl="0" algn="l">
-              <a:lnSpc>
-                <a:spcPct val="100000"/>
-              </a:lnSpc>
-              <a:spcBef>
-                <a:spcPts val="0"/>
-              </a:spcBef>
-              <a:spcAft>
-                <a:spcPts val="0"/>
-              </a:spcAft>
-              <a:buClr>
-                <a:schemeClr val="dk1"/>
-              </a:buClr>
-              <a:buSzPts val="1500"/>
-              <a:buFont typeface="Calibri"/>
-              <a:buChar char="●"/>
-            </a:pPr>
-            <a:r>
-              <a:rPr lang="en" sz="1500">
-                <a:solidFill>
-                  <a:schemeClr val="dk1"/>
-                </a:solidFill>
-                <a:latin typeface="Calibri"/>
-                <a:ea typeface="Calibri"/>
-                <a:cs typeface="Calibri"/>
-                <a:sym typeface="Calibri"/>
-              </a:rPr>
-              <a:t>Demonstrate an ability to troubleshoot and de-bug R code.</a:t>
-            </a:r>
-            <a:endParaRPr sz="1500">
-              <a:solidFill>
-                <a:schemeClr val="dk1"/>
-              </a:solidFill>
-              <a:latin typeface="Calibri"/>
-              <a:ea typeface="Calibri"/>
-              <a:cs typeface="Calibri"/>
-              <a:sym typeface="Calibri"/>
-            </a:endParaRPr>
-          </a:p>
-          <a:p>
-            <a:pPr indent="-323850" lvl="0" marL="457200" rtl="0" algn="l">
-              <a:lnSpc>
-                <a:spcPct val="100000"/>
-              </a:lnSpc>
-              <a:spcBef>
-                <a:spcPts val="0"/>
-              </a:spcBef>
-              <a:spcAft>
-                <a:spcPts val="0"/>
-              </a:spcAft>
-              <a:buClr>
-                <a:schemeClr val="dk1"/>
-              </a:buClr>
-              <a:buSzPts val="1500"/>
-              <a:buFont typeface="Calibri"/>
-              <a:buChar char="●"/>
-            </a:pPr>
-            <a:r>
-              <a:rPr lang="en" sz="1500">
-                <a:solidFill>
-                  <a:schemeClr val="dk1"/>
-                </a:solidFill>
-                <a:latin typeface="Calibri"/>
-                <a:ea typeface="Calibri"/>
-                <a:cs typeface="Calibri"/>
-                <a:sym typeface="Calibri"/>
-              </a:rPr>
-              <a:t>Explain how they would approach a novel coding problem </a:t>
-            </a:r>
-            <a:endParaRPr sz="1500">
-              <a:solidFill>
-                <a:schemeClr val="dk1"/>
-              </a:solidFill>
-              <a:latin typeface="Calibri"/>
-              <a:ea typeface="Calibri"/>
-              <a:cs typeface="Calibri"/>
-              <a:sym typeface="Calibri"/>
-            </a:endParaRPr>
-          </a:p>
-          <a:p>
-            <a:pPr indent="-323850" lvl="0" marL="457200" rtl="0" algn="l">
-              <a:lnSpc>
-                <a:spcPct val="100000"/>
-              </a:lnSpc>
-              <a:spcBef>
-                <a:spcPts val="0"/>
-              </a:spcBef>
-              <a:spcAft>
-                <a:spcPts val="0"/>
-              </a:spcAft>
-              <a:buClr>
-                <a:schemeClr val="dk1"/>
-              </a:buClr>
-              <a:buSzPts val="1500"/>
-              <a:buFont typeface="Calibri"/>
-              <a:buChar char="●"/>
-            </a:pPr>
-            <a:r>
-              <a:rPr lang="en" sz="1500">
-                <a:solidFill>
-                  <a:schemeClr val="dk1"/>
-                </a:solidFill>
-                <a:latin typeface="Calibri"/>
-                <a:ea typeface="Calibri"/>
-                <a:cs typeface="Calibri"/>
-                <a:sym typeface="Calibri"/>
-              </a:rPr>
-              <a:t>Apply the skills learned to their own work</a:t>
-            </a:r>
-            <a:endParaRPr sz="2200"/>
-          </a:p>
-        </p:txBody>
-      </p:sp>
+                <a:latin typeface="Inter"/>
+                <a:ea typeface="Inter"/>
+                <a:cs typeface="Inter"/>
+                <a:sym typeface="Inter"/>
+              </a:endParaRPr>
+            </a:p>
+          </p:txBody>
+        </p:sp>
+      </p:grpSp>
     </p:spTree>
   </p:cSld>
   <p:clrMapOvr>
@@ -8587,7 +9092,7 @@
     </p:bg>
     <p:spTree>
       <p:nvGrpSpPr>
-        <p:cNvPr id="146" name="Shape 146"/>
+        <p:cNvPr id="165" name="Shape 165"/>
         <p:cNvGrpSpPr/>
         <p:nvPr/>
       </p:nvGrpSpPr>
@@ -8601,7 +9106,7 @@
       </p:grpSpPr>
       <p:sp>
         <p:nvSpPr>
-          <p:cNvPr id="147" name="Google Shape;147;p23"/>
+          <p:cNvPr id="166" name="Google Shape;166;p23"/>
           <p:cNvSpPr txBox="1"/>
           <p:nvPr/>
         </p:nvSpPr>
@@ -8691,7 +9196,7 @@
       </p:sp>
       <p:grpSp>
         <p:nvGrpSpPr>
-          <p:cNvPr id="148" name="Google Shape;148;p23"/>
+          <p:cNvPr id="167" name="Google Shape;167;p23"/>
           <p:cNvGrpSpPr/>
           <p:nvPr/>
         </p:nvGrpSpPr>
@@ -8705,7 +9210,7 @@
         </p:grpSpPr>
         <p:sp>
           <p:nvSpPr>
-            <p:cNvPr id="149" name="Google Shape;149;p23"/>
+            <p:cNvPr id="168" name="Google Shape;168;p23"/>
             <p:cNvSpPr/>
             <p:nvPr/>
           </p:nvSpPr>
@@ -8756,7 +9261,7 @@
         </p:sp>
         <p:sp>
           <p:nvSpPr>
-            <p:cNvPr id="150" name="Google Shape;150;p23"/>
+            <p:cNvPr id="169" name="Google Shape;169;p23"/>
             <p:cNvSpPr/>
             <p:nvPr/>
           </p:nvSpPr>
@@ -8801,7 +9306,7 @@
         </p:sp>
         <p:sp>
           <p:nvSpPr>
-            <p:cNvPr id="151" name="Google Shape;151;p23"/>
+            <p:cNvPr id="170" name="Google Shape;170;p23"/>
             <p:cNvSpPr txBox="1"/>
             <p:nvPr/>
           </p:nvSpPr>
@@ -8889,7 +9394,7 @@
       </p:grpSp>
       <p:grpSp>
         <p:nvGrpSpPr>
-          <p:cNvPr id="152" name="Google Shape;152;p23"/>
+          <p:cNvPr id="171" name="Google Shape;171;p23"/>
           <p:cNvGrpSpPr/>
           <p:nvPr/>
         </p:nvGrpSpPr>
@@ -8903,7 +9408,7 @@
         </p:grpSpPr>
         <p:sp>
           <p:nvSpPr>
-            <p:cNvPr id="153" name="Google Shape;153;p23"/>
+            <p:cNvPr id="172" name="Google Shape;172;p23"/>
             <p:cNvSpPr/>
             <p:nvPr/>
           </p:nvSpPr>
@@ -8954,7 +9459,7 @@
         </p:sp>
         <p:sp>
           <p:nvSpPr>
-            <p:cNvPr id="154" name="Google Shape;154;p23"/>
+            <p:cNvPr id="173" name="Google Shape;173;p23"/>
             <p:cNvSpPr/>
             <p:nvPr/>
           </p:nvSpPr>
@@ -8999,7 +9504,7 @@
         </p:sp>
         <p:sp>
           <p:nvSpPr>
-            <p:cNvPr id="155" name="Google Shape;155;p23"/>
+            <p:cNvPr id="174" name="Google Shape;174;p23"/>
             <p:cNvSpPr txBox="1"/>
             <p:nvPr/>
           </p:nvSpPr>
@@ -9087,7 +9592,7 @@
       </p:grpSp>
       <p:grpSp>
         <p:nvGrpSpPr>
-          <p:cNvPr id="156" name="Google Shape;156;p23"/>
+          <p:cNvPr id="175" name="Google Shape;175;p23"/>
           <p:cNvGrpSpPr/>
           <p:nvPr/>
         </p:nvGrpSpPr>
@@ -9101,7 +9606,7 @@
         </p:grpSpPr>
         <p:sp>
           <p:nvSpPr>
-            <p:cNvPr id="157" name="Google Shape;157;p23"/>
+            <p:cNvPr id="176" name="Google Shape;176;p23"/>
             <p:cNvSpPr/>
             <p:nvPr/>
           </p:nvSpPr>
@@ -9152,7 +9657,7 @@
         </p:sp>
         <p:sp>
           <p:nvSpPr>
-            <p:cNvPr id="158" name="Google Shape;158;p23"/>
+            <p:cNvPr id="177" name="Google Shape;177;p23"/>
             <p:cNvSpPr/>
             <p:nvPr/>
           </p:nvSpPr>
@@ -9197,7 +9702,7 @@
         </p:sp>
         <p:sp>
           <p:nvSpPr>
-            <p:cNvPr id="159" name="Google Shape;159;p23"/>
+            <p:cNvPr id="178" name="Google Shape;178;p23"/>
             <p:cNvSpPr txBox="1"/>
             <p:nvPr/>
           </p:nvSpPr>
@@ -9308,7 +9813,7 @@
     </p:bg>
     <p:spTree>
       <p:nvGrpSpPr>
-        <p:cNvPr id="163" name="Shape 163"/>
+        <p:cNvPr id="182" name="Shape 182"/>
         <p:cNvGrpSpPr/>
         <p:nvPr/>
       </p:nvGrpSpPr>
@@ -9322,7 +9827,7 @@
       </p:grpSpPr>
       <p:grpSp>
         <p:nvGrpSpPr>
-          <p:cNvPr id="164" name="Google Shape;164;p24"/>
+          <p:cNvPr id="183" name="Google Shape;183;p24"/>
           <p:cNvGrpSpPr/>
           <p:nvPr/>
         </p:nvGrpSpPr>
@@ -9336,7 +9841,7 @@
         </p:grpSpPr>
         <p:sp>
           <p:nvSpPr>
-            <p:cNvPr id="165" name="Google Shape;165;p24"/>
+            <p:cNvPr id="184" name="Google Shape;184;p24"/>
             <p:cNvSpPr/>
             <p:nvPr/>
           </p:nvSpPr>
@@ -9381,7 +9886,7 @@
         </p:sp>
         <p:sp>
           <p:nvSpPr>
-            <p:cNvPr id="166" name="Google Shape;166;p24"/>
+            <p:cNvPr id="185" name="Google Shape;185;p24"/>
             <p:cNvSpPr txBox="1"/>
             <p:nvPr/>
           </p:nvSpPr>
@@ -9440,7 +9945,7 @@
       </p:grpSp>
       <p:grpSp>
         <p:nvGrpSpPr>
-          <p:cNvPr id="167" name="Google Shape;167;p24"/>
+          <p:cNvPr id="186" name="Google Shape;186;p24"/>
           <p:cNvGrpSpPr/>
           <p:nvPr/>
         </p:nvGrpSpPr>
@@ -9454,7 +9959,7 @@
         </p:grpSpPr>
         <p:sp>
           <p:nvSpPr>
-            <p:cNvPr id="168" name="Google Shape;168;p24"/>
+            <p:cNvPr id="187" name="Google Shape;187;p24"/>
             <p:cNvSpPr/>
             <p:nvPr/>
           </p:nvSpPr>
@@ -9505,7 +10010,7 @@
         </p:sp>
         <p:sp>
           <p:nvSpPr>
-            <p:cNvPr id="169" name="Google Shape;169;p24"/>
+            <p:cNvPr id="188" name="Google Shape;188;p24"/>
             <p:cNvSpPr/>
             <p:nvPr/>
           </p:nvSpPr>
@@ -9550,7 +10055,7 @@
         </p:sp>
         <p:sp>
           <p:nvSpPr>
-            <p:cNvPr id="170" name="Google Shape;170;p24"/>
+            <p:cNvPr id="189" name="Google Shape;189;p24"/>
             <p:cNvSpPr txBox="1"/>
             <p:nvPr/>
           </p:nvSpPr>
@@ -9641,7 +10146,7 @@
       </p:grpSp>
       <p:grpSp>
         <p:nvGrpSpPr>
-          <p:cNvPr id="171" name="Google Shape;171;p24"/>
+          <p:cNvPr id="190" name="Google Shape;190;p24"/>
           <p:cNvGrpSpPr/>
           <p:nvPr/>
         </p:nvGrpSpPr>
@@ -9655,7 +10160,7 @@
         </p:grpSpPr>
         <p:sp>
           <p:nvSpPr>
-            <p:cNvPr id="172" name="Google Shape;172;p24"/>
+            <p:cNvPr id="191" name="Google Shape;191;p24"/>
             <p:cNvSpPr/>
             <p:nvPr/>
           </p:nvSpPr>
@@ -9706,7 +10211,7 @@
         </p:sp>
         <p:sp>
           <p:nvSpPr>
-            <p:cNvPr id="173" name="Google Shape;173;p24"/>
+            <p:cNvPr id="192" name="Google Shape;192;p24"/>
             <p:cNvSpPr/>
             <p:nvPr/>
           </p:nvSpPr>
@@ -9751,7 +10256,7 @@
         </p:sp>
         <p:sp>
           <p:nvSpPr>
-            <p:cNvPr id="174" name="Google Shape;174;p24"/>
+            <p:cNvPr id="193" name="Google Shape;193;p24"/>
             <p:cNvSpPr txBox="1"/>
             <p:nvPr/>
           </p:nvSpPr>
@@ -9853,7 +10358,7 @@
   <p:cSld>
     <p:spTree>
       <p:nvGrpSpPr>
-        <p:cNvPr id="178" name="Shape 178"/>
+        <p:cNvPr id="197" name="Shape 197"/>
         <p:cNvGrpSpPr/>
         <p:nvPr/>
       </p:nvGrpSpPr>
@@ -9867,24 +10372,30 @@
       </p:grpSpPr>
       <p:sp>
         <p:nvSpPr>
-          <p:cNvPr id="179" name="Google Shape;179;p25"/>
+          <p:cNvPr id="198" name="Google Shape;198;p25"/>
           <p:cNvSpPr txBox="1"/>
-          <p:nvPr>
-            <p:ph type="title"/>
-          </p:nvPr>
+          <p:nvPr/>
         </p:nvSpPr>
         <p:spPr>
           <a:xfrm>
-            <a:off x="311700" y="445025"/>
-            <a:ext cx="8520600" cy="572700"/>
+            <a:off x="571500" y="476250"/>
+            <a:ext cx="8001000" cy="1047900"/>
           </a:xfrm>
           <a:prstGeom prst="rect">
             <a:avLst/>
           </a:prstGeom>
+          <a:solidFill>
+            <a:srgbClr val="000000">
+              <a:alpha val="0"/>
+            </a:srgbClr>
+          </a:solidFill>
+          <a:ln>
+            <a:noFill/>
+          </a:ln>
         </p:spPr>
         <p:txBody>
-          <a:bodyPr anchorCtr="0" anchor="t" bIns="91425" lIns="91425" spcFirstLastPara="1" rIns="91425" wrap="square" tIns="91425">
-            <a:normAutofit fontScale="90000"/>
+          <a:bodyPr anchorCtr="0" anchor="t" bIns="0" lIns="0" spcFirstLastPara="1" rIns="0" wrap="square" tIns="0">
+            <a:noAutofit/>
           </a:bodyPr>
           <a:lstStyle/>
           <a:p>
@@ -9898,88 +10409,676 @@
               <a:buNone/>
             </a:pPr>
             <a:r>
-              <a:rPr lang="en"/>
-              <a:t>A note on AI</a:t>
+              <a:rPr b="0" lang="en" sz="3200">
+                <a:solidFill>
+                  <a:srgbClr val="0F172A"/>
+                </a:solidFill>
+                <a:latin typeface="Inter ExtraBold"/>
+                <a:ea typeface="Inter ExtraBold"/>
+                <a:cs typeface="Inter ExtraBold"/>
+                <a:sym typeface="Inter ExtraBold"/>
+              </a:rPr>
+              <a:t>A Note on AI</a:t>
             </a:r>
-            <a:endParaRPr/>
+            <a:endParaRPr b="0" sz="3200">
+              <a:solidFill>
+                <a:srgbClr val="0F172A"/>
+              </a:solidFill>
+              <a:latin typeface="Inter ExtraBold"/>
+              <a:ea typeface="Inter ExtraBold"/>
+              <a:cs typeface="Inter ExtraBold"/>
+              <a:sym typeface="Inter ExtraBold"/>
+            </a:endParaRPr>
+          </a:p>
+          <a:p>
+            <a:pPr indent="0" lvl="0" marL="0" rtl="0" algn="l">
+              <a:spcBef>
+                <a:spcPts val="450"/>
+              </a:spcBef>
+              <a:spcAft>
+                <a:spcPts val="0"/>
+              </a:spcAft>
+              <a:buNone/>
+            </a:pPr>
+            <a:r>
+              <a:rPr b="0" lang="en" sz="1600">
+                <a:solidFill>
+                  <a:srgbClr val="64748B"/>
+                </a:solidFill>
+                <a:latin typeface="Inter"/>
+                <a:ea typeface="Inter"/>
+                <a:cs typeface="Inter"/>
+                <a:sym typeface="Inter"/>
+              </a:rPr>
+              <a:t>Establishing core fundamentals before leveraging artificial intelligence</a:t>
+            </a:r>
+            <a:endParaRPr b="0" sz="1600">
+              <a:solidFill>
+                <a:srgbClr val="64748B"/>
+              </a:solidFill>
+              <a:latin typeface="Inter"/>
+              <a:ea typeface="Inter"/>
+              <a:cs typeface="Inter"/>
+              <a:sym typeface="Inter"/>
+            </a:endParaRPr>
           </a:p>
         </p:txBody>
       </p:sp>
-      <p:sp>
-        <p:nvSpPr>
-          <p:cNvPr id="180" name="Google Shape;180;p25"/>
-          <p:cNvSpPr txBox="1"/>
-          <p:nvPr>
-            <p:ph idx="1" type="body"/>
-          </p:nvPr>
-        </p:nvSpPr>
-        <p:spPr>
+      <p:grpSp>
+        <p:nvGrpSpPr>
+          <p:cNvPr id="199" name="Google Shape;199;p25"/>
+          <p:cNvGrpSpPr/>
+          <p:nvPr/>
+        </p:nvGrpSpPr>
+        <p:grpSpPr>
           <a:xfrm>
-            <a:off x="311700" y="1152475"/>
-            <a:ext cx="8520600" cy="3416400"/>
+            <a:off x="571500" y="1714500"/>
+            <a:ext cx="2476500" cy="2667000"/>
+            <a:chOff x="0" y="0"/>
+            <a:chExt cx="2476500" cy="2667000"/>
           </a:xfrm>
-          <a:prstGeom prst="rect">
-            <a:avLst/>
-          </a:prstGeom>
-        </p:spPr>
-        <p:txBody>
-          <a:bodyPr anchorCtr="0" anchor="t" bIns="91425" lIns="91425" spcFirstLastPara="1" rIns="91425" wrap="square" tIns="91425">
-            <a:normAutofit/>
-          </a:bodyPr>
-          <a:lstStyle/>
-          <a:p>
-            <a:pPr indent="-342900" lvl="0" marL="457200" rtl="0" algn="l">
-              <a:spcBef>
-                <a:spcPts val="0"/>
-              </a:spcBef>
-              <a:spcAft>
-                <a:spcPts val="0"/>
-              </a:spcAft>
-              <a:buSzPts val="1800"/>
-              <a:buChar char="-"/>
-            </a:pPr>
-            <a:r>
-              <a:rPr lang="en"/>
-              <a:t>We’ll cover AI later in the semester</a:t>
-            </a:r>
-            <a:endParaRPr/>
-          </a:p>
-          <a:p>
-            <a:pPr indent="-342900" lvl="0" marL="457200" rtl="0" algn="l">
-              <a:spcBef>
-                <a:spcPts val="0"/>
-              </a:spcBef>
-              <a:spcAft>
-                <a:spcPts val="0"/>
-              </a:spcAft>
-              <a:buSzPts val="1800"/>
-              <a:buChar char="-"/>
-            </a:pPr>
-            <a:r>
-              <a:rPr lang="en"/>
-              <a:t>Strongly recommend that you start out without it</a:t>
-            </a:r>
-            <a:endParaRPr/>
-          </a:p>
-          <a:p>
-            <a:pPr indent="-342900" lvl="0" marL="457200" rtl="0" algn="l">
-              <a:spcBef>
-                <a:spcPts val="0"/>
-              </a:spcBef>
-              <a:spcAft>
-                <a:spcPts val="0"/>
-              </a:spcAft>
-              <a:buSzPts val="1800"/>
-              <a:buChar char="-"/>
-            </a:pPr>
-            <a:r>
-              <a:rPr lang="en"/>
-              <a:t>You need reasonable fundamentals to be able to effectively use AI</a:t>
-            </a:r>
-            <a:endParaRPr/>
-          </a:p>
-        </p:txBody>
-      </p:sp>
+        </p:grpSpPr>
+        <p:sp>
+          <p:nvSpPr>
+            <p:cNvPr id="200" name="Google Shape;200;p25"/>
+            <p:cNvSpPr/>
+            <p:nvPr/>
+          </p:nvSpPr>
+          <p:spPr>
+            <a:xfrm>
+              <a:off x="0" y="0"/>
+              <a:ext cx="2476500" cy="2667000"/>
+            </a:xfrm>
+            <a:prstGeom prst="roundRect">
+              <a:avLst>
+                <a:gd fmla="val 6153" name="adj"/>
+              </a:avLst>
+            </a:prstGeom>
+            <a:solidFill>
+              <a:srgbClr val="FFFFFF"/>
+            </a:solidFill>
+            <a:ln cap="flat" cmpd="sng" w="14300">
+              <a:solidFill>
+                <a:srgbClr val="E2E8F0"/>
+              </a:solidFill>
+              <a:prstDash val="solid"/>
+              <a:round/>
+              <a:headEnd len="sm" w="sm" type="none"/>
+              <a:tailEnd len="sm" w="sm" type="none"/>
+            </a:ln>
+          </p:spPr>
+          <p:txBody>
+            <a:bodyPr anchorCtr="0" anchor="ctr" bIns="0" lIns="0" spcFirstLastPara="1" rIns="0" wrap="square" tIns="0">
+              <a:noAutofit/>
+            </a:bodyPr>
+            <a:lstStyle/>
+            <a:p>
+              <a:pPr indent="0" lvl="0" marL="0" rtl="0" algn="l">
+                <a:spcBef>
+                  <a:spcPts val="0"/>
+                </a:spcBef>
+                <a:spcAft>
+                  <a:spcPts val="0"/>
+                </a:spcAft>
+                <a:buNone/>
+              </a:pPr>
+              <a:r>
+                <a:t/>
+              </a:r>
+              <a:endParaRPr/>
+            </a:p>
+          </p:txBody>
+        </p:sp>
+        <p:sp>
+          <p:nvSpPr>
+            <p:cNvPr id="201" name="Google Shape;201;p25"/>
+            <p:cNvSpPr/>
+            <p:nvPr/>
+          </p:nvSpPr>
+          <p:spPr>
+            <a:xfrm>
+              <a:off x="228600" y="228600"/>
+              <a:ext cx="571500" cy="57300"/>
+            </a:xfrm>
+            <a:prstGeom prst="roundRect">
+              <a:avLst>
+                <a:gd fmla="val 50000" name="adj"/>
+              </a:avLst>
+            </a:prstGeom>
+            <a:solidFill>
+              <a:srgbClr val="6366F1"/>
+            </a:solidFill>
+            <a:ln>
+              <a:noFill/>
+            </a:ln>
+          </p:spPr>
+          <p:txBody>
+            <a:bodyPr anchorCtr="0" anchor="ctr" bIns="0" lIns="0" spcFirstLastPara="1" rIns="0" wrap="square" tIns="0">
+              <a:noAutofit/>
+            </a:bodyPr>
+            <a:lstStyle/>
+            <a:p>
+              <a:pPr indent="0" lvl="0" marL="0" rtl="0" algn="l">
+                <a:spcBef>
+                  <a:spcPts val="0"/>
+                </a:spcBef>
+                <a:spcAft>
+                  <a:spcPts val="0"/>
+                </a:spcAft>
+                <a:buNone/>
+              </a:pPr>
+              <a:r>
+                <a:t/>
+              </a:r>
+              <a:endParaRPr/>
+            </a:p>
+          </p:txBody>
+        </p:sp>
+        <p:sp>
+          <p:nvSpPr>
+            <p:cNvPr id="202" name="Google Shape;202;p25"/>
+            <p:cNvSpPr txBox="1"/>
+            <p:nvPr/>
+          </p:nvSpPr>
+          <p:spPr>
+            <a:xfrm>
+              <a:off x="0" y="0"/>
+              <a:ext cx="2476500" cy="2667000"/>
+            </a:xfrm>
+            <a:prstGeom prst="rect">
+              <a:avLst/>
+            </a:prstGeom>
+            <a:solidFill>
+              <a:srgbClr val="000000">
+                <a:alpha val="0"/>
+              </a:srgbClr>
+            </a:solidFill>
+            <a:ln>
+              <a:noFill/>
+            </a:ln>
+          </p:spPr>
+          <p:txBody>
+            <a:bodyPr anchorCtr="0" anchor="t" bIns="228600" lIns="228600" spcFirstLastPara="1" rIns="228600" wrap="square" tIns="381000">
+              <a:noAutofit/>
+            </a:bodyPr>
+            <a:lstStyle/>
+            <a:p>
+              <a:pPr indent="0" lvl="0" marL="0" rtl="0" algn="l">
+                <a:spcBef>
+                  <a:spcPts val="0"/>
+                </a:spcBef>
+                <a:spcAft>
+                  <a:spcPts val="0"/>
+                </a:spcAft>
+                <a:buNone/>
+              </a:pPr>
+              <a:r>
+                <a:rPr b="1" lang="en" sz="1100">
+                  <a:solidFill>
+                    <a:srgbClr val="6366F1"/>
+                  </a:solidFill>
+                  <a:latin typeface="Inter"/>
+                  <a:ea typeface="Inter"/>
+                  <a:cs typeface="Inter"/>
+                  <a:sym typeface="Inter"/>
+                </a:rPr>
+                <a:t>TIMING</a:t>
+              </a:r>
+              <a:endParaRPr b="1" sz="1100">
+                <a:solidFill>
+                  <a:srgbClr val="6366F1"/>
+                </a:solidFill>
+                <a:latin typeface="Inter"/>
+                <a:ea typeface="Inter"/>
+                <a:cs typeface="Inter"/>
+                <a:sym typeface="Inter"/>
+              </a:endParaRPr>
+            </a:p>
+            <a:p>
+              <a:pPr indent="0" lvl="0" marL="0" rtl="0" algn="l">
+                <a:spcBef>
+                  <a:spcPts val="900"/>
+                </a:spcBef>
+                <a:spcAft>
+                  <a:spcPts val="0"/>
+                </a:spcAft>
+                <a:buNone/>
+              </a:pPr>
+              <a:r>
+                <a:rPr b="0" lang="en" sz="1300">
+                  <a:solidFill>
+                    <a:srgbClr val="334155"/>
+                  </a:solidFill>
+                  <a:latin typeface="Inter"/>
+                  <a:ea typeface="Inter"/>
+                  <a:cs typeface="Inter"/>
+                  <a:sym typeface="Inter"/>
+                </a:rPr>
+                <a:t>We’ll cover AI later in the semester, once the foundations are established.</a:t>
+              </a:r>
+              <a:endParaRPr b="0" sz="1300">
+                <a:solidFill>
+                  <a:srgbClr val="334155"/>
+                </a:solidFill>
+                <a:latin typeface="Inter"/>
+                <a:ea typeface="Inter"/>
+                <a:cs typeface="Inter"/>
+                <a:sym typeface="Inter"/>
+              </a:endParaRPr>
+            </a:p>
+          </p:txBody>
+        </p:sp>
+      </p:grpSp>
+      <p:grpSp>
+        <p:nvGrpSpPr>
+          <p:cNvPr id="203" name="Google Shape;203;p25"/>
+          <p:cNvGrpSpPr/>
+          <p:nvPr/>
+        </p:nvGrpSpPr>
+        <p:grpSpPr>
+          <a:xfrm>
+            <a:off x="3333750" y="1714500"/>
+            <a:ext cx="2476500" cy="2667000"/>
+            <a:chOff x="0" y="0"/>
+            <a:chExt cx="2476500" cy="2667000"/>
+          </a:xfrm>
+        </p:grpSpPr>
+        <p:sp>
+          <p:nvSpPr>
+            <p:cNvPr id="204" name="Google Shape;204;p25"/>
+            <p:cNvSpPr/>
+            <p:nvPr/>
+          </p:nvSpPr>
+          <p:spPr>
+            <a:xfrm>
+              <a:off x="0" y="0"/>
+              <a:ext cx="2476500" cy="2667000"/>
+            </a:xfrm>
+            <a:prstGeom prst="roundRect">
+              <a:avLst>
+                <a:gd fmla="val 6153" name="adj"/>
+              </a:avLst>
+            </a:prstGeom>
+            <a:solidFill>
+              <a:srgbClr val="FFFFFF"/>
+            </a:solidFill>
+            <a:ln cap="flat" cmpd="sng" w="14300">
+              <a:solidFill>
+                <a:srgbClr val="E2E8F0"/>
+              </a:solidFill>
+              <a:prstDash val="solid"/>
+              <a:round/>
+              <a:headEnd len="sm" w="sm" type="none"/>
+              <a:tailEnd len="sm" w="sm" type="none"/>
+            </a:ln>
+          </p:spPr>
+          <p:txBody>
+            <a:bodyPr anchorCtr="0" anchor="ctr" bIns="0" lIns="0" spcFirstLastPara="1" rIns="0" wrap="square" tIns="0">
+              <a:noAutofit/>
+            </a:bodyPr>
+            <a:lstStyle/>
+            <a:p>
+              <a:pPr indent="0" lvl="0" marL="0" rtl="0" algn="l">
+                <a:spcBef>
+                  <a:spcPts val="0"/>
+                </a:spcBef>
+                <a:spcAft>
+                  <a:spcPts val="0"/>
+                </a:spcAft>
+                <a:buNone/>
+              </a:pPr>
+              <a:r>
+                <a:t/>
+              </a:r>
+              <a:endParaRPr/>
+            </a:p>
+          </p:txBody>
+        </p:sp>
+        <p:sp>
+          <p:nvSpPr>
+            <p:cNvPr id="205" name="Google Shape;205;p25"/>
+            <p:cNvSpPr/>
+            <p:nvPr/>
+          </p:nvSpPr>
+          <p:spPr>
+            <a:xfrm>
+              <a:off x="228600" y="228600"/>
+              <a:ext cx="571500" cy="57300"/>
+            </a:xfrm>
+            <a:prstGeom prst="roundRect">
+              <a:avLst>
+                <a:gd fmla="val 50000" name="adj"/>
+              </a:avLst>
+            </a:prstGeom>
+            <a:solidFill>
+              <a:srgbClr val="EF4444"/>
+            </a:solidFill>
+            <a:ln>
+              <a:noFill/>
+            </a:ln>
+          </p:spPr>
+          <p:txBody>
+            <a:bodyPr anchorCtr="0" anchor="ctr" bIns="0" lIns="0" spcFirstLastPara="1" rIns="0" wrap="square" tIns="0">
+              <a:noAutofit/>
+            </a:bodyPr>
+            <a:lstStyle/>
+            <a:p>
+              <a:pPr indent="0" lvl="0" marL="0" rtl="0" algn="l">
+                <a:spcBef>
+                  <a:spcPts val="0"/>
+                </a:spcBef>
+                <a:spcAft>
+                  <a:spcPts val="0"/>
+                </a:spcAft>
+                <a:buNone/>
+              </a:pPr>
+              <a:r>
+                <a:t/>
+              </a:r>
+              <a:endParaRPr/>
+            </a:p>
+          </p:txBody>
+        </p:sp>
+        <p:sp>
+          <p:nvSpPr>
+            <p:cNvPr id="206" name="Google Shape;206;p25"/>
+            <p:cNvSpPr txBox="1"/>
+            <p:nvPr/>
+          </p:nvSpPr>
+          <p:spPr>
+            <a:xfrm>
+              <a:off x="0" y="0"/>
+              <a:ext cx="2476500" cy="2667000"/>
+            </a:xfrm>
+            <a:prstGeom prst="rect">
+              <a:avLst/>
+            </a:prstGeom>
+            <a:solidFill>
+              <a:srgbClr val="000000">
+                <a:alpha val="0"/>
+              </a:srgbClr>
+            </a:solidFill>
+            <a:ln>
+              <a:noFill/>
+            </a:ln>
+          </p:spPr>
+          <p:txBody>
+            <a:bodyPr anchorCtr="0" anchor="t" bIns="228600" lIns="228600" spcFirstLastPara="1" rIns="228600" wrap="square" tIns="381000">
+              <a:noAutofit/>
+            </a:bodyPr>
+            <a:lstStyle/>
+            <a:p>
+              <a:pPr indent="0" lvl="0" marL="0" rtl="0" algn="l">
+                <a:spcBef>
+                  <a:spcPts val="0"/>
+                </a:spcBef>
+                <a:spcAft>
+                  <a:spcPts val="0"/>
+                </a:spcAft>
+                <a:buNone/>
+              </a:pPr>
+              <a:r>
+                <a:rPr b="1" lang="en" sz="1100">
+                  <a:solidFill>
+                    <a:srgbClr val="EF4444"/>
+                  </a:solidFill>
+                  <a:latin typeface="Inter"/>
+                  <a:ea typeface="Inter"/>
+                  <a:cs typeface="Inter"/>
+                  <a:sym typeface="Inter"/>
+                </a:rPr>
+                <a:t>APPROACH</a:t>
+              </a:r>
+              <a:endParaRPr b="1" sz="1100">
+                <a:solidFill>
+                  <a:srgbClr val="EF4444"/>
+                </a:solidFill>
+                <a:latin typeface="Inter"/>
+                <a:ea typeface="Inter"/>
+                <a:cs typeface="Inter"/>
+                <a:sym typeface="Inter"/>
+              </a:endParaRPr>
+            </a:p>
+            <a:p>
+              <a:pPr indent="0" lvl="0" marL="0" rtl="0" algn="l">
+                <a:spcBef>
+                  <a:spcPts val="900"/>
+                </a:spcBef>
+                <a:spcAft>
+                  <a:spcPts val="0"/>
+                </a:spcAft>
+                <a:buNone/>
+              </a:pPr>
+              <a:r>
+                <a:rPr b="0" lang="en" sz="1300">
+                  <a:solidFill>
+                    <a:srgbClr val="334155"/>
+                  </a:solidFill>
+                  <a:latin typeface="Inter"/>
+                  <a:ea typeface="Inter"/>
+                  <a:cs typeface="Inter"/>
+                  <a:sym typeface="Inter"/>
+                </a:rPr>
+                <a:t>Strongly recommend that you start out without it to truly grasp the mechanics.</a:t>
+              </a:r>
+              <a:endParaRPr b="0" sz="1300">
+                <a:solidFill>
+                  <a:srgbClr val="334155"/>
+                </a:solidFill>
+                <a:latin typeface="Inter"/>
+                <a:ea typeface="Inter"/>
+                <a:cs typeface="Inter"/>
+                <a:sym typeface="Inter"/>
+              </a:endParaRPr>
+            </a:p>
+          </p:txBody>
+        </p:sp>
+      </p:grpSp>
+      <p:grpSp>
+        <p:nvGrpSpPr>
+          <p:cNvPr id="207" name="Google Shape;207;p25"/>
+          <p:cNvGrpSpPr/>
+          <p:nvPr/>
+        </p:nvGrpSpPr>
+        <p:grpSpPr>
+          <a:xfrm>
+            <a:off x="6096000" y="1714500"/>
+            <a:ext cx="2476500" cy="2667000"/>
+            <a:chOff x="0" y="0"/>
+            <a:chExt cx="2476500" cy="2667000"/>
+          </a:xfrm>
+        </p:grpSpPr>
+        <p:sp>
+          <p:nvSpPr>
+            <p:cNvPr id="208" name="Google Shape;208;p25"/>
+            <p:cNvSpPr/>
+            <p:nvPr/>
+          </p:nvSpPr>
+          <p:spPr>
+            <a:xfrm>
+              <a:off x="0" y="0"/>
+              <a:ext cx="2476500" cy="2667000"/>
+            </a:xfrm>
+            <a:prstGeom prst="roundRect">
+              <a:avLst>
+                <a:gd fmla="val 6153" name="adj"/>
+              </a:avLst>
+            </a:prstGeom>
+            <a:solidFill>
+              <a:srgbClr val="FFFFFF"/>
+            </a:solidFill>
+            <a:ln cap="flat" cmpd="sng" w="14300">
+              <a:solidFill>
+                <a:srgbClr val="E2E8F0"/>
+              </a:solidFill>
+              <a:prstDash val="solid"/>
+              <a:round/>
+              <a:headEnd len="sm" w="sm" type="none"/>
+              <a:tailEnd len="sm" w="sm" type="none"/>
+            </a:ln>
+          </p:spPr>
+          <p:txBody>
+            <a:bodyPr anchorCtr="0" anchor="ctr" bIns="0" lIns="0" spcFirstLastPara="1" rIns="0" wrap="square" tIns="0">
+              <a:noAutofit/>
+            </a:bodyPr>
+            <a:lstStyle/>
+            <a:p>
+              <a:pPr indent="0" lvl="0" marL="0" rtl="0" algn="l">
+                <a:spcBef>
+                  <a:spcPts val="0"/>
+                </a:spcBef>
+                <a:spcAft>
+                  <a:spcPts val="0"/>
+                </a:spcAft>
+                <a:buNone/>
+              </a:pPr>
+              <a:r>
+                <a:t/>
+              </a:r>
+              <a:endParaRPr/>
+            </a:p>
+          </p:txBody>
+        </p:sp>
+        <p:sp>
+          <p:nvSpPr>
+            <p:cNvPr id="209" name="Google Shape;209;p25"/>
+            <p:cNvSpPr/>
+            <p:nvPr/>
+          </p:nvSpPr>
+          <p:spPr>
+            <a:xfrm>
+              <a:off x="228600" y="228600"/>
+              <a:ext cx="571500" cy="57300"/>
+            </a:xfrm>
+            <a:prstGeom prst="roundRect">
+              <a:avLst>
+                <a:gd fmla="val 50000" name="adj"/>
+              </a:avLst>
+            </a:prstGeom>
+            <a:solidFill>
+              <a:srgbClr val="10B981"/>
+            </a:solidFill>
+            <a:ln>
+              <a:noFill/>
+            </a:ln>
+          </p:spPr>
+          <p:txBody>
+            <a:bodyPr anchorCtr="0" anchor="ctr" bIns="0" lIns="0" spcFirstLastPara="1" rIns="0" wrap="square" tIns="0">
+              <a:noAutofit/>
+            </a:bodyPr>
+            <a:lstStyle/>
+            <a:p>
+              <a:pPr indent="0" lvl="0" marL="0" rtl="0" algn="l">
+                <a:spcBef>
+                  <a:spcPts val="0"/>
+                </a:spcBef>
+                <a:spcAft>
+                  <a:spcPts val="0"/>
+                </a:spcAft>
+                <a:buNone/>
+              </a:pPr>
+              <a:r>
+                <a:t/>
+              </a:r>
+              <a:endParaRPr/>
+            </a:p>
+          </p:txBody>
+        </p:sp>
+        <p:sp>
+          <p:nvSpPr>
+            <p:cNvPr id="210" name="Google Shape;210;p25"/>
+            <p:cNvSpPr txBox="1"/>
+            <p:nvPr/>
+          </p:nvSpPr>
+          <p:spPr>
+            <a:xfrm>
+              <a:off x="0" y="0"/>
+              <a:ext cx="2476500" cy="2667000"/>
+            </a:xfrm>
+            <a:prstGeom prst="rect">
+              <a:avLst/>
+            </a:prstGeom>
+            <a:solidFill>
+              <a:srgbClr val="000000">
+                <a:alpha val="0"/>
+              </a:srgbClr>
+            </a:solidFill>
+            <a:ln>
+              <a:noFill/>
+            </a:ln>
+          </p:spPr>
+          <p:txBody>
+            <a:bodyPr anchorCtr="0" anchor="t" bIns="228600" lIns="228600" spcFirstLastPara="1" rIns="228600" wrap="square" tIns="381000">
+              <a:noAutofit/>
+            </a:bodyPr>
+            <a:lstStyle/>
+            <a:p>
+              <a:pPr indent="0" lvl="0" marL="0" rtl="0" algn="l">
+                <a:spcBef>
+                  <a:spcPts val="0"/>
+                </a:spcBef>
+                <a:spcAft>
+                  <a:spcPts val="0"/>
+                </a:spcAft>
+                <a:buNone/>
+              </a:pPr>
+              <a:r>
+                <a:rPr b="1" lang="en" sz="1100">
+                  <a:solidFill>
+                    <a:srgbClr val="10B981"/>
+                  </a:solidFill>
+                  <a:latin typeface="Inter"/>
+                  <a:ea typeface="Inter"/>
+                  <a:cs typeface="Inter"/>
+                  <a:sym typeface="Inter"/>
+                </a:rPr>
+                <a:t>REQUIREMENT</a:t>
+              </a:r>
+              <a:endParaRPr b="1" sz="1100">
+                <a:solidFill>
+                  <a:srgbClr val="10B981"/>
+                </a:solidFill>
+                <a:latin typeface="Inter"/>
+                <a:ea typeface="Inter"/>
+                <a:cs typeface="Inter"/>
+                <a:sym typeface="Inter"/>
+              </a:endParaRPr>
+            </a:p>
+            <a:p>
+              <a:pPr indent="0" lvl="0" marL="0" rtl="0" algn="l">
+                <a:spcBef>
+                  <a:spcPts val="900"/>
+                </a:spcBef>
+                <a:spcAft>
+                  <a:spcPts val="0"/>
+                </a:spcAft>
+                <a:buNone/>
+              </a:pPr>
+              <a:r>
+                <a:rPr b="0" lang="en" sz="1300">
+                  <a:solidFill>
+                    <a:srgbClr val="334155"/>
+                  </a:solidFill>
+                  <a:latin typeface="Inter"/>
+                  <a:ea typeface="Inter"/>
+                  <a:cs typeface="Inter"/>
+                  <a:sym typeface="Inter"/>
+                </a:rPr>
+                <a:t>You need reasonable fundamentals to be able to effectively and safely use AI.</a:t>
+              </a:r>
+              <a:endParaRPr b="0" sz="1300">
+                <a:solidFill>
+                  <a:srgbClr val="334155"/>
+                </a:solidFill>
+                <a:latin typeface="Inter"/>
+                <a:ea typeface="Inter"/>
+                <a:cs typeface="Inter"/>
+                <a:sym typeface="Inter"/>
+              </a:endParaRPr>
+            </a:p>
+          </p:txBody>
+        </p:sp>
+      </p:grpSp>
     </p:spTree>
   </p:cSld>
   <p:clrMapOvr>
@@ -9993,7 +11092,7 @@
   <p:cSld>
     <p:spTree>
       <p:nvGrpSpPr>
-        <p:cNvPr id="184" name="Shape 184"/>
+        <p:cNvPr id="214" name="Shape 214"/>
         <p:cNvGrpSpPr/>
         <p:nvPr/>
       </p:nvGrpSpPr>
@@ -10007,7 +11106,7 @@
       </p:grpSpPr>
       <p:sp>
         <p:nvSpPr>
-          <p:cNvPr id="185" name="Google Shape;185;p26"/>
+          <p:cNvPr id="215" name="Google Shape;215;p26"/>
           <p:cNvSpPr txBox="1"/>
           <p:nvPr>
             <p:ph type="title"/>
@@ -10058,7 +11157,7 @@
   <p:cSld>
     <p:spTree>
       <p:nvGrpSpPr>
-        <p:cNvPr id="189" name="Shape 189"/>
+        <p:cNvPr id="219" name="Shape 219"/>
         <p:cNvGrpSpPr/>
         <p:nvPr/>
       </p:nvGrpSpPr>
@@ -10072,7 +11171,7 @@
       </p:grpSpPr>
       <p:sp>
         <p:nvSpPr>
-          <p:cNvPr id="190" name="Google Shape;190;p27"/>
+          <p:cNvPr id="220" name="Google Shape;220;p27"/>
           <p:cNvSpPr txBox="1"/>
           <p:nvPr>
             <p:ph type="title"/>
@@ -10143,7 +11242,7 @@
     </p:bg>
     <p:spTree>
       <p:nvGrpSpPr>
-        <p:cNvPr id="194" name="Shape 194"/>
+        <p:cNvPr id="224" name="Shape 224"/>
         <p:cNvGrpSpPr/>
         <p:nvPr/>
       </p:nvGrpSpPr>
@@ -10157,7 +11256,7 @@
       </p:grpSpPr>
       <p:sp>
         <p:nvSpPr>
-          <p:cNvPr id="195" name="Google Shape;195;p28"/>
+          <p:cNvPr id="225" name="Google Shape;225;p28"/>
           <p:cNvSpPr txBox="1"/>
           <p:nvPr/>
         </p:nvSpPr>
@@ -10215,7 +11314,7 @@
       </p:sp>
       <p:grpSp>
         <p:nvGrpSpPr>
-          <p:cNvPr id="196" name="Google Shape;196;p28"/>
+          <p:cNvPr id="226" name="Google Shape;226;p28"/>
           <p:cNvGrpSpPr/>
           <p:nvPr/>
         </p:nvGrpSpPr>
@@ -10229,7 +11328,7 @@
         </p:grpSpPr>
         <p:sp>
           <p:nvSpPr>
-            <p:cNvPr id="197" name="Google Shape;197;p28"/>
+            <p:cNvPr id="227" name="Google Shape;227;p28"/>
             <p:cNvSpPr/>
             <p:nvPr/>
           </p:nvSpPr>
@@ -10280,7 +11379,7 @@
         </p:sp>
         <p:sp>
           <p:nvSpPr>
-            <p:cNvPr id="198" name="Google Shape;198;p28"/>
+            <p:cNvPr id="228" name="Google Shape;228;p28"/>
             <p:cNvSpPr txBox="1"/>
             <p:nvPr/>
           </p:nvSpPr>
@@ -10403,7 +11502,7 @@
       </p:grpSp>
       <p:grpSp>
         <p:nvGrpSpPr>
-          <p:cNvPr id="199" name="Google Shape;199;p28"/>
+          <p:cNvPr id="229" name="Google Shape;229;p28"/>
           <p:cNvGrpSpPr/>
           <p:nvPr/>
         </p:nvGrpSpPr>
@@ -10417,7 +11516,7 @@
         </p:grpSpPr>
         <p:sp>
           <p:nvSpPr>
-            <p:cNvPr id="200" name="Google Shape;200;p28"/>
+            <p:cNvPr id="230" name="Google Shape;230;p28"/>
             <p:cNvSpPr/>
             <p:nvPr/>
           </p:nvSpPr>
@@ -10468,7 +11567,7 @@
         </p:sp>
         <p:sp>
           <p:nvSpPr>
-            <p:cNvPr id="201" name="Google Shape;201;p28"/>
+            <p:cNvPr id="231" name="Google Shape;231;p28"/>
             <p:cNvSpPr txBox="1"/>
             <p:nvPr/>
           </p:nvSpPr>
@@ -10591,7 +11690,7 @@
       </p:grpSp>
       <p:grpSp>
         <p:nvGrpSpPr>
-          <p:cNvPr id="202" name="Google Shape;202;p28"/>
+          <p:cNvPr id="232" name="Google Shape;232;p28"/>
           <p:cNvGrpSpPr/>
           <p:nvPr/>
         </p:nvGrpSpPr>
@@ -10605,7 +11704,7 @@
         </p:grpSpPr>
         <p:sp>
           <p:nvSpPr>
-            <p:cNvPr id="203" name="Google Shape;203;p28"/>
+            <p:cNvPr id="233" name="Google Shape;233;p28"/>
             <p:cNvSpPr/>
             <p:nvPr/>
           </p:nvSpPr>
@@ -10656,7 +11755,7 @@
         </p:sp>
         <p:sp>
           <p:nvSpPr>
-            <p:cNvPr id="204" name="Google Shape;204;p28"/>
+            <p:cNvPr id="234" name="Google Shape;234;p28"/>
             <p:cNvSpPr txBox="1"/>
             <p:nvPr/>
           </p:nvSpPr>
@@ -10779,7 +11878,7 @@
       </p:grpSp>
       <p:grpSp>
         <p:nvGrpSpPr>
-          <p:cNvPr id="205" name="Google Shape;205;p28"/>
+          <p:cNvPr id="235" name="Google Shape;235;p28"/>
           <p:cNvGrpSpPr/>
           <p:nvPr/>
         </p:nvGrpSpPr>
@@ -10793,7 +11892,7 @@
         </p:grpSpPr>
         <p:sp>
           <p:nvSpPr>
-            <p:cNvPr id="206" name="Google Shape;206;p28"/>
+            <p:cNvPr id="236" name="Google Shape;236;p28"/>
             <p:cNvSpPr/>
             <p:nvPr/>
           </p:nvSpPr>
@@ -10844,7 +11943,7 @@
         </p:sp>
         <p:sp>
           <p:nvSpPr>
-            <p:cNvPr id="207" name="Google Shape;207;p28"/>
+            <p:cNvPr id="237" name="Google Shape;237;p28"/>
             <p:cNvSpPr txBox="1"/>
             <p:nvPr/>
           </p:nvSpPr>
@@ -10967,7 +12066,7 @@
       </p:grpSp>
       <p:grpSp>
         <p:nvGrpSpPr>
-          <p:cNvPr id="208" name="Google Shape;208;p28"/>
+          <p:cNvPr id="238" name="Google Shape;238;p28"/>
           <p:cNvGrpSpPr/>
           <p:nvPr/>
         </p:nvGrpSpPr>
@@ -10981,7 +12080,7 @@
         </p:grpSpPr>
         <p:sp>
           <p:nvSpPr>
-            <p:cNvPr id="209" name="Google Shape;209;p28"/>
+            <p:cNvPr id="239" name="Google Shape;239;p28"/>
             <p:cNvSpPr/>
             <p:nvPr/>
           </p:nvSpPr>
@@ -11032,7 +12131,7 @@
         </p:sp>
         <p:sp>
           <p:nvSpPr>
-            <p:cNvPr id="210" name="Google Shape;210;p28"/>
+            <p:cNvPr id="240" name="Google Shape;240;p28"/>
             <p:cNvSpPr txBox="1"/>
             <p:nvPr/>
           </p:nvSpPr>
@@ -11155,7 +12254,7 @@
       </p:grpSp>
       <p:grpSp>
         <p:nvGrpSpPr>
-          <p:cNvPr id="211" name="Google Shape;211;p28"/>
+          <p:cNvPr id="241" name="Google Shape;241;p28"/>
           <p:cNvGrpSpPr/>
           <p:nvPr/>
         </p:nvGrpSpPr>
@@ -11169,7 +12268,7 @@
         </p:grpSpPr>
         <p:sp>
           <p:nvSpPr>
-            <p:cNvPr id="212" name="Google Shape;212;p28"/>
+            <p:cNvPr id="242" name="Google Shape;242;p28"/>
             <p:cNvSpPr/>
             <p:nvPr/>
           </p:nvSpPr>
@@ -11220,7 +12319,7 @@
         </p:sp>
         <p:sp>
           <p:nvSpPr>
-            <p:cNvPr id="213" name="Google Shape;213;p28"/>
+            <p:cNvPr id="243" name="Google Shape;243;p28"/>
             <p:cNvSpPr txBox="1"/>
             <p:nvPr/>
           </p:nvSpPr>
@@ -11354,7 +12453,7 @@
   <p:cSld>
     <p:spTree>
       <p:nvGrpSpPr>
-        <p:cNvPr id="217" name="Shape 217"/>
+        <p:cNvPr id="247" name="Shape 247"/>
         <p:cNvGrpSpPr/>
         <p:nvPr/>
       </p:nvGrpSpPr>
@@ -11368,7 +12467,7 @@
       </p:grpSpPr>
       <p:grpSp>
         <p:nvGrpSpPr>
-          <p:cNvPr id="218" name="Google Shape;218;p29"/>
+          <p:cNvPr id="248" name="Google Shape;248;p29"/>
           <p:cNvGrpSpPr/>
           <p:nvPr/>
         </p:nvGrpSpPr>
@@ -11382,7 +12481,7 @@
         </p:grpSpPr>
         <p:sp>
           <p:nvSpPr>
-            <p:cNvPr id="219" name="Google Shape;219;p29"/>
+            <p:cNvPr id="249" name="Google Shape;249;p29"/>
             <p:cNvSpPr/>
             <p:nvPr/>
           </p:nvSpPr>
@@ -11427,7 +12526,7 @@
         </p:sp>
         <p:sp>
           <p:nvSpPr>
-            <p:cNvPr id="220" name="Google Shape;220;p29"/>
+            <p:cNvPr id="250" name="Google Shape;250;p29"/>
             <p:cNvSpPr txBox="1"/>
             <p:nvPr/>
           </p:nvSpPr>
@@ -11486,7 +12585,7 @@
       </p:grpSp>
       <p:grpSp>
         <p:nvGrpSpPr>
-          <p:cNvPr id="221" name="Google Shape;221;p29"/>
+          <p:cNvPr id="251" name="Google Shape;251;p29"/>
           <p:cNvGrpSpPr/>
           <p:nvPr/>
         </p:nvGrpSpPr>
@@ -11500,7 +12599,7 @@
         </p:grpSpPr>
         <p:sp>
           <p:nvSpPr>
-            <p:cNvPr id="222" name="Google Shape;222;p29"/>
+            <p:cNvPr id="252" name="Google Shape;252;p29"/>
             <p:cNvSpPr/>
             <p:nvPr/>
           </p:nvSpPr>
@@ -11545,7 +12644,7 @@
         </p:sp>
         <p:sp>
           <p:nvSpPr>
-            <p:cNvPr id="223" name="Google Shape;223;p29"/>
+            <p:cNvPr id="253" name="Google Shape;253;p29"/>
             <p:cNvSpPr txBox="1"/>
             <p:nvPr/>
           </p:nvSpPr>
@@ -11680,7 +12779,7 @@
       </p:grpSp>
       <p:grpSp>
         <p:nvGrpSpPr>
-          <p:cNvPr id="224" name="Google Shape;224;p29"/>
+          <p:cNvPr id="254" name="Google Shape;254;p29"/>
           <p:cNvGrpSpPr/>
           <p:nvPr/>
         </p:nvGrpSpPr>
@@ -11694,7 +12793,7 @@
         </p:grpSpPr>
         <p:sp>
           <p:nvSpPr>
-            <p:cNvPr id="225" name="Google Shape;225;p29"/>
+            <p:cNvPr id="255" name="Google Shape;255;p29"/>
             <p:cNvSpPr/>
             <p:nvPr/>
           </p:nvSpPr>
@@ -11745,7 +12844,7 @@
         </p:sp>
         <p:sp>
           <p:nvSpPr>
-            <p:cNvPr id="226" name="Google Shape;226;p29"/>
+            <p:cNvPr id="256" name="Google Shape;256;p29"/>
             <p:cNvSpPr txBox="1"/>
             <p:nvPr/>
           </p:nvSpPr>
@@ -11868,7 +12967,7 @@
       </p:grpSp>
       <p:grpSp>
         <p:nvGrpSpPr>
-          <p:cNvPr id="227" name="Google Shape;227;p29"/>
+          <p:cNvPr id="257" name="Google Shape;257;p29"/>
           <p:cNvGrpSpPr/>
           <p:nvPr/>
         </p:nvGrpSpPr>
@@ -11882,7 +12981,7 @@
         </p:grpSpPr>
         <p:sp>
           <p:nvSpPr>
-            <p:cNvPr id="228" name="Google Shape;228;p29"/>
+            <p:cNvPr id="258" name="Google Shape;258;p29"/>
             <p:cNvSpPr/>
             <p:nvPr/>
           </p:nvSpPr>
@@ -11933,7 +13032,7 @@
         </p:sp>
         <p:sp>
           <p:nvSpPr>
-            <p:cNvPr id="229" name="Google Shape;229;p29"/>
+            <p:cNvPr id="259" name="Google Shape;259;p29"/>
             <p:cNvSpPr txBox="1"/>
             <p:nvPr/>
           </p:nvSpPr>
@@ -12056,7 +13155,7 @@
       </p:grpSp>
       <p:grpSp>
         <p:nvGrpSpPr>
-          <p:cNvPr id="230" name="Google Shape;230;p29"/>
+          <p:cNvPr id="260" name="Google Shape;260;p29"/>
           <p:cNvGrpSpPr/>
           <p:nvPr/>
         </p:nvGrpSpPr>
@@ -12070,7 +13169,7 @@
         </p:grpSpPr>
         <p:sp>
           <p:nvSpPr>
-            <p:cNvPr id="231" name="Google Shape;231;p29"/>
+            <p:cNvPr id="261" name="Google Shape;261;p29"/>
             <p:cNvSpPr/>
             <p:nvPr/>
           </p:nvSpPr>
@@ -12121,7 +13220,7 @@
         </p:sp>
         <p:sp>
           <p:nvSpPr>
-            <p:cNvPr id="232" name="Google Shape;232;p29"/>
+            <p:cNvPr id="262" name="Google Shape;262;p29"/>
             <p:cNvSpPr txBox="1"/>
             <p:nvPr/>
           </p:nvSpPr>
@@ -12267,7 +13366,7 @@
     </p:bg>
     <p:spTree>
       <p:nvGrpSpPr>
-        <p:cNvPr id="236" name="Shape 236"/>
+        <p:cNvPr id="266" name="Shape 266"/>
         <p:cNvGrpSpPr/>
         <p:nvPr/>
       </p:nvGrpSpPr>
@@ -12281,7 +13380,7 @@
       </p:grpSpPr>
       <p:grpSp>
         <p:nvGrpSpPr>
-          <p:cNvPr id="237" name="Google Shape;237;p30"/>
+          <p:cNvPr id="267" name="Google Shape;267;p30"/>
           <p:cNvGrpSpPr/>
           <p:nvPr/>
         </p:nvGrpSpPr>
@@ -12295,7 +13394,7 @@
         </p:grpSpPr>
         <p:sp>
           <p:nvSpPr>
-            <p:cNvPr id="238" name="Google Shape;238;p30"/>
+            <p:cNvPr id="268" name="Google Shape;268;p30"/>
             <p:cNvSpPr/>
             <p:nvPr/>
           </p:nvSpPr>
@@ -12340,7 +13439,7 @@
         </p:sp>
         <p:sp>
           <p:nvSpPr>
-            <p:cNvPr id="239" name="Google Shape;239;p30"/>
+            <p:cNvPr id="269" name="Google Shape;269;p30"/>
             <p:cNvSpPr txBox="1"/>
             <p:nvPr/>
           </p:nvSpPr>
@@ -12399,7 +13498,7 @@
       </p:grpSp>
       <p:grpSp>
         <p:nvGrpSpPr>
-          <p:cNvPr id="240" name="Google Shape;240;p30"/>
+          <p:cNvPr id="270" name="Google Shape;270;p30"/>
           <p:cNvGrpSpPr/>
           <p:nvPr/>
         </p:nvGrpSpPr>
@@ -12413,7 +13512,7 @@
         </p:grpSpPr>
         <p:sp>
           <p:nvSpPr>
-            <p:cNvPr id="241" name="Google Shape;241;p30"/>
+            <p:cNvPr id="271" name="Google Shape;271;p30"/>
             <p:cNvSpPr/>
             <p:nvPr/>
           </p:nvSpPr>
@@ -12464,7 +13563,7 @@
         </p:sp>
         <p:sp>
           <p:nvSpPr>
-            <p:cNvPr id="242" name="Google Shape;242;p30"/>
+            <p:cNvPr id="272" name="Google Shape;272;p30"/>
             <p:cNvSpPr txBox="1"/>
             <p:nvPr/>
           </p:nvSpPr>
@@ -12587,7 +13686,7 @@
       </p:grpSp>
       <p:grpSp>
         <p:nvGrpSpPr>
-          <p:cNvPr id="243" name="Google Shape;243;p30"/>
+          <p:cNvPr id="273" name="Google Shape;273;p30"/>
           <p:cNvGrpSpPr/>
           <p:nvPr/>
         </p:nvGrpSpPr>
@@ -12601,7 +13700,7 @@
         </p:grpSpPr>
         <p:sp>
           <p:nvSpPr>
-            <p:cNvPr id="244" name="Google Shape;244;p30"/>
+            <p:cNvPr id="274" name="Google Shape;274;p30"/>
             <p:cNvSpPr/>
             <p:nvPr/>
           </p:nvSpPr>
@@ -12652,7 +13751,7 @@
         </p:sp>
         <p:sp>
           <p:nvSpPr>
-            <p:cNvPr id="245" name="Google Shape;245;p30"/>
+            <p:cNvPr id="275" name="Google Shape;275;p30"/>
             <p:cNvSpPr txBox="1"/>
             <p:nvPr/>
           </p:nvSpPr>
@@ -12775,7 +13874,7 @@
       </p:grpSp>
       <p:grpSp>
         <p:nvGrpSpPr>
-          <p:cNvPr id="246" name="Google Shape;246;p30"/>
+          <p:cNvPr id="276" name="Google Shape;276;p30"/>
           <p:cNvGrpSpPr/>
           <p:nvPr/>
         </p:nvGrpSpPr>
@@ -12789,7 +13888,7 @@
         </p:grpSpPr>
         <p:sp>
           <p:nvSpPr>
-            <p:cNvPr id="247" name="Google Shape;247;p30"/>
+            <p:cNvPr id="277" name="Google Shape;277;p30"/>
             <p:cNvSpPr/>
             <p:nvPr/>
           </p:nvSpPr>
@@ -12840,7 +13939,7 @@
         </p:sp>
         <p:sp>
           <p:nvSpPr>
-            <p:cNvPr id="248" name="Google Shape;248;p30"/>
+            <p:cNvPr id="278" name="Google Shape;278;p30"/>
             <p:cNvSpPr txBox="1"/>
             <p:nvPr/>
           </p:nvSpPr>
@@ -12963,7 +14062,7 @@
       </p:grpSp>
       <p:grpSp>
         <p:nvGrpSpPr>
-          <p:cNvPr id="249" name="Google Shape;249;p30"/>
+          <p:cNvPr id="279" name="Google Shape;279;p30"/>
           <p:cNvGrpSpPr/>
           <p:nvPr/>
         </p:nvGrpSpPr>
@@ -12977,7 +14076,7 @@
         </p:grpSpPr>
         <p:sp>
           <p:nvSpPr>
-            <p:cNvPr id="250" name="Google Shape;250;p30"/>
+            <p:cNvPr id="280" name="Google Shape;280;p30"/>
             <p:cNvSpPr/>
             <p:nvPr/>
           </p:nvSpPr>
@@ -13028,7 +14127,7 @@
         </p:sp>
         <p:sp>
           <p:nvSpPr>
-            <p:cNvPr id="251" name="Google Shape;251;p30"/>
+            <p:cNvPr id="281" name="Google Shape;281;p30"/>
             <p:cNvSpPr txBox="1"/>
             <p:nvPr/>
           </p:nvSpPr>
@@ -13162,7 +14261,7 @@
   <p:cSld>
     <p:spTree>
       <p:nvGrpSpPr>
-        <p:cNvPr id="255" name="Shape 255"/>
+        <p:cNvPr id="285" name="Shape 285"/>
         <p:cNvGrpSpPr/>
         <p:nvPr/>
       </p:nvGrpSpPr>
@@ -13176,7 +14275,7 @@
       </p:grpSpPr>
       <p:sp>
         <p:nvSpPr>
-          <p:cNvPr id="256" name="Google Shape;256;p31"/>
+          <p:cNvPr id="286" name="Google Shape;286;p31"/>
           <p:cNvSpPr txBox="1"/>
           <p:nvPr>
             <p:ph type="title"/>
@@ -13216,7 +14315,7 @@
       </p:sp>
       <p:pic>
         <p:nvPicPr>
-          <p:cNvPr id="257" name="Google Shape;257;p31"/>
+          <p:cNvPr id="287" name="Google Shape;287;p31"/>
           <p:cNvPicPr preferRelativeResize="0"/>
           <p:nvPr/>
         </p:nvPicPr>
@@ -13244,7 +14343,7 @@
       </p:pic>
       <p:pic>
         <p:nvPicPr>
-          <p:cNvPr id="258" name="Google Shape;258;p31"/>
+          <p:cNvPr id="288" name="Google Shape;288;p31"/>
           <p:cNvPicPr preferRelativeResize="0"/>
           <p:nvPr/>
         </p:nvPicPr>
@@ -13975,7 +15074,7 @@
   <p:cSld>
     <p:spTree>
       <p:nvGrpSpPr>
-        <p:cNvPr id="262" name="Shape 262"/>
+        <p:cNvPr id="292" name="Shape 292"/>
         <p:cNvGrpSpPr/>
         <p:nvPr/>
       </p:nvGrpSpPr>
@@ -13989,7 +15088,7 @@
       </p:grpSpPr>
       <p:sp>
         <p:nvSpPr>
-          <p:cNvPr id="263" name="Google Shape;263;p32"/>
+          <p:cNvPr id="293" name="Google Shape;293;p32"/>
           <p:cNvSpPr txBox="1"/>
           <p:nvPr>
             <p:ph type="title"/>
@@ -14029,7 +15128,7 @@
       </p:sp>
       <p:pic>
         <p:nvPicPr>
-          <p:cNvPr id="264" name="Google Shape;264;p32"/>
+          <p:cNvPr id="294" name="Google Shape;294;p32"/>
           <p:cNvPicPr preferRelativeResize="0"/>
           <p:nvPr/>
         </p:nvPicPr>
@@ -14057,7 +15156,7 @@
       </p:pic>
       <p:sp>
         <p:nvSpPr>
-          <p:cNvPr id="265" name="Google Shape;265;p32"/>
+          <p:cNvPr id="295" name="Google Shape;295;p32"/>
           <p:cNvSpPr txBox="1"/>
           <p:nvPr/>
         </p:nvSpPr>
@@ -14130,7 +15229,7 @@
     </p:bg>
     <p:spTree>
       <p:nvGrpSpPr>
-        <p:cNvPr id="269" name="Shape 269"/>
+        <p:cNvPr id="299" name="Shape 299"/>
         <p:cNvGrpSpPr/>
         <p:nvPr/>
       </p:nvGrpSpPr>
@@ -14144,7 +15243,7 @@
       </p:grpSpPr>
       <p:sp>
         <p:nvSpPr>
-          <p:cNvPr id="270" name="Google Shape;270;p33"/>
+          <p:cNvPr id="300" name="Google Shape;300;p33"/>
           <p:cNvSpPr txBox="1"/>
           <p:nvPr/>
         </p:nvSpPr>
@@ -14234,7 +15333,7 @@
       </p:sp>
       <p:grpSp>
         <p:nvGrpSpPr>
-          <p:cNvPr id="271" name="Google Shape;271;p33"/>
+          <p:cNvPr id="301" name="Google Shape;301;p33"/>
           <p:cNvGrpSpPr/>
           <p:nvPr/>
         </p:nvGrpSpPr>
@@ -14248,7 +15347,7 @@
         </p:grpSpPr>
         <p:sp>
           <p:nvSpPr>
-            <p:cNvPr id="272" name="Google Shape;272;p33"/>
+            <p:cNvPr id="302" name="Google Shape;302;p33"/>
             <p:cNvSpPr/>
             <p:nvPr/>
           </p:nvSpPr>
@@ -14299,7 +15398,7 @@
         </p:sp>
         <p:sp>
           <p:nvSpPr>
-            <p:cNvPr id="273" name="Google Shape;273;p33"/>
+            <p:cNvPr id="303" name="Google Shape;303;p33"/>
             <p:cNvSpPr/>
             <p:nvPr/>
           </p:nvSpPr>
@@ -14342,7 +15441,7 @@
         </p:sp>
         <p:sp>
           <p:nvSpPr>
-            <p:cNvPr id="274" name="Google Shape;274;p33"/>
+            <p:cNvPr id="304" name="Google Shape;304;p33"/>
             <p:cNvSpPr txBox="1"/>
             <p:nvPr/>
           </p:nvSpPr>
@@ -14400,7 +15499,7 @@
         </p:sp>
         <p:sp>
           <p:nvSpPr>
-            <p:cNvPr id="275" name="Google Shape;275;p33"/>
+            <p:cNvPr id="305" name="Google Shape;305;p33"/>
             <p:cNvSpPr txBox="1"/>
             <p:nvPr/>
           </p:nvSpPr>
@@ -14491,7 +15590,7 @@
       </p:grpSp>
       <p:grpSp>
         <p:nvGrpSpPr>
-          <p:cNvPr id="276" name="Google Shape;276;p33"/>
+          <p:cNvPr id="306" name="Google Shape;306;p33"/>
           <p:cNvGrpSpPr/>
           <p:nvPr/>
         </p:nvGrpSpPr>
@@ -14505,7 +15604,7 @@
         </p:grpSpPr>
         <p:sp>
           <p:nvSpPr>
-            <p:cNvPr id="277" name="Google Shape;277;p33"/>
+            <p:cNvPr id="307" name="Google Shape;307;p33"/>
             <p:cNvSpPr/>
             <p:nvPr/>
           </p:nvSpPr>
@@ -14556,7 +15655,7 @@
         </p:sp>
         <p:sp>
           <p:nvSpPr>
-            <p:cNvPr id="278" name="Google Shape;278;p33"/>
+            <p:cNvPr id="308" name="Google Shape;308;p33"/>
             <p:cNvSpPr/>
             <p:nvPr/>
           </p:nvSpPr>
@@ -14599,7 +15698,7 @@
         </p:sp>
         <p:sp>
           <p:nvSpPr>
-            <p:cNvPr id="279" name="Google Shape;279;p33"/>
+            <p:cNvPr id="309" name="Google Shape;309;p33"/>
             <p:cNvSpPr txBox="1"/>
             <p:nvPr/>
           </p:nvSpPr>
@@ -14657,7 +15756,7 @@
         </p:sp>
         <p:sp>
           <p:nvSpPr>
-            <p:cNvPr id="280" name="Google Shape;280;p33"/>
+            <p:cNvPr id="310" name="Google Shape;310;p33"/>
             <p:cNvSpPr txBox="1"/>
             <p:nvPr/>
           </p:nvSpPr>
@@ -14748,7 +15847,7 @@
       </p:grpSp>
       <p:grpSp>
         <p:nvGrpSpPr>
-          <p:cNvPr id="281" name="Google Shape;281;p33"/>
+          <p:cNvPr id="311" name="Google Shape;311;p33"/>
           <p:cNvGrpSpPr/>
           <p:nvPr/>
         </p:nvGrpSpPr>
@@ -14762,7 +15861,7 @@
         </p:grpSpPr>
         <p:sp>
           <p:nvSpPr>
-            <p:cNvPr id="282" name="Google Shape;282;p33"/>
+            <p:cNvPr id="312" name="Google Shape;312;p33"/>
             <p:cNvSpPr/>
             <p:nvPr/>
           </p:nvSpPr>
@@ -14813,7 +15912,7 @@
         </p:sp>
         <p:sp>
           <p:nvSpPr>
-            <p:cNvPr id="283" name="Google Shape;283;p33"/>
+            <p:cNvPr id="313" name="Google Shape;313;p33"/>
             <p:cNvSpPr/>
             <p:nvPr/>
           </p:nvSpPr>
@@ -14856,7 +15955,7 @@
         </p:sp>
         <p:sp>
           <p:nvSpPr>
-            <p:cNvPr id="284" name="Google Shape;284;p33"/>
+            <p:cNvPr id="314" name="Google Shape;314;p33"/>
             <p:cNvSpPr txBox="1"/>
             <p:nvPr/>
           </p:nvSpPr>
@@ -14914,7 +16013,7 @@
         </p:sp>
         <p:sp>
           <p:nvSpPr>
-            <p:cNvPr id="285" name="Google Shape;285;p33"/>
+            <p:cNvPr id="315" name="Google Shape;315;p33"/>
             <p:cNvSpPr txBox="1"/>
             <p:nvPr/>
           </p:nvSpPr>
@@ -14984,7 +16083,7 @@
   <p:cSld>
     <p:spTree>
       <p:nvGrpSpPr>
-        <p:cNvPr id="289" name="Shape 289"/>
+        <p:cNvPr id="319" name="Shape 319"/>
         <p:cNvGrpSpPr/>
         <p:nvPr/>
       </p:nvGrpSpPr>
@@ -14998,7 +16097,7 @@
       </p:grpSpPr>
       <p:sp>
         <p:nvSpPr>
-          <p:cNvPr id="290" name="Google Shape;290;p34"/>
+          <p:cNvPr id="320" name="Google Shape;320;p34"/>
           <p:cNvSpPr txBox="1"/>
           <p:nvPr>
             <p:ph type="title"/>
@@ -15038,7 +16137,7 @@
       </p:sp>
       <p:pic>
         <p:nvPicPr>
-          <p:cNvPr id="291" name="Google Shape;291;p34"/>
+          <p:cNvPr id="321" name="Google Shape;321;p34"/>
           <p:cNvPicPr preferRelativeResize="0"/>
           <p:nvPr/>
         </p:nvPicPr>
@@ -15071,7 +16170,7 @@
       </p:pic>
       <p:pic>
         <p:nvPicPr>
-          <p:cNvPr id="292" name="Google Shape;292;p34"/>
+          <p:cNvPr id="322" name="Google Shape;322;p34"/>
           <p:cNvPicPr preferRelativeResize="0"/>
           <p:nvPr/>
         </p:nvPicPr>
@@ -15098,7 +16197,7 @@
       </p:pic>
       <p:pic>
         <p:nvPicPr>
-          <p:cNvPr id="293" name="Google Shape;293;p34"/>
+          <p:cNvPr id="323" name="Google Shape;323;p34"/>
           <p:cNvPicPr preferRelativeResize="0"/>
           <p:nvPr/>
         </p:nvPicPr>
@@ -15136,7 +16235,7 @@
   <p:cSld>
     <p:spTree>
       <p:nvGrpSpPr>
-        <p:cNvPr id="297" name="Shape 297"/>
+        <p:cNvPr id="327" name="Shape 327"/>
         <p:cNvGrpSpPr/>
         <p:nvPr/>
       </p:nvGrpSpPr>
@@ -15150,7 +16249,7 @@
       </p:grpSpPr>
       <p:sp>
         <p:nvSpPr>
-          <p:cNvPr id="298" name="Google Shape;298;p35"/>
+          <p:cNvPr id="328" name="Google Shape;328;p35"/>
           <p:cNvSpPr txBox="1"/>
           <p:nvPr>
             <p:ph type="title"/>
@@ -15190,7 +16289,7 @@
       </p:sp>
       <p:pic>
         <p:nvPicPr>
-          <p:cNvPr id="299" name="Google Shape;299;p35"/>
+          <p:cNvPr id="329" name="Google Shape;329;p35"/>
           <p:cNvPicPr preferRelativeResize="0"/>
           <p:nvPr/>
         </p:nvPicPr>
@@ -15223,7 +16322,7 @@
       </p:pic>
       <p:pic>
         <p:nvPicPr>
-          <p:cNvPr id="300" name="Google Shape;300;p35"/>
+          <p:cNvPr id="330" name="Google Shape;330;p35"/>
           <p:cNvPicPr preferRelativeResize="0"/>
           <p:nvPr/>
         </p:nvPicPr>
@@ -15250,7 +16349,7 @@
       </p:pic>
       <p:pic>
         <p:nvPicPr>
-          <p:cNvPr id="301" name="Google Shape;301;p35"/>
+          <p:cNvPr id="331" name="Google Shape;331;p35"/>
           <p:cNvPicPr preferRelativeResize="0"/>
           <p:nvPr/>
         </p:nvPicPr>
@@ -15277,7 +16376,7 @@
       </p:pic>
       <p:pic>
         <p:nvPicPr>
-          <p:cNvPr id="302" name="Google Shape;302;p35"/>
+          <p:cNvPr id="332" name="Google Shape;332;p35"/>
           <p:cNvPicPr preferRelativeResize="0"/>
           <p:nvPr/>
         </p:nvPicPr>
@@ -15315,7 +16414,7 @@
   <p:cSld>
     <p:spTree>
       <p:nvGrpSpPr>
-        <p:cNvPr id="306" name="Shape 306"/>
+        <p:cNvPr id="336" name="Shape 336"/>
         <p:cNvGrpSpPr/>
         <p:nvPr/>
       </p:nvGrpSpPr>
@@ -15329,7 +16428,7 @@
       </p:grpSpPr>
       <p:sp>
         <p:nvSpPr>
-          <p:cNvPr id="307" name="Google Shape;307;p36"/>
+          <p:cNvPr id="337" name="Google Shape;337;p36"/>
           <p:cNvSpPr txBox="1"/>
           <p:nvPr>
             <p:ph type="title"/>
@@ -15369,7 +16468,7 @@
       </p:sp>
       <p:sp>
         <p:nvSpPr>
-          <p:cNvPr id="308" name="Google Shape;308;p36"/>
+          <p:cNvPr id="338" name="Google Shape;338;p36"/>
           <p:cNvSpPr txBox="1"/>
           <p:nvPr/>
         </p:nvSpPr>
@@ -15430,7 +16529,7 @@
   <p:cSld>
     <p:spTree>
       <p:nvGrpSpPr>
-        <p:cNvPr id="312" name="Shape 312"/>
+        <p:cNvPr id="342" name="Shape 342"/>
         <p:cNvGrpSpPr/>
         <p:nvPr/>
       </p:nvGrpSpPr>
@@ -15444,7 +16543,7 @@
       </p:grpSpPr>
       <p:sp>
         <p:nvSpPr>
-          <p:cNvPr id="313" name="Google Shape;313;p37"/>
+          <p:cNvPr id="343" name="Google Shape;343;p37"/>
           <p:cNvSpPr txBox="1"/>
           <p:nvPr>
             <p:ph type="title"/>
@@ -15495,7 +16594,7 @@
   <p:cSld>
     <p:spTree>
       <p:nvGrpSpPr>
-        <p:cNvPr id="317" name="Shape 317"/>
+        <p:cNvPr id="347" name="Shape 347"/>
         <p:cNvGrpSpPr/>
         <p:nvPr/>
       </p:nvGrpSpPr>
@@ -15509,7 +16608,7 @@
       </p:grpSpPr>
       <p:sp>
         <p:nvSpPr>
-          <p:cNvPr id="318" name="Google Shape;318;p38"/>
+          <p:cNvPr id="348" name="Google Shape;348;p38"/>
           <p:cNvSpPr txBox="1"/>
           <p:nvPr>
             <p:ph type="title"/>
@@ -15549,7 +16648,7 @@
       </p:sp>
       <p:sp>
         <p:nvSpPr>
-          <p:cNvPr id="319" name="Google Shape;319;p38"/>
+          <p:cNvPr id="349" name="Google Shape;349;p38"/>
           <p:cNvSpPr txBox="1"/>
           <p:nvPr>
             <p:ph idx="1" type="body"/>
@@ -16265,10 +17364,10 @@
               <a:buNone/>
             </a:pPr>
             <a:r>
-              <a:rPr lang="en"/>
+              <a:rPr b="1" lang="en"/>
               <a:t>Course Github page</a:t>
             </a:r>
-            <a:endParaRPr/>
+            <a:endParaRPr b="1"/>
           </a:p>
         </p:txBody>
       </p:sp>
@@ -16508,6 +17607,108 @@
           <p:cNvPr id="87" name="Google Shape;87;p17"/>
           <p:cNvSpPr txBox="1"/>
           <p:nvPr>
+            <p:ph idx="1" type="body"/>
+          </p:nvPr>
+        </p:nvSpPr>
+        <p:spPr>
+          <a:xfrm>
+            <a:off x="311700" y="1152475"/>
+            <a:ext cx="8520600" cy="3416400"/>
+          </a:xfrm>
+          <a:prstGeom prst="rect">
+            <a:avLst/>
+          </a:prstGeom>
+        </p:spPr>
+        <p:txBody>
+          <a:bodyPr anchorCtr="0" anchor="t" bIns="91425" lIns="91425" spcFirstLastPara="1" rIns="91425" wrap="square" tIns="91425">
+            <a:normAutofit/>
+          </a:bodyPr>
+          <a:lstStyle/>
+          <a:p>
+            <a:pPr indent="0" lvl="0" marL="0" rtl="0" algn="l">
+              <a:spcBef>
+                <a:spcPts val="0"/>
+              </a:spcBef>
+              <a:spcAft>
+                <a:spcPts val="0"/>
+              </a:spcAft>
+              <a:buNone/>
+            </a:pPr>
+            <a:r>
+              <a:rPr lang="en"/>
+              <a:t>Flipped course: read before class, work during class</a:t>
+            </a:r>
+            <a:endParaRPr/>
+          </a:p>
+          <a:p>
+            <a:pPr indent="0" lvl="0" marL="0" rtl="0" algn="l">
+              <a:spcBef>
+                <a:spcPts val="1200"/>
+              </a:spcBef>
+              <a:spcAft>
+                <a:spcPts val="0"/>
+              </a:spcAft>
+              <a:buNone/>
+            </a:pPr>
+            <a:r>
+              <a:rPr lang="en"/>
+              <a:t>Assignments will focus on data of your choosing</a:t>
+            </a:r>
+            <a:endParaRPr/>
+          </a:p>
+          <a:p>
+            <a:pPr indent="0" lvl="0" marL="0" rtl="0" algn="l">
+              <a:lnSpc>
+                <a:spcPct val="100000"/>
+              </a:lnSpc>
+              <a:spcBef>
+                <a:spcPts val="1200"/>
+              </a:spcBef>
+              <a:spcAft>
+                <a:spcPts val="0"/>
+              </a:spcAft>
+              <a:buClr>
+                <a:schemeClr val="dk1"/>
+              </a:buClr>
+              <a:buSzPts val="1100"/>
+              <a:buFont typeface="Arial"/>
+              <a:buNone/>
+            </a:pPr>
+            <a:r>
+              <a:t/>
+            </a:r>
+            <a:endParaRPr/>
+          </a:p>
+          <a:p>
+            <a:pPr indent="0" lvl="0" marL="1082675" rtl="0" algn="l">
+              <a:lnSpc>
+                <a:spcPct val="100000"/>
+              </a:lnSpc>
+              <a:spcBef>
+                <a:spcPts val="0"/>
+              </a:spcBef>
+              <a:spcAft>
+                <a:spcPts val="0"/>
+              </a:spcAft>
+              <a:buClr>
+                <a:schemeClr val="dk1"/>
+              </a:buClr>
+              <a:buSzPts val="1100"/>
+              <a:buFont typeface="Arial"/>
+              <a:buNone/>
+            </a:pPr>
+            <a:r>
+              <a:t/>
+            </a:r>
+            <a:endParaRPr/>
+          </a:p>
+        </p:txBody>
+      </p:sp>
+      <p:sp>
+        <p:nvSpPr>
+          <p:cNvPr id="88" name="Google Shape;88;p17"/>
+          <p:cNvSpPr txBox="1"/>
+          <p:nvPr>
             <p:ph type="title"/>
           </p:nvPr>
         </p:nvSpPr>
@@ -16540,317 +17741,6 @@
               <a:t>Syllabus: Course structure</a:t>
             </a:r>
             <a:endParaRPr b="1"/>
-          </a:p>
-        </p:txBody>
-      </p:sp>
-      <p:sp>
-        <p:nvSpPr>
-          <p:cNvPr id="88" name="Google Shape;88;p17"/>
-          <p:cNvSpPr txBox="1"/>
-          <p:nvPr>
-            <p:ph idx="1" type="body"/>
-          </p:nvPr>
-        </p:nvSpPr>
-        <p:spPr>
-          <a:xfrm>
-            <a:off x="311700" y="1152475"/>
-            <a:ext cx="8520600" cy="3416400"/>
-          </a:xfrm>
-          <a:prstGeom prst="rect">
-            <a:avLst/>
-          </a:prstGeom>
-        </p:spPr>
-        <p:txBody>
-          <a:bodyPr anchorCtr="0" anchor="t" bIns="91425" lIns="91425" spcFirstLastPara="1" rIns="91425" wrap="square" tIns="91425">
-            <a:normAutofit/>
-          </a:bodyPr>
-          <a:lstStyle/>
-          <a:p>
-            <a:pPr indent="0" lvl="0" marL="0" rtl="0" algn="l">
-              <a:spcBef>
-                <a:spcPts val="0"/>
-              </a:spcBef>
-              <a:spcAft>
-                <a:spcPts val="0"/>
-              </a:spcAft>
-              <a:buNone/>
-            </a:pPr>
-            <a:r>
-              <a:rPr lang="en"/>
-              <a:t>Flipped course: read before class, work during class</a:t>
-            </a:r>
-            <a:endParaRPr/>
-          </a:p>
-          <a:p>
-            <a:pPr indent="0" lvl="0" marL="0" rtl="0" algn="l">
-              <a:spcBef>
-                <a:spcPts val="1200"/>
-              </a:spcBef>
-              <a:spcAft>
-                <a:spcPts val="0"/>
-              </a:spcAft>
-              <a:buNone/>
-            </a:pPr>
-            <a:r>
-              <a:rPr lang="en"/>
-              <a:t>Assignments will focus on data of your choosing</a:t>
-            </a:r>
-            <a:endParaRPr/>
-          </a:p>
-          <a:p>
-            <a:pPr indent="0" lvl="0" marL="0" rtl="0" algn="l">
-              <a:lnSpc>
-                <a:spcPct val="100000"/>
-              </a:lnSpc>
-              <a:spcBef>
-                <a:spcPts val="1200"/>
-              </a:spcBef>
-              <a:spcAft>
-                <a:spcPts val="0"/>
-              </a:spcAft>
-              <a:buClr>
-                <a:schemeClr val="dk1"/>
-              </a:buClr>
-              <a:buSzPts val="1100"/>
-              <a:buFont typeface="Arial"/>
-              <a:buNone/>
-            </a:pPr>
-            <a:r>
-              <a:rPr b="1" lang="en" sz="1100">
-                <a:solidFill>
-                  <a:schemeClr val="dk1"/>
-                </a:solidFill>
-                <a:latin typeface="Calibri"/>
-                <a:ea typeface="Calibri"/>
-                <a:cs typeface="Calibri"/>
-                <a:sym typeface="Calibri"/>
-              </a:rPr>
-              <a:t>Graded Items		Percent of Final Grade</a:t>
-            </a:r>
-            <a:endParaRPr b="1" sz="1100">
-              <a:solidFill>
-                <a:schemeClr val="dk1"/>
-              </a:solidFill>
-              <a:latin typeface="Calibri"/>
-              <a:ea typeface="Calibri"/>
-              <a:cs typeface="Calibri"/>
-              <a:sym typeface="Calibri"/>
-            </a:endParaRPr>
-          </a:p>
-          <a:p>
-            <a:pPr indent="0" lvl="0" marL="0" rtl="0" algn="l">
-              <a:lnSpc>
-                <a:spcPct val="100000"/>
-              </a:lnSpc>
-              <a:spcBef>
-                <a:spcPts val="0"/>
-              </a:spcBef>
-              <a:spcAft>
-                <a:spcPts val="0"/>
-              </a:spcAft>
-              <a:buClr>
-                <a:schemeClr val="dk1"/>
-              </a:buClr>
-              <a:buSzPts val="1100"/>
-              <a:buFont typeface="Arial"/>
-              <a:buNone/>
-            </a:pPr>
-            <a:r>
-              <a:rPr lang="en" sz="1100">
-                <a:solidFill>
-                  <a:schemeClr val="dk1"/>
-                </a:solidFill>
-                <a:latin typeface="Calibri"/>
-                <a:ea typeface="Calibri"/>
-                <a:cs typeface="Calibri"/>
-                <a:sym typeface="Calibri"/>
-              </a:rPr>
-              <a:t>In-class participation			20%</a:t>
-            </a:r>
-            <a:endParaRPr sz="1100">
-              <a:solidFill>
-                <a:schemeClr val="dk1"/>
-              </a:solidFill>
-              <a:latin typeface="Calibri"/>
-              <a:ea typeface="Calibri"/>
-              <a:cs typeface="Calibri"/>
-              <a:sym typeface="Calibri"/>
-            </a:endParaRPr>
-          </a:p>
-          <a:p>
-            <a:pPr indent="0" lvl="0" marL="0" rtl="0" algn="l">
-              <a:lnSpc>
-                <a:spcPct val="100000"/>
-              </a:lnSpc>
-              <a:spcBef>
-                <a:spcPts val="0"/>
-              </a:spcBef>
-              <a:spcAft>
-                <a:spcPts val="0"/>
-              </a:spcAft>
-              <a:buClr>
-                <a:schemeClr val="dk1"/>
-              </a:buClr>
-              <a:buSzPts val="1100"/>
-              <a:buFont typeface="Arial"/>
-              <a:buNone/>
-            </a:pPr>
-            <a:r>
-              <a:rPr lang="en" sz="1100">
-                <a:solidFill>
-                  <a:schemeClr val="dk1"/>
-                </a:solidFill>
-                <a:latin typeface="Calibri"/>
-                <a:ea typeface="Calibri"/>
-                <a:cs typeface="Calibri"/>
-                <a:sym typeface="Calibri"/>
-              </a:rPr>
-              <a:t>In-class quizzes				20%</a:t>
-            </a:r>
-            <a:endParaRPr sz="1100">
-              <a:solidFill>
-                <a:schemeClr val="dk1"/>
-              </a:solidFill>
-              <a:latin typeface="Calibri"/>
-              <a:ea typeface="Calibri"/>
-              <a:cs typeface="Calibri"/>
-              <a:sym typeface="Calibri"/>
-            </a:endParaRPr>
-          </a:p>
-          <a:p>
-            <a:pPr indent="0" lvl="0" marL="0" rtl="0" algn="l">
-              <a:lnSpc>
-                <a:spcPct val="100000"/>
-              </a:lnSpc>
-              <a:spcBef>
-                <a:spcPts val="0"/>
-              </a:spcBef>
-              <a:spcAft>
-                <a:spcPts val="0"/>
-              </a:spcAft>
-              <a:buClr>
-                <a:schemeClr val="dk1"/>
-              </a:buClr>
-              <a:buSzPts val="1100"/>
-              <a:buFont typeface="Arial"/>
-              <a:buNone/>
-            </a:pPr>
-            <a:r>
-              <a:rPr lang="en" sz="1100">
-                <a:solidFill>
-                  <a:schemeClr val="dk1"/>
-                </a:solidFill>
-                <a:latin typeface="Calibri"/>
-                <a:ea typeface="Calibri"/>
-                <a:cs typeface="Calibri"/>
-                <a:sym typeface="Calibri"/>
-              </a:rPr>
-              <a:t>Assignments (4x)			20%</a:t>
-            </a:r>
-            <a:endParaRPr sz="1100">
-              <a:solidFill>
-                <a:schemeClr val="dk1"/>
-              </a:solidFill>
-              <a:latin typeface="Calibri"/>
-              <a:ea typeface="Calibri"/>
-              <a:cs typeface="Calibri"/>
-              <a:sym typeface="Calibri"/>
-            </a:endParaRPr>
-          </a:p>
-          <a:p>
-            <a:pPr indent="0" lvl="0" marL="0" rtl="0" algn="l">
-              <a:lnSpc>
-                <a:spcPct val="100000"/>
-              </a:lnSpc>
-              <a:spcBef>
-                <a:spcPts val="0"/>
-              </a:spcBef>
-              <a:spcAft>
-                <a:spcPts val="0"/>
-              </a:spcAft>
-              <a:buClr>
-                <a:schemeClr val="dk1"/>
-              </a:buClr>
-              <a:buSzPts val="1100"/>
-              <a:buFont typeface="Arial"/>
-              <a:buNone/>
-            </a:pPr>
-            <a:r>
-              <a:rPr lang="en" sz="1100">
-                <a:solidFill>
-                  <a:schemeClr val="dk1"/>
-                </a:solidFill>
-                <a:latin typeface="Calibri"/>
-                <a:ea typeface="Calibri"/>
-                <a:cs typeface="Calibri"/>
-                <a:sym typeface="Calibri"/>
-              </a:rPr>
-              <a:t>Midterm (take-home)			20%</a:t>
-            </a:r>
-            <a:endParaRPr sz="1100">
-              <a:solidFill>
-                <a:schemeClr val="dk1"/>
-              </a:solidFill>
-              <a:latin typeface="Calibri"/>
-              <a:ea typeface="Calibri"/>
-              <a:cs typeface="Calibri"/>
-              <a:sym typeface="Calibri"/>
-            </a:endParaRPr>
-          </a:p>
-          <a:p>
-            <a:pPr indent="0" lvl="0" marL="0" rtl="0" algn="l">
-              <a:lnSpc>
-                <a:spcPct val="100000"/>
-              </a:lnSpc>
-              <a:spcBef>
-                <a:spcPts val="0"/>
-              </a:spcBef>
-              <a:spcAft>
-                <a:spcPts val="0"/>
-              </a:spcAft>
-              <a:buClr>
-                <a:schemeClr val="dk1"/>
-              </a:buClr>
-              <a:buSzPts val="1100"/>
-              <a:buFont typeface="Arial"/>
-              <a:buNone/>
-            </a:pPr>
-            <a:r>
-              <a:rPr lang="en" sz="1100">
-                <a:solidFill>
-                  <a:schemeClr val="dk1"/>
-                </a:solidFill>
-                <a:latin typeface="Calibri"/>
-                <a:ea typeface="Calibri"/>
-                <a:cs typeface="Calibri"/>
-                <a:sym typeface="Calibri"/>
-              </a:rPr>
-              <a:t>Final (presentation + take-home)	20%</a:t>
-            </a:r>
-            <a:endParaRPr/>
-          </a:p>
-          <a:p>
-            <a:pPr indent="0" lvl="0" marL="1082675" rtl="0" algn="l">
-              <a:lnSpc>
-                <a:spcPct val="100000"/>
-              </a:lnSpc>
-              <a:spcBef>
-                <a:spcPts val="0"/>
-              </a:spcBef>
-              <a:spcAft>
-                <a:spcPts val="0"/>
-              </a:spcAft>
-              <a:buClr>
-                <a:schemeClr val="dk1"/>
-              </a:buClr>
-              <a:buSzPts val="1100"/>
-              <a:buFont typeface="Arial"/>
-              <a:buNone/>
-            </a:pPr>
-            <a:r>
-              <a:t/>
-            </a:r>
-            <a:endParaRPr/>
           </a:p>
         </p:txBody>
       </p:sp>
@@ -16940,6 +17830,799 @@
           </a:p>
         </p:txBody>
       </p:sp>
+      <p:graphicFrame>
+        <p:nvGraphicFramePr>
+          <p:cNvPr id="91" name="Google Shape;91;p17"/>
+          <p:cNvGraphicFramePr/>
+          <p:nvPr/>
+        </p:nvGraphicFramePr>
+        <p:xfrm>
+          <a:off x="311700" y="2159125"/>
+          <a:ext cx="3000000" cy="3000000"/>
+        </p:xfrm>
+        <a:graphic>
+          <a:graphicData uri="http://schemas.openxmlformats.org/drawingml/2006/table">
+            <a:tbl>
+              <a:tblPr>
+                <a:noFill/>
+                <a:tableStyleId>{D4FE8AA7-955E-4A92-90C8-8FBC07ACE3E1}</a:tableStyleId>
+              </a:tblPr>
+              <a:tblGrid>
+                <a:gridCol w="3417850"/>
+                <a:gridCol w="1867200"/>
+              </a:tblGrid>
+              <a:tr h="190500">
+                <a:tc>
+                  <a:txBody>
+                    <a:bodyPr/>
+                    <a:lstStyle/>
+                    <a:p>
+                      <a:pPr indent="0" lvl="0" marL="0" rtl="0" algn="ctr">
+                        <a:lnSpc>
+                          <a:spcPct val="115000"/>
+                        </a:lnSpc>
+                        <a:spcBef>
+                          <a:spcPts val="0"/>
+                        </a:spcBef>
+                        <a:spcAft>
+                          <a:spcPts val="0"/>
+                        </a:spcAft>
+                        <a:buNone/>
+                      </a:pPr>
+                      <a:r>
+                        <a:rPr b="1" lang="en" sz="1500"/>
+                        <a:t>Graded Item</a:t>
+                      </a:r>
+                      <a:endParaRPr b="1" sz="1500"/>
+                    </a:p>
+                  </a:txBody>
+                  <a:tcPr marT="91425" marB="91425" marR="91425" marL="91425">
+                    <a:lnL cap="flat" cmpd="sng" w="9525">
+                      <a:solidFill>
+                        <a:srgbClr val="000000"/>
+                      </a:solidFill>
+                      <a:prstDash val="solid"/>
+                      <a:round/>
+                      <a:headEnd len="sm" w="sm" type="none"/>
+                      <a:tailEnd len="sm" w="sm" type="none"/>
+                    </a:lnL>
+                    <a:lnR cap="flat" cmpd="sng" w="9525">
+                      <a:solidFill>
+                        <a:srgbClr val="000000"/>
+                      </a:solidFill>
+                      <a:prstDash val="solid"/>
+                      <a:round/>
+                      <a:headEnd len="sm" w="sm" type="none"/>
+                      <a:tailEnd len="sm" w="sm" type="none"/>
+                    </a:lnR>
+                    <a:lnT cap="flat" cmpd="sng" w="9525">
+                      <a:solidFill>
+                        <a:srgbClr val="000000"/>
+                      </a:solidFill>
+                      <a:prstDash val="solid"/>
+                      <a:round/>
+                      <a:headEnd len="sm" w="sm" type="none"/>
+                      <a:tailEnd len="sm" w="sm" type="none"/>
+                    </a:lnT>
+                    <a:lnB cap="flat" cmpd="sng" w="9525">
+                      <a:solidFill>
+                        <a:srgbClr val="000000"/>
+                      </a:solidFill>
+                      <a:prstDash val="solid"/>
+                      <a:round/>
+                      <a:headEnd len="sm" w="sm" type="none"/>
+                      <a:tailEnd len="sm" w="sm" type="none"/>
+                    </a:lnB>
+                  </a:tcPr>
+                </a:tc>
+                <a:tc>
+                  <a:txBody>
+                    <a:bodyPr/>
+                    <a:lstStyle/>
+                    <a:p>
+                      <a:pPr indent="0" lvl="0" marL="0" rtl="0" algn="ctr">
+                        <a:lnSpc>
+                          <a:spcPct val="115000"/>
+                        </a:lnSpc>
+                        <a:spcBef>
+                          <a:spcPts val="0"/>
+                        </a:spcBef>
+                        <a:spcAft>
+                          <a:spcPts val="0"/>
+                        </a:spcAft>
+                        <a:buNone/>
+                      </a:pPr>
+                      <a:r>
+                        <a:rPr b="1" lang="en" sz="1500"/>
+                        <a:t>Percent of Final Grade</a:t>
+                      </a:r>
+                      <a:endParaRPr b="1" sz="1500"/>
+                    </a:p>
+                  </a:txBody>
+                  <a:tcPr marT="91425" marB="91425" marR="91425" marL="91425">
+                    <a:lnL cap="flat" cmpd="sng" w="9525">
+                      <a:solidFill>
+                        <a:srgbClr val="000000"/>
+                      </a:solidFill>
+                      <a:prstDash val="solid"/>
+                      <a:round/>
+                      <a:headEnd len="sm" w="sm" type="none"/>
+                      <a:tailEnd len="sm" w="sm" type="none"/>
+                    </a:lnL>
+                    <a:lnR cap="flat" cmpd="sng" w="9525">
+                      <a:solidFill>
+                        <a:srgbClr val="000000"/>
+                      </a:solidFill>
+                      <a:prstDash val="solid"/>
+                      <a:round/>
+                      <a:headEnd len="sm" w="sm" type="none"/>
+                      <a:tailEnd len="sm" w="sm" type="none"/>
+                    </a:lnR>
+                    <a:lnT cap="flat" cmpd="sng" w="9525">
+                      <a:solidFill>
+                        <a:srgbClr val="000000"/>
+                      </a:solidFill>
+                      <a:prstDash val="solid"/>
+                      <a:round/>
+                      <a:headEnd len="sm" w="sm" type="none"/>
+                      <a:tailEnd len="sm" w="sm" type="none"/>
+                    </a:lnT>
+                    <a:lnB cap="flat" cmpd="sng" w="9525">
+                      <a:solidFill>
+                        <a:srgbClr val="000000"/>
+                      </a:solidFill>
+                      <a:prstDash val="solid"/>
+                      <a:round/>
+                      <a:headEnd len="sm" w="sm" type="none"/>
+                      <a:tailEnd len="sm" w="sm" type="none"/>
+                    </a:lnB>
+                  </a:tcPr>
+                </a:tc>
+              </a:tr>
+              <a:tr h="190500">
+                <a:tc>
+                  <a:txBody>
+                    <a:bodyPr/>
+                    <a:lstStyle/>
+                    <a:p>
+                      <a:pPr indent="0" lvl="0" marL="0" rtl="0" algn="l">
+                        <a:lnSpc>
+                          <a:spcPct val="115000"/>
+                        </a:lnSpc>
+                        <a:spcBef>
+                          <a:spcPts val="0"/>
+                        </a:spcBef>
+                        <a:spcAft>
+                          <a:spcPts val="0"/>
+                        </a:spcAft>
+                        <a:buNone/>
+                      </a:pPr>
+                      <a:r>
+                        <a:rPr lang="en"/>
+                        <a:t>In-class participation</a:t>
+                      </a:r>
+                      <a:endParaRPr/>
+                    </a:p>
+                  </a:txBody>
+                  <a:tcPr marT="91425" marB="91425" marR="91425" marL="91425">
+                    <a:lnL cap="flat" cmpd="sng" w="9525">
+                      <a:solidFill>
+                        <a:srgbClr val="000000"/>
+                      </a:solidFill>
+                      <a:prstDash val="solid"/>
+                      <a:round/>
+                      <a:headEnd len="sm" w="sm" type="none"/>
+                      <a:tailEnd len="sm" w="sm" type="none"/>
+                    </a:lnL>
+                    <a:lnR cap="flat" cmpd="sng" w="9525">
+                      <a:solidFill>
+                        <a:srgbClr val="000000"/>
+                      </a:solidFill>
+                      <a:prstDash val="solid"/>
+                      <a:round/>
+                      <a:headEnd len="sm" w="sm" type="none"/>
+                      <a:tailEnd len="sm" w="sm" type="none"/>
+                    </a:lnR>
+                    <a:lnT cap="flat" cmpd="sng" w="9525">
+                      <a:solidFill>
+                        <a:srgbClr val="000000"/>
+                      </a:solidFill>
+                      <a:prstDash val="solid"/>
+                      <a:round/>
+                      <a:headEnd len="sm" w="sm" type="none"/>
+                      <a:tailEnd len="sm" w="sm" type="none"/>
+                    </a:lnT>
+                    <a:lnB cap="flat" cmpd="sng" w="9525">
+                      <a:solidFill>
+                        <a:srgbClr val="000000"/>
+                      </a:solidFill>
+                      <a:prstDash val="solid"/>
+                      <a:round/>
+                      <a:headEnd len="sm" w="sm" type="none"/>
+                      <a:tailEnd len="sm" w="sm" type="none"/>
+                    </a:lnB>
+                  </a:tcPr>
+                </a:tc>
+                <a:tc>
+                  <a:txBody>
+                    <a:bodyPr/>
+                    <a:lstStyle/>
+                    <a:p>
+                      <a:pPr indent="0" lvl="0" marL="0" rtl="0" algn="ctr">
+                        <a:lnSpc>
+                          <a:spcPct val="115000"/>
+                        </a:lnSpc>
+                        <a:spcBef>
+                          <a:spcPts val="0"/>
+                        </a:spcBef>
+                        <a:spcAft>
+                          <a:spcPts val="0"/>
+                        </a:spcAft>
+                        <a:buNone/>
+                      </a:pPr>
+                      <a:r>
+                        <a:rPr lang="en"/>
+                        <a:t>20%</a:t>
+                      </a:r>
+                      <a:endParaRPr/>
+                    </a:p>
+                  </a:txBody>
+                  <a:tcPr marT="91425" marB="91425" marR="91425" marL="91425">
+                    <a:lnL cap="flat" cmpd="sng" w="9525">
+                      <a:solidFill>
+                        <a:srgbClr val="000000"/>
+                      </a:solidFill>
+                      <a:prstDash val="solid"/>
+                      <a:round/>
+                      <a:headEnd len="sm" w="sm" type="none"/>
+                      <a:tailEnd len="sm" w="sm" type="none"/>
+                    </a:lnL>
+                    <a:lnR cap="flat" cmpd="sng" w="9525">
+                      <a:solidFill>
+                        <a:srgbClr val="000000"/>
+                      </a:solidFill>
+                      <a:prstDash val="solid"/>
+                      <a:round/>
+                      <a:headEnd len="sm" w="sm" type="none"/>
+                      <a:tailEnd len="sm" w="sm" type="none"/>
+                    </a:lnR>
+                    <a:lnT cap="flat" cmpd="sng" w="9525">
+                      <a:solidFill>
+                        <a:srgbClr val="000000"/>
+                      </a:solidFill>
+                      <a:prstDash val="solid"/>
+                      <a:round/>
+                      <a:headEnd len="sm" w="sm" type="none"/>
+                      <a:tailEnd len="sm" w="sm" type="none"/>
+                    </a:lnT>
+                    <a:lnB cap="flat" cmpd="sng" w="9525">
+                      <a:solidFill>
+                        <a:srgbClr val="000000"/>
+                      </a:solidFill>
+                      <a:prstDash val="solid"/>
+                      <a:round/>
+                      <a:headEnd len="sm" w="sm" type="none"/>
+                      <a:tailEnd len="sm" w="sm" type="none"/>
+                    </a:lnB>
+                  </a:tcPr>
+                </a:tc>
+              </a:tr>
+              <a:tr h="190500">
+                <a:tc>
+                  <a:txBody>
+                    <a:bodyPr/>
+                    <a:lstStyle/>
+                    <a:p>
+                      <a:pPr indent="0" lvl="0" marL="0" rtl="0" algn="l">
+                        <a:lnSpc>
+                          <a:spcPct val="115000"/>
+                        </a:lnSpc>
+                        <a:spcBef>
+                          <a:spcPts val="0"/>
+                        </a:spcBef>
+                        <a:spcAft>
+                          <a:spcPts val="0"/>
+                        </a:spcAft>
+                        <a:buNone/>
+                      </a:pPr>
+                      <a:r>
+                        <a:rPr lang="en"/>
+                        <a:t>In-class quizzes</a:t>
+                      </a:r>
+                      <a:endParaRPr/>
+                    </a:p>
+                  </a:txBody>
+                  <a:tcPr marT="91425" marB="91425" marR="91425" marL="91425">
+                    <a:lnL cap="flat" cmpd="sng" w="9525">
+                      <a:solidFill>
+                        <a:srgbClr val="000000"/>
+                      </a:solidFill>
+                      <a:prstDash val="solid"/>
+                      <a:round/>
+                      <a:headEnd len="sm" w="sm" type="none"/>
+                      <a:tailEnd len="sm" w="sm" type="none"/>
+                    </a:lnL>
+                    <a:lnR cap="flat" cmpd="sng" w="9525">
+                      <a:solidFill>
+                        <a:srgbClr val="000000"/>
+                      </a:solidFill>
+                      <a:prstDash val="solid"/>
+                      <a:round/>
+                      <a:headEnd len="sm" w="sm" type="none"/>
+                      <a:tailEnd len="sm" w="sm" type="none"/>
+                    </a:lnR>
+                    <a:lnT cap="flat" cmpd="sng" w="9525">
+                      <a:solidFill>
+                        <a:srgbClr val="000000"/>
+                      </a:solidFill>
+                      <a:prstDash val="solid"/>
+                      <a:round/>
+                      <a:headEnd len="sm" w="sm" type="none"/>
+                      <a:tailEnd len="sm" w="sm" type="none"/>
+                    </a:lnT>
+                    <a:lnB cap="flat" cmpd="sng" w="9525">
+                      <a:solidFill>
+                        <a:srgbClr val="000000"/>
+                      </a:solidFill>
+                      <a:prstDash val="solid"/>
+                      <a:round/>
+                      <a:headEnd len="sm" w="sm" type="none"/>
+                      <a:tailEnd len="sm" w="sm" type="none"/>
+                    </a:lnB>
+                  </a:tcPr>
+                </a:tc>
+                <a:tc>
+                  <a:txBody>
+                    <a:bodyPr/>
+                    <a:lstStyle/>
+                    <a:p>
+                      <a:pPr indent="0" lvl="0" marL="0" rtl="0" algn="ctr">
+                        <a:lnSpc>
+                          <a:spcPct val="115000"/>
+                        </a:lnSpc>
+                        <a:spcBef>
+                          <a:spcPts val="0"/>
+                        </a:spcBef>
+                        <a:spcAft>
+                          <a:spcPts val="0"/>
+                        </a:spcAft>
+                        <a:buNone/>
+                      </a:pPr>
+                      <a:r>
+                        <a:rPr lang="en"/>
+                        <a:t>20%</a:t>
+                      </a:r>
+                      <a:endParaRPr/>
+                    </a:p>
+                  </a:txBody>
+                  <a:tcPr marT="91425" marB="91425" marR="91425" marL="91425">
+                    <a:lnL cap="flat" cmpd="sng" w="9525">
+                      <a:solidFill>
+                        <a:srgbClr val="000000"/>
+                      </a:solidFill>
+                      <a:prstDash val="solid"/>
+                      <a:round/>
+                      <a:headEnd len="sm" w="sm" type="none"/>
+                      <a:tailEnd len="sm" w="sm" type="none"/>
+                    </a:lnL>
+                    <a:lnR cap="flat" cmpd="sng" w="9525">
+                      <a:solidFill>
+                        <a:srgbClr val="000000"/>
+                      </a:solidFill>
+                      <a:prstDash val="solid"/>
+                      <a:round/>
+                      <a:headEnd len="sm" w="sm" type="none"/>
+                      <a:tailEnd len="sm" w="sm" type="none"/>
+                    </a:lnR>
+                    <a:lnT cap="flat" cmpd="sng" w="9525">
+                      <a:solidFill>
+                        <a:srgbClr val="000000"/>
+                      </a:solidFill>
+                      <a:prstDash val="solid"/>
+                      <a:round/>
+                      <a:headEnd len="sm" w="sm" type="none"/>
+                      <a:tailEnd len="sm" w="sm" type="none"/>
+                    </a:lnT>
+                    <a:lnB cap="flat" cmpd="sng" w="9525">
+                      <a:solidFill>
+                        <a:srgbClr val="000000"/>
+                      </a:solidFill>
+                      <a:prstDash val="solid"/>
+                      <a:round/>
+                      <a:headEnd len="sm" w="sm" type="none"/>
+                      <a:tailEnd len="sm" w="sm" type="none"/>
+                    </a:lnB>
+                  </a:tcPr>
+                </a:tc>
+              </a:tr>
+              <a:tr h="190500">
+                <a:tc>
+                  <a:txBody>
+                    <a:bodyPr/>
+                    <a:lstStyle/>
+                    <a:p>
+                      <a:pPr indent="0" lvl="0" marL="0" rtl="0" algn="l">
+                        <a:lnSpc>
+                          <a:spcPct val="115000"/>
+                        </a:lnSpc>
+                        <a:spcBef>
+                          <a:spcPts val="0"/>
+                        </a:spcBef>
+                        <a:spcAft>
+                          <a:spcPts val="0"/>
+                        </a:spcAft>
+                        <a:buNone/>
+                      </a:pPr>
+                      <a:r>
+                        <a:rPr lang="en"/>
+                        <a:t>Assignments (4x)</a:t>
+                      </a:r>
+                      <a:endParaRPr/>
+                    </a:p>
+                  </a:txBody>
+                  <a:tcPr marT="91425" marB="91425" marR="91425" marL="91425">
+                    <a:lnL cap="flat" cmpd="sng" w="9525">
+                      <a:solidFill>
+                        <a:srgbClr val="000000"/>
+                      </a:solidFill>
+                      <a:prstDash val="solid"/>
+                      <a:round/>
+                      <a:headEnd len="sm" w="sm" type="none"/>
+                      <a:tailEnd len="sm" w="sm" type="none"/>
+                    </a:lnL>
+                    <a:lnR cap="flat" cmpd="sng" w="9525">
+                      <a:solidFill>
+                        <a:srgbClr val="000000"/>
+                      </a:solidFill>
+                      <a:prstDash val="solid"/>
+                      <a:round/>
+                      <a:headEnd len="sm" w="sm" type="none"/>
+                      <a:tailEnd len="sm" w="sm" type="none"/>
+                    </a:lnR>
+                    <a:lnT cap="flat" cmpd="sng" w="9525">
+                      <a:solidFill>
+                        <a:srgbClr val="000000"/>
+                      </a:solidFill>
+                      <a:prstDash val="solid"/>
+                      <a:round/>
+                      <a:headEnd len="sm" w="sm" type="none"/>
+                      <a:tailEnd len="sm" w="sm" type="none"/>
+                    </a:lnT>
+                    <a:lnB cap="flat" cmpd="sng" w="9525">
+                      <a:solidFill>
+                        <a:srgbClr val="000000"/>
+                      </a:solidFill>
+                      <a:prstDash val="solid"/>
+                      <a:round/>
+                      <a:headEnd len="sm" w="sm" type="none"/>
+                      <a:tailEnd len="sm" w="sm" type="none"/>
+                    </a:lnB>
+                  </a:tcPr>
+                </a:tc>
+                <a:tc>
+                  <a:txBody>
+                    <a:bodyPr/>
+                    <a:lstStyle/>
+                    <a:p>
+                      <a:pPr indent="0" lvl="0" marL="0" rtl="0" algn="ctr">
+                        <a:lnSpc>
+                          <a:spcPct val="115000"/>
+                        </a:lnSpc>
+                        <a:spcBef>
+                          <a:spcPts val="0"/>
+                        </a:spcBef>
+                        <a:spcAft>
+                          <a:spcPts val="0"/>
+                        </a:spcAft>
+                        <a:buNone/>
+                      </a:pPr>
+                      <a:r>
+                        <a:rPr lang="en"/>
+                        <a:t>20%</a:t>
+                      </a:r>
+                      <a:endParaRPr/>
+                    </a:p>
+                  </a:txBody>
+                  <a:tcPr marT="91425" marB="91425" marR="91425" marL="91425">
+                    <a:lnL cap="flat" cmpd="sng" w="9525">
+                      <a:solidFill>
+                        <a:srgbClr val="000000"/>
+                      </a:solidFill>
+                      <a:prstDash val="solid"/>
+                      <a:round/>
+                      <a:headEnd len="sm" w="sm" type="none"/>
+                      <a:tailEnd len="sm" w="sm" type="none"/>
+                    </a:lnL>
+                    <a:lnR cap="flat" cmpd="sng" w="9525">
+                      <a:solidFill>
+                        <a:srgbClr val="000000"/>
+                      </a:solidFill>
+                      <a:prstDash val="solid"/>
+                      <a:round/>
+                      <a:headEnd len="sm" w="sm" type="none"/>
+                      <a:tailEnd len="sm" w="sm" type="none"/>
+                    </a:lnR>
+                    <a:lnT cap="flat" cmpd="sng" w="9525">
+                      <a:solidFill>
+                        <a:srgbClr val="000000"/>
+                      </a:solidFill>
+                      <a:prstDash val="solid"/>
+                      <a:round/>
+                      <a:headEnd len="sm" w="sm" type="none"/>
+                      <a:tailEnd len="sm" w="sm" type="none"/>
+                    </a:lnT>
+                    <a:lnB cap="flat" cmpd="sng" w="9525">
+                      <a:solidFill>
+                        <a:srgbClr val="000000"/>
+                      </a:solidFill>
+                      <a:prstDash val="solid"/>
+                      <a:round/>
+                      <a:headEnd len="sm" w="sm" type="none"/>
+                      <a:tailEnd len="sm" w="sm" type="none"/>
+                    </a:lnB>
+                  </a:tcPr>
+                </a:tc>
+              </a:tr>
+              <a:tr h="190500">
+                <a:tc>
+                  <a:txBody>
+                    <a:bodyPr/>
+                    <a:lstStyle/>
+                    <a:p>
+                      <a:pPr indent="0" lvl="0" marL="0" rtl="0" algn="l">
+                        <a:lnSpc>
+                          <a:spcPct val="115000"/>
+                        </a:lnSpc>
+                        <a:spcBef>
+                          <a:spcPts val="0"/>
+                        </a:spcBef>
+                        <a:spcAft>
+                          <a:spcPts val="0"/>
+                        </a:spcAft>
+                        <a:buNone/>
+                      </a:pPr>
+                      <a:r>
+                        <a:rPr lang="en"/>
+                        <a:t>Midterm (take-home)</a:t>
+                      </a:r>
+                      <a:endParaRPr/>
+                    </a:p>
+                  </a:txBody>
+                  <a:tcPr marT="91425" marB="91425" marR="91425" marL="91425">
+                    <a:lnL cap="flat" cmpd="sng" w="9525">
+                      <a:solidFill>
+                        <a:srgbClr val="000000"/>
+                      </a:solidFill>
+                      <a:prstDash val="solid"/>
+                      <a:round/>
+                      <a:headEnd len="sm" w="sm" type="none"/>
+                      <a:tailEnd len="sm" w="sm" type="none"/>
+                    </a:lnL>
+                    <a:lnR cap="flat" cmpd="sng" w="9525">
+                      <a:solidFill>
+                        <a:srgbClr val="000000"/>
+                      </a:solidFill>
+                      <a:prstDash val="solid"/>
+                      <a:round/>
+                      <a:headEnd len="sm" w="sm" type="none"/>
+                      <a:tailEnd len="sm" w="sm" type="none"/>
+                    </a:lnR>
+                    <a:lnT cap="flat" cmpd="sng" w="9525">
+                      <a:solidFill>
+                        <a:srgbClr val="000000"/>
+                      </a:solidFill>
+                      <a:prstDash val="solid"/>
+                      <a:round/>
+                      <a:headEnd len="sm" w="sm" type="none"/>
+                      <a:tailEnd len="sm" w="sm" type="none"/>
+                    </a:lnT>
+                    <a:lnB cap="flat" cmpd="sng" w="9525">
+                      <a:solidFill>
+                        <a:srgbClr val="000000"/>
+                      </a:solidFill>
+                      <a:prstDash val="solid"/>
+                      <a:round/>
+                      <a:headEnd len="sm" w="sm" type="none"/>
+                      <a:tailEnd len="sm" w="sm" type="none"/>
+                    </a:lnB>
+                  </a:tcPr>
+                </a:tc>
+                <a:tc>
+                  <a:txBody>
+                    <a:bodyPr/>
+                    <a:lstStyle/>
+                    <a:p>
+                      <a:pPr indent="0" lvl="0" marL="0" rtl="0" algn="ctr">
+                        <a:lnSpc>
+                          <a:spcPct val="115000"/>
+                        </a:lnSpc>
+                        <a:spcBef>
+                          <a:spcPts val="0"/>
+                        </a:spcBef>
+                        <a:spcAft>
+                          <a:spcPts val="0"/>
+                        </a:spcAft>
+                        <a:buNone/>
+                      </a:pPr>
+                      <a:r>
+                        <a:rPr lang="en"/>
+                        <a:t>20%</a:t>
+                      </a:r>
+                      <a:endParaRPr/>
+                    </a:p>
+                  </a:txBody>
+                  <a:tcPr marT="91425" marB="91425" marR="91425" marL="91425">
+                    <a:lnL cap="flat" cmpd="sng" w="9525">
+                      <a:solidFill>
+                        <a:srgbClr val="000000"/>
+                      </a:solidFill>
+                      <a:prstDash val="solid"/>
+                      <a:round/>
+                      <a:headEnd len="sm" w="sm" type="none"/>
+                      <a:tailEnd len="sm" w="sm" type="none"/>
+                    </a:lnL>
+                    <a:lnR cap="flat" cmpd="sng" w="9525">
+                      <a:solidFill>
+                        <a:srgbClr val="000000"/>
+                      </a:solidFill>
+                      <a:prstDash val="solid"/>
+                      <a:round/>
+                      <a:headEnd len="sm" w="sm" type="none"/>
+                      <a:tailEnd len="sm" w="sm" type="none"/>
+                    </a:lnR>
+                    <a:lnT cap="flat" cmpd="sng" w="9525">
+                      <a:solidFill>
+                        <a:srgbClr val="000000"/>
+                      </a:solidFill>
+                      <a:prstDash val="solid"/>
+                      <a:round/>
+                      <a:headEnd len="sm" w="sm" type="none"/>
+                      <a:tailEnd len="sm" w="sm" type="none"/>
+                    </a:lnT>
+                    <a:lnB cap="flat" cmpd="sng" w="9525">
+                      <a:solidFill>
+                        <a:srgbClr val="000000"/>
+                      </a:solidFill>
+                      <a:prstDash val="solid"/>
+                      <a:round/>
+                      <a:headEnd len="sm" w="sm" type="none"/>
+                      <a:tailEnd len="sm" w="sm" type="none"/>
+                    </a:lnB>
+                  </a:tcPr>
+                </a:tc>
+              </a:tr>
+              <a:tr h="190500">
+                <a:tc>
+                  <a:txBody>
+                    <a:bodyPr/>
+                    <a:lstStyle/>
+                    <a:p>
+                      <a:pPr indent="0" lvl="0" marL="0" rtl="0" algn="l">
+                        <a:lnSpc>
+                          <a:spcPct val="115000"/>
+                        </a:lnSpc>
+                        <a:spcBef>
+                          <a:spcPts val="0"/>
+                        </a:spcBef>
+                        <a:spcAft>
+                          <a:spcPts val="0"/>
+                        </a:spcAft>
+                        <a:buNone/>
+                      </a:pPr>
+                      <a:r>
+                        <a:rPr lang="en"/>
+                        <a:t>Final (presentation + take-home)</a:t>
+                      </a:r>
+                      <a:endParaRPr/>
+                    </a:p>
+                  </a:txBody>
+                  <a:tcPr marT="91425" marB="91425" marR="91425" marL="91425">
+                    <a:lnL cap="flat" cmpd="sng" w="9525">
+                      <a:solidFill>
+                        <a:srgbClr val="000000"/>
+                      </a:solidFill>
+                      <a:prstDash val="solid"/>
+                      <a:round/>
+                      <a:headEnd len="sm" w="sm" type="none"/>
+                      <a:tailEnd len="sm" w="sm" type="none"/>
+                    </a:lnL>
+                    <a:lnR cap="flat" cmpd="sng" w="9525">
+                      <a:solidFill>
+                        <a:srgbClr val="000000"/>
+                      </a:solidFill>
+                      <a:prstDash val="solid"/>
+                      <a:round/>
+                      <a:headEnd len="sm" w="sm" type="none"/>
+                      <a:tailEnd len="sm" w="sm" type="none"/>
+                    </a:lnR>
+                    <a:lnT cap="flat" cmpd="sng" w="9525">
+                      <a:solidFill>
+                        <a:srgbClr val="000000"/>
+                      </a:solidFill>
+                      <a:prstDash val="solid"/>
+                      <a:round/>
+                      <a:headEnd len="sm" w="sm" type="none"/>
+                      <a:tailEnd len="sm" w="sm" type="none"/>
+                    </a:lnT>
+                    <a:lnB cap="flat" cmpd="sng" w="9525">
+                      <a:solidFill>
+                        <a:srgbClr val="000000"/>
+                      </a:solidFill>
+                      <a:prstDash val="solid"/>
+                      <a:round/>
+                      <a:headEnd len="sm" w="sm" type="none"/>
+                      <a:tailEnd len="sm" w="sm" type="none"/>
+                    </a:lnB>
+                  </a:tcPr>
+                </a:tc>
+                <a:tc>
+                  <a:txBody>
+                    <a:bodyPr/>
+                    <a:lstStyle/>
+                    <a:p>
+                      <a:pPr indent="0" lvl="0" marL="0" rtl="0" algn="ctr">
+                        <a:lnSpc>
+                          <a:spcPct val="115000"/>
+                        </a:lnSpc>
+                        <a:spcBef>
+                          <a:spcPts val="0"/>
+                        </a:spcBef>
+                        <a:spcAft>
+                          <a:spcPts val="0"/>
+                        </a:spcAft>
+                        <a:buNone/>
+                      </a:pPr>
+                      <a:r>
+                        <a:rPr lang="en"/>
+                        <a:t>20%</a:t>
+                      </a:r>
+                      <a:endParaRPr/>
+                    </a:p>
+                  </a:txBody>
+                  <a:tcPr marT="91425" marB="91425" marR="91425" marL="91425">
+                    <a:lnL cap="flat" cmpd="sng" w="9525">
+                      <a:solidFill>
+                        <a:srgbClr val="000000"/>
+                      </a:solidFill>
+                      <a:prstDash val="solid"/>
+                      <a:round/>
+                      <a:headEnd len="sm" w="sm" type="none"/>
+                      <a:tailEnd len="sm" w="sm" type="none"/>
+                    </a:lnL>
+                    <a:lnR cap="flat" cmpd="sng" w="9525">
+                      <a:solidFill>
+                        <a:srgbClr val="000000"/>
+                      </a:solidFill>
+                      <a:prstDash val="solid"/>
+                      <a:round/>
+                      <a:headEnd len="sm" w="sm" type="none"/>
+                      <a:tailEnd len="sm" w="sm" type="none"/>
+                    </a:lnR>
+                    <a:lnT cap="flat" cmpd="sng" w="9525">
+                      <a:solidFill>
+                        <a:srgbClr val="000000"/>
+                      </a:solidFill>
+                      <a:prstDash val="solid"/>
+                      <a:round/>
+                      <a:headEnd len="sm" w="sm" type="none"/>
+                      <a:tailEnd len="sm" w="sm" type="none"/>
+                    </a:lnT>
+                    <a:lnB cap="flat" cmpd="sng" w="9525">
+                      <a:solidFill>
+                        <a:srgbClr val="000000"/>
+                      </a:solidFill>
+                      <a:prstDash val="solid"/>
+                      <a:round/>
+                      <a:headEnd len="sm" w="sm" type="none"/>
+                      <a:tailEnd len="sm" w="sm" type="none"/>
+                    </a:lnB>
+                  </a:tcPr>
+                </a:tc>
+              </a:tr>
+            </a:tbl>
+          </a:graphicData>
+        </a:graphic>
+      </p:graphicFrame>
     </p:spTree>
   </p:cSld>
   <p:clrMapOvr>
@@ -16953,7 +18636,7 @@
   <p:cSld>
     <p:spTree>
       <p:nvGrpSpPr>
-        <p:cNvPr id="94" name="Shape 94"/>
+        <p:cNvPr id="95" name="Shape 95"/>
         <p:cNvGrpSpPr/>
         <p:nvPr/>
       </p:nvGrpSpPr>
@@ -16967,7 +18650,7 @@
       </p:grpSpPr>
       <p:sp>
         <p:nvSpPr>
-          <p:cNvPr id="95" name="Google Shape;95;p18"/>
+          <p:cNvPr id="96" name="Google Shape;96;p18"/>
           <p:cNvSpPr txBox="1"/>
           <p:nvPr/>
         </p:nvSpPr>
@@ -17025,7 +18708,7 @@
       </p:sp>
       <p:grpSp>
         <p:nvGrpSpPr>
-          <p:cNvPr id="96" name="Google Shape;96;p18"/>
+          <p:cNvPr id="97" name="Google Shape;97;p18"/>
           <p:cNvGrpSpPr/>
           <p:nvPr/>
         </p:nvGrpSpPr>
@@ -17039,7 +18722,7 @@
         </p:grpSpPr>
         <p:sp>
           <p:nvSpPr>
-            <p:cNvPr id="97" name="Google Shape;97;p18"/>
+            <p:cNvPr id="98" name="Google Shape;98;p18"/>
             <p:cNvSpPr/>
             <p:nvPr/>
           </p:nvSpPr>
@@ -17090,7 +18773,7 @@
         </p:sp>
         <p:grpSp>
           <p:nvGrpSpPr>
-            <p:cNvPr id="98" name="Google Shape;98;p18"/>
+            <p:cNvPr id="99" name="Google Shape;99;p18"/>
             <p:cNvGrpSpPr/>
             <p:nvPr/>
           </p:nvGrpSpPr>
@@ -17104,7 +18787,7 @@
           </p:grpSpPr>
           <p:sp>
             <p:nvSpPr>
-              <p:cNvPr id="99" name="Google Shape;99;p18"/>
+              <p:cNvPr id="100" name="Google Shape;100;p18"/>
               <p:cNvSpPr txBox="1"/>
               <p:nvPr/>
             </p:nvSpPr>
@@ -17162,7 +18845,7 @@
           </p:sp>
           <p:sp>
             <p:nvSpPr>
-              <p:cNvPr id="100" name="Google Shape;100;p18"/>
+              <p:cNvPr id="101" name="Google Shape;101;p18"/>
               <p:cNvSpPr txBox="1"/>
               <p:nvPr/>
             </p:nvSpPr>
@@ -17254,7 +18937,7 @@
       </p:grpSp>
       <p:grpSp>
         <p:nvGrpSpPr>
-          <p:cNvPr id="101" name="Google Shape;101;p18"/>
+          <p:cNvPr id="102" name="Google Shape;102;p18"/>
           <p:cNvGrpSpPr/>
           <p:nvPr/>
         </p:nvGrpSpPr>
@@ -17268,7 +18951,7 @@
         </p:grpSpPr>
         <p:sp>
           <p:nvSpPr>
-            <p:cNvPr id="102" name="Google Shape;102;p18"/>
+            <p:cNvPr id="103" name="Google Shape;103;p18"/>
             <p:cNvSpPr/>
             <p:nvPr/>
           </p:nvSpPr>
@@ -17319,7 +19002,7 @@
         </p:sp>
         <p:grpSp>
           <p:nvGrpSpPr>
-            <p:cNvPr id="103" name="Google Shape;103;p18"/>
+            <p:cNvPr id="104" name="Google Shape;104;p18"/>
             <p:cNvGrpSpPr/>
             <p:nvPr/>
           </p:nvGrpSpPr>
@@ -17333,7 +19016,7 @@
           </p:grpSpPr>
           <p:sp>
             <p:nvSpPr>
-              <p:cNvPr id="104" name="Google Shape;104;p18"/>
+              <p:cNvPr id="105" name="Google Shape;105;p18"/>
               <p:cNvSpPr txBox="1"/>
               <p:nvPr/>
             </p:nvSpPr>
@@ -17391,7 +19074,7 @@
           </p:sp>
           <p:sp>
             <p:nvSpPr>
-              <p:cNvPr id="105" name="Google Shape;105;p18"/>
+              <p:cNvPr id="106" name="Google Shape;106;p18"/>
               <p:cNvSpPr txBox="1"/>
               <p:nvPr/>
             </p:nvSpPr>
@@ -17494,7 +19177,7 @@
   <p:cSld>
     <p:spTree>
       <p:nvGrpSpPr>
-        <p:cNvPr id="109" name="Shape 109"/>
+        <p:cNvPr id="110" name="Shape 110"/>
         <p:cNvGrpSpPr/>
         <p:nvPr/>
       </p:nvGrpSpPr>
@@ -17508,7 +19191,7 @@
       </p:grpSpPr>
       <p:sp>
         <p:nvSpPr>
-          <p:cNvPr id="110" name="Google Shape;110;p19"/>
+          <p:cNvPr id="111" name="Google Shape;111;p19"/>
           <p:cNvSpPr txBox="1"/>
           <p:nvPr/>
         </p:nvSpPr>
@@ -17570,7 +19253,7 @@
       </p:sp>
       <p:grpSp>
         <p:nvGrpSpPr>
-          <p:cNvPr id="111" name="Google Shape;111;p19"/>
+          <p:cNvPr id="112" name="Google Shape;112;p19"/>
           <p:cNvGrpSpPr/>
           <p:nvPr/>
         </p:nvGrpSpPr>
@@ -17584,7 +19267,7 @@
         </p:grpSpPr>
         <p:sp>
           <p:nvSpPr>
-            <p:cNvPr id="112" name="Google Shape;112;p19"/>
+            <p:cNvPr id="113" name="Google Shape;113;p19"/>
             <p:cNvSpPr/>
             <p:nvPr/>
           </p:nvSpPr>
@@ -17635,7 +19318,7 @@
         </p:sp>
         <p:sp>
           <p:nvSpPr>
-            <p:cNvPr id="113" name="Google Shape;113;p19"/>
+            <p:cNvPr id="114" name="Google Shape;114;p19"/>
             <p:cNvSpPr txBox="1"/>
             <p:nvPr/>
           </p:nvSpPr>
@@ -17723,7 +19406,7 @@
       </p:grpSp>
       <p:grpSp>
         <p:nvGrpSpPr>
-          <p:cNvPr id="114" name="Google Shape;114;p19"/>
+          <p:cNvPr id="115" name="Google Shape;115;p19"/>
           <p:cNvGrpSpPr/>
           <p:nvPr/>
         </p:nvGrpSpPr>
@@ -17737,7 +19420,7 @@
         </p:grpSpPr>
         <p:sp>
           <p:nvSpPr>
-            <p:cNvPr id="115" name="Google Shape;115;p19"/>
+            <p:cNvPr id="116" name="Google Shape;116;p19"/>
             <p:cNvSpPr/>
             <p:nvPr/>
           </p:nvSpPr>
@@ -17788,7 +19471,7 @@
         </p:sp>
         <p:sp>
           <p:nvSpPr>
-            <p:cNvPr id="116" name="Google Shape;116;p19"/>
+            <p:cNvPr id="117" name="Google Shape;117;p19"/>
             <p:cNvSpPr txBox="1"/>
             <p:nvPr/>
           </p:nvSpPr>
@@ -17876,7 +19559,7 @@
       </p:grpSp>
       <p:grpSp>
         <p:nvGrpSpPr>
-          <p:cNvPr id="117" name="Google Shape;117;p19"/>
+          <p:cNvPr id="118" name="Google Shape;118;p19"/>
           <p:cNvGrpSpPr/>
           <p:nvPr/>
         </p:nvGrpSpPr>
@@ -17890,7 +19573,7 @@
         </p:grpSpPr>
         <p:sp>
           <p:nvSpPr>
-            <p:cNvPr id="118" name="Google Shape;118;p19"/>
+            <p:cNvPr id="119" name="Google Shape;119;p19"/>
             <p:cNvSpPr/>
             <p:nvPr/>
           </p:nvSpPr>
@@ -17941,7 +19624,7 @@
         </p:sp>
         <p:sp>
           <p:nvSpPr>
-            <p:cNvPr id="119" name="Google Shape;119;p19"/>
+            <p:cNvPr id="120" name="Google Shape;120;p19"/>
             <p:cNvSpPr txBox="1"/>
             <p:nvPr/>
           </p:nvSpPr>
@@ -18029,7 +19712,7 @@
       </p:grpSp>
       <p:grpSp>
         <p:nvGrpSpPr>
-          <p:cNvPr id="120" name="Google Shape;120;p19"/>
+          <p:cNvPr id="121" name="Google Shape;121;p19"/>
           <p:cNvGrpSpPr/>
           <p:nvPr/>
         </p:nvGrpSpPr>
@@ -18043,7 +19726,7 @@
         </p:grpSpPr>
         <p:sp>
           <p:nvSpPr>
-            <p:cNvPr id="121" name="Google Shape;121;p19"/>
+            <p:cNvPr id="122" name="Google Shape;122;p19"/>
             <p:cNvSpPr/>
             <p:nvPr/>
           </p:nvSpPr>
@@ -18094,7 +19777,7 @@
         </p:sp>
         <p:sp>
           <p:nvSpPr>
-            <p:cNvPr id="122" name="Google Shape;122;p19"/>
+            <p:cNvPr id="123" name="Google Shape;123;p19"/>
             <p:cNvSpPr txBox="1"/>
             <p:nvPr/>
           </p:nvSpPr>
@@ -18182,7 +19865,7 @@
       </p:grpSp>
       <p:grpSp>
         <p:nvGrpSpPr>
-          <p:cNvPr id="123" name="Google Shape;123;p19"/>
+          <p:cNvPr id="124" name="Google Shape;124;p19"/>
           <p:cNvGrpSpPr/>
           <p:nvPr/>
         </p:nvGrpSpPr>
@@ -18196,7 +19879,7 @@
         </p:grpSpPr>
         <p:sp>
           <p:nvSpPr>
-            <p:cNvPr id="124" name="Google Shape;124;p19"/>
+            <p:cNvPr id="125" name="Google Shape;125;p19"/>
             <p:cNvSpPr/>
             <p:nvPr/>
           </p:nvSpPr>
@@ -18247,7 +19930,7 @@
         </p:sp>
         <p:sp>
           <p:nvSpPr>
-            <p:cNvPr id="125" name="Google Shape;125;p19"/>
+            <p:cNvPr id="126" name="Google Shape;126;p19"/>
             <p:cNvSpPr txBox="1"/>
             <p:nvPr/>
           </p:nvSpPr>
@@ -18346,7 +20029,7 @@
   <p:cSld>
     <p:spTree>
       <p:nvGrpSpPr>
-        <p:cNvPr id="129" name="Shape 129"/>
+        <p:cNvPr id="130" name="Shape 130"/>
         <p:cNvGrpSpPr/>
         <p:nvPr/>
       </p:nvGrpSpPr>
@@ -18360,7 +20043,7 @@
       </p:grpSpPr>
       <p:sp>
         <p:nvSpPr>
-          <p:cNvPr id="130" name="Google Shape;130;p20"/>
+          <p:cNvPr id="131" name="Google Shape;131;p20"/>
           <p:cNvSpPr txBox="1"/>
           <p:nvPr>
             <p:ph type="title"/>
@@ -18411,7 +20094,7 @@
   <p:cSld>
     <p:spTree>
       <p:nvGrpSpPr>
-        <p:cNvPr id="134" name="Shape 134"/>
+        <p:cNvPr id="135" name="Shape 135"/>
         <p:cNvGrpSpPr/>
         <p:nvPr/>
       </p:nvGrpSpPr>
@@ -18425,7 +20108,7 @@
       </p:grpSpPr>
       <p:sp>
         <p:nvSpPr>
-          <p:cNvPr id="135" name="Google Shape;135;p21"/>
+          <p:cNvPr id="136" name="Google Shape;136;p21"/>
           <p:cNvSpPr txBox="1"/>
           <p:nvPr>
             <p:ph type="title"/>
@@ -18433,55 +20116,23 @@
         </p:nvSpPr>
         <p:spPr>
           <a:xfrm>
-            <a:off x="311700" y="445025"/>
-            <a:ext cx="8520600" cy="572700"/>
+            <a:off x="762000" y="476250"/>
+            <a:ext cx="7620000" cy="1047900"/>
           </a:xfrm>
           <a:prstGeom prst="rect">
             <a:avLst/>
           </a:prstGeom>
+          <a:solidFill>
+            <a:srgbClr val="000000">
+              <a:alpha val="0"/>
+            </a:srgbClr>
+          </a:solidFill>
+          <a:ln>
+            <a:noFill/>
+          </a:ln>
         </p:spPr>
         <p:txBody>
-          <a:bodyPr anchorCtr="0" anchor="t" bIns="91425" lIns="91425" spcFirstLastPara="1" rIns="91425" wrap="square" tIns="91425">
-            <a:normAutofit fontScale="90000"/>
-          </a:bodyPr>
-          <a:lstStyle/>
-          <a:p>
-            <a:pPr indent="0" lvl="0" marL="0" rtl="0" algn="l">
-              <a:spcBef>
-                <a:spcPts val="0"/>
-              </a:spcBef>
-              <a:spcAft>
-                <a:spcPts val="0"/>
-              </a:spcAft>
-              <a:buNone/>
-            </a:pPr>
-            <a:r>
-              <a:rPr lang="en"/>
-              <a:t>What will you get out of this class?</a:t>
-            </a:r>
-            <a:endParaRPr/>
-          </a:p>
-        </p:txBody>
-      </p:sp>
-      <p:sp>
-        <p:nvSpPr>
-          <p:cNvPr id="136" name="Google Shape;136;p21"/>
-          <p:cNvSpPr txBox="1"/>
-          <p:nvPr>
-            <p:ph idx="1" type="body"/>
-          </p:nvPr>
-        </p:nvSpPr>
-        <p:spPr>
-          <a:xfrm>
-            <a:off x="311700" y="1152475"/>
-            <a:ext cx="8520600" cy="3416400"/>
-          </a:xfrm>
-          <a:prstGeom prst="rect">
-            <a:avLst/>
-          </a:prstGeom>
-        </p:spPr>
-        <p:txBody>
-          <a:bodyPr anchorCtr="0" anchor="t" bIns="91425" lIns="91425" spcFirstLastPara="1" rIns="91425" wrap="square" tIns="91425">
+          <a:bodyPr anchorCtr="0" anchor="t" bIns="0" lIns="0" spcFirstLastPara="1" rIns="0" wrap="square" tIns="0">
             <a:normAutofit/>
           </a:bodyPr>
           <a:lstStyle/>
@@ -18496,47 +20147,445 @@
               <a:buNone/>
             </a:pPr>
             <a:r>
-              <a:rPr lang="en"/>
+              <a:rPr b="0" lang="en" sz="3200">
+                <a:solidFill>
+                  <a:srgbClr val="0F172A"/>
+                </a:solidFill>
+                <a:latin typeface="Inter ExtraBold"/>
+                <a:ea typeface="Inter ExtraBold"/>
+                <a:cs typeface="Inter ExtraBold"/>
+                <a:sym typeface="Inter ExtraBold"/>
+              </a:rPr>
+              <a:t>What will you get out of this class?</a:t>
+            </a:r>
+            <a:endParaRPr b="0" sz="3200">
+              <a:solidFill>
+                <a:srgbClr val="0F172A"/>
+              </a:solidFill>
+              <a:latin typeface="Inter ExtraBold"/>
+              <a:ea typeface="Inter ExtraBold"/>
+              <a:cs typeface="Inter ExtraBold"/>
+              <a:sym typeface="Inter ExtraBold"/>
+            </a:endParaRPr>
+          </a:p>
+          <a:p>
+            <a:pPr indent="0" lvl="0" marL="0" rtl="0" algn="l">
+              <a:spcBef>
+                <a:spcPts val="450"/>
+              </a:spcBef>
+              <a:spcAft>
+                <a:spcPts val="0"/>
+              </a:spcAft>
+              <a:buNone/>
+            </a:pPr>
+            <a:r>
+              <a:rPr b="0" lang="en" sz="1600">
+                <a:solidFill>
+                  <a:srgbClr val="64748B"/>
+                </a:solidFill>
+                <a:latin typeface="Inter"/>
+                <a:ea typeface="Inter"/>
+                <a:cs typeface="Inter"/>
+                <a:sym typeface="Inter"/>
+              </a:rPr>
               <a:t>In general:</a:t>
             </a:r>
-            <a:endParaRPr/>
-          </a:p>
-          <a:p>
-            <a:pPr indent="-342900" lvl="0" marL="457200" rtl="0" algn="l">
-              <a:spcBef>
-                <a:spcPts val="1200"/>
-              </a:spcBef>
-              <a:spcAft>
-                <a:spcPts val="0"/>
-              </a:spcAft>
-              <a:buSzPts val="1800"/>
-              <a:buChar char="-"/>
-            </a:pPr>
-            <a:r>
-              <a:rPr lang="en"/>
-              <a:t>Ability to do common analyses and visualizations</a:t>
-            </a:r>
-            <a:endParaRPr/>
-          </a:p>
-          <a:p>
-            <a:pPr indent="-342900" lvl="0" marL="457200" rtl="0" algn="l">
-              <a:spcBef>
-                <a:spcPts val="0"/>
-              </a:spcBef>
-              <a:spcAft>
-                <a:spcPts val="0"/>
-              </a:spcAft>
-              <a:buSzPts val="1800"/>
-              <a:buChar char="-"/>
-            </a:pPr>
-            <a:r>
-              <a:rPr lang="en"/>
-              <a:t>Ability to go further on your own</a:t>
-            </a:r>
-            <a:endParaRPr/>
+            <a:endParaRPr b="0" sz="1600">
+              <a:solidFill>
+                <a:srgbClr val="64748B"/>
+              </a:solidFill>
+              <a:latin typeface="Inter"/>
+              <a:ea typeface="Inter"/>
+              <a:cs typeface="Inter"/>
+              <a:sym typeface="Inter"/>
+            </a:endParaRPr>
           </a:p>
         </p:txBody>
       </p:sp>
+      <p:grpSp>
+        <p:nvGrpSpPr>
+          <p:cNvPr id="137" name="Google Shape;137;p21"/>
+          <p:cNvGrpSpPr/>
+          <p:nvPr/>
+        </p:nvGrpSpPr>
+        <p:grpSpPr>
+          <a:xfrm>
+            <a:off x="762000" y="1714500"/>
+            <a:ext cx="3619500" cy="2476500"/>
+            <a:chOff x="0" y="0"/>
+            <a:chExt cx="3619500" cy="2476500"/>
+          </a:xfrm>
+        </p:grpSpPr>
+        <p:sp>
+          <p:nvSpPr>
+            <p:cNvPr id="138" name="Google Shape;138;p21"/>
+            <p:cNvSpPr/>
+            <p:nvPr/>
+          </p:nvSpPr>
+          <p:spPr>
+            <a:xfrm>
+              <a:off x="0" y="0"/>
+              <a:ext cx="3619500" cy="2476500"/>
+            </a:xfrm>
+            <a:prstGeom prst="roundRect">
+              <a:avLst>
+                <a:gd fmla="val 6153" name="adj"/>
+              </a:avLst>
+            </a:prstGeom>
+            <a:solidFill>
+              <a:srgbClr val="FFFFFF"/>
+            </a:solidFill>
+            <a:ln cap="flat" cmpd="sng" w="14300">
+              <a:solidFill>
+                <a:srgbClr val="E2E8F0"/>
+              </a:solidFill>
+              <a:prstDash val="solid"/>
+              <a:round/>
+              <a:headEnd len="sm" w="sm" type="none"/>
+              <a:tailEnd len="sm" w="sm" type="none"/>
+            </a:ln>
+          </p:spPr>
+          <p:txBody>
+            <a:bodyPr anchorCtr="0" anchor="ctr" bIns="0" lIns="0" spcFirstLastPara="1" rIns="0" wrap="square" tIns="0">
+              <a:noAutofit/>
+            </a:bodyPr>
+            <a:lstStyle/>
+            <a:p>
+              <a:pPr indent="0" lvl="0" marL="0" rtl="0" algn="l">
+                <a:spcBef>
+                  <a:spcPts val="0"/>
+                </a:spcBef>
+                <a:spcAft>
+                  <a:spcPts val="0"/>
+                </a:spcAft>
+                <a:buNone/>
+              </a:pPr>
+              <a:r>
+                <a:t/>
+              </a:r>
+              <a:endParaRPr/>
+            </a:p>
+          </p:txBody>
+        </p:sp>
+        <p:sp>
+          <p:nvSpPr>
+            <p:cNvPr id="139" name="Google Shape;139;p21"/>
+            <p:cNvSpPr txBox="1"/>
+            <p:nvPr/>
+          </p:nvSpPr>
+          <p:spPr>
+            <a:xfrm>
+              <a:off x="0" y="0"/>
+              <a:ext cx="3619500" cy="2476500"/>
+            </a:xfrm>
+            <a:prstGeom prst="rect">
+              <a:avLst/>
+            </a:prstGeom>
+            <a:solidFill>
+              <a:srgbClr val="000000">
+                <a:alpha val="0"/>
+              </a:srgbClr>
+            </a:solidFill>
+            <a:ln>
+              <a:noFill/>
+            </a:ln>
+          </p:spPr>
+          <p:txBody>
+            <a:bodyPr anchorCtr="0" anchor="t" bIns="228600" lIns="228600" spcFirstLastPara="1" rIns="228600" wrap="square" tIns="381000">
+              <a:noAutofit/>
+            </a:bodyPr>
+            <a:lstStyle/>
+            <a:p>
+              <a:pPr indent="0" lvl="0" marL="0" rtl="0" algn="l">
+                <a:spcBef>
+                  <a:spcPts val="0"/>
+                </a:spcBef>
+                <a:spcAft>
+                  <a:spcPts val="0"/>
+                </a:spcAft>
+                <a:buNone/>
+              </a:pPr>
+              <a:r>
+                <a:rPr lang="en" sz="3200">
+                  <a:solidFill>
+                    <a:srgbClr val="3B82F6"/>
+                  </a:solidFill>
+                  <a:latin typeface="Material Icons"/>
+                  <a:ea typeface="Material Icons"/>
+                  <a:cs typeface="Material Icons"/>
+                  <a:sym typeface="Material Icons"/>
+                </a:rPr>
+                <a:t>bar_chart</a:t>
+              </a:r>
+              <a:endParaRPr sz="3200">
+                <a:solidFill>
+                  <a:srgbClr val="3B82F6"/>
+                </a:solidFill>
+                <a:latin typeface="Material Icons"/>
+                <a:ea typeface="Material Icons"/>
+                <a:cs typeface="Material Icons"/>
+                <a:sym typeface="Material Icons"/>
+              </a:endParaRPr>
+            </a:p>
+            <a:p>
+              <a:pPr indent="0" lvl="0" marL="0" rtl="0" algn="l">
+                <a:spcBef>
+                  <a:spcPts val="900"/>
+                </a:spcBef>
+                <a:spcAft>
+                  <a:spcPts val="0"/>
+                </a:spcAft>
+                <a:buNone/>
+              </a:pPr>
+              <a:r>
+                <a:rPr b="1" lang="en" sz="1100">
+                  <a:solidFill>
+                    <a:srgbClr val="3B82F6"/>
+                  </a:solidFill>
+                  <a:latin typeface="Inter"/>
+                  <a:ea typeface="Inter"/>
+                  <a:cs typeface="Inter"/>
+                  <a:sym typeface="Inter"/>
+                </a:rPr>
+                <a:t>Practical Application</a:t>
+              </a:r>
+              <a:endParaRPr b="1" sz="1100">
+                <a:solidFill>
+                  <a:srgbClr val="3B82F6"/>
+                </a:solidFill>
+                <a:latin typeface="Inter"/>
+                <a:ea typeface="Inter"/>
+                <a:cs typeface="Inter"/>
+                <a:sym typeface="Inter"/>
+              </a:endParaRPr>
+            </a:p>
+            <a:p>
+              <a:pPr indent="0" lvl="0" marL="0" rtl="0" algn="l">
+                <a:spcBef>
+                  <a:spcPts val="600"/>
+                </a:spcBef>
+                <a:spcAft>
+                  <a:spcPts val="0"/>
+                </a:spcAft>
+                <a:buNone/>
+              </a:pPr>
+              <a:r>
+                <a:rPr b="0" lang="en" sz="1600">
+                  <a:solidFill>
+                    <a:srgbClr val="334155"/>
+                  </a:solidFill>
+                  <a:latin typeface="Inter Medium"/>
+                  <a:ea typeface="Inter Medium"/>
+                  <a:cs typeface="Inter Medium"/>
+                  <a:sym typeface="Inter Medium"/>
+                </a:rPr>
+                <a:t>Ability to do common analyses and visualizations</a:t>
+              </a:r>
+              <a:endParaRPr b="0" sz="1600">
+                <a:solidFill>
+                  <a:srgbClr val="334155"/>
+                </a:solidFill>
+                <a:latin typeface="Inter Medium"/>
+                <a:ea typeface="Inter Medium"/>
+                <a:cs typeface="Inter Medium"/>
+                <a:sym typeface="Inter Medium"/>
+              </a:endParaRPr>
+            </a:p>
+          </p:txBody>
+        </p:sp>
+      </p:grpSp>
+      <p:grpSp>
+        <p:nvGrpSpPr>
+          <p:cNvPr id="140" name="Google Shape;140;p21"/>
+          <p:cNvGrpSpPr/>
+          <p:nvPr/>
+        </p:nvGrpSpPr>
+        <p:grpSpPr>
+          <a:xfrm>
+            <a:off x="4762500" y="1714500"/>
+            <a:ext cx="3619500" cy="2476500"/>
+            <a:chOff x="0" y="0"/>
+            <a:chExt cx="3619500" cy="2476500"/>
+          </a:xfrm>
+        </p:grpSpPr>
+        <p:sp>
+          <p:nvSpPr>
+            <p:cNvPr id="141" name="Google Shape;141;p21"/>
+            <p:cNvSpPr/>
+            <p:nvPr/>
+          </p:nvSpPr>
+          <p:spPr>
+            <a:xfrm>
+              <a:off x="0" y="0"/>
+              <a:ext cx="3619500" cy="2476500"/>
+            </a:xfrm>
+            <a:prstGeom prst="roundRect">
+              <a:avLst>
+                <a:gd fmla="val 6153" name="adj"/>
+              </a:avLst>
+            </a:prstGeom>
+            <a:solidFill>
+              <a:srgbClr val="FFFFFF"/>
+            </a:solidFill>
+            <a:ln cap="flat" cmpd="sng" w="14300">
+              <a:solidFill>
+                <a:srgbClr val="E2E8F0"/>
+              </a:solidFill>
+              <a:prstDash val="solid"/>
+              <a:round/>
+              <a:headEnd len="sm" w="sm" type="none"/>
+              <a:tailEnd len="sm" w="sm" type="none"/>
+            </a:ln>
+          </p:spPr>
+          <p:txBody>
+            <a:bodyPr anchorCtr="0" anchor="ctr" bIns="0" lIns="0" spcFirstLastPara="1" rIns="0" wrap="square" tIns="0">
+              <a:noAutofit/>
+            </a:bodyPr>
+            <a:lstStyle/>
+            <a:p>
+              <a:pPr indent="0" lvl="0" marL="0" rtl="0" algn="l">
+                <a:spcBef>
+                  <a:spcPts val="0"/>
+                </a:spcBef>
+                <a:spcAft>
+                  <a:spcPts val="0"/>
+                </a:spcAft>
+                <a:buNone/>
+              </a:pPr>
+              <a:r>
+                <a:t/>
+              </a:r>
+              <a:endParaRPr/>
+            </a:p>
+          </p:txBody>
+        </p:sp>
+        <p:sp>
+          <p:nvSpPr>
+            <p:cNvPr id="142" name="Google Shape;142;p21"/>
+            <p:cNvSpPr txBox="1"/>
+            <p:nvPr/>
+          </p:nvSpPr>
+          <p:spPr>
+            <a:xfrm>
+              <a:off x="0" y="0"/>
+              <a:ext cx="3619500" cy="2476500"/>
+            </a:xfrm>
+            <a:prstGeom prst="rect">
+              <a:avLst/>
+            </a:prstGeom>
+            <a:solidFill>
+              <a:srgbClr val="000000">
+                <a:alpha val="0"/>
+              </a:srgbClr>
+            </a:solidFill>
+            <a:ln>
+              <a:noFill/>
+            </a:ln>
+          </p:spPr>
+          <p:txBody>
+            <a:bodyPr anchorCtr="0" anchor="t" bIns="228600" lIns="228600" spcFirstLastPara="1" rIns="228600" wrap="square" tIns="381000">
+              <a:noAutofit/>
+            </a:bodyPr>
+            <a:lstStyle/>
+            <a:p>
+              <a:pPr indent="0" lvl="0" marL="0" rtl="0" algn="l">
+                <a:spcBef>
+                  <a:spcPts val="0"/>
+                </a:spcBef>
+                <a:spcAft>
+                  <a:spcPts val="0"/>
+                </a:spcAft>
+                <a:buNone/>
+              </a:pPr>
+              <a:r>
+                <a:rPr lang="en" sz="3200">
+                  <a:solidFill>
+                    <a:srgbClr val="10B981"/>
+                  </a:solidFill>
+                  <a:latin typeface="Material Icons"/>
+                  <a:ea typeface="Material Icons"/>
+                  <a:cs typeface="Material Icons"/>
+                  <a:sym typeface="Material Icons"/>
+                </a:rPr>
+                <a:t>trending_up</a:t>
+              </a:r>
+              <a:endParaRPr sz="3200">
+                <a:solidFill>
+                  <a:srgbClr val="10B981"/>
+                </a:solidFill>
+                <a:latin typeface="Material Icons"/>
+                <a:ea typeface="Material Icons"/>
+                <a:cs typeface="Material Icons"/>
+                <a:sym typeface="Material Icons"/>
+              </a:endParaRPr>
+            </a:p>
+            <a:p>
+              <a:pPr indent="0" lvl="0" marL="0" rtl="0" algn="l">
+                <a:spcBef>
+                  <a:spcPts val="900"/>
+                </a:spcBef>
+                <a:spcAft>
+                  <a:spcPts val="0"/>
+                </a:spcAft>
+                <a:buNone/>
+              </a:pPr>
+              <a:r>
+                <a:rPr b="1" lang="en" sz="1100">
+                  <a:solidFill>
+                    <a:srgbClr val="10B981"/>
+                  </a:solidFill>
+                  <a:latin typeface="Inter"/>
+                  <a:ea typeface="Inter"/>
+                  <a:cs typeface="Inter"/>
+                  <a:sym typeface="Inter"/>
+                </a:rPr>
+                <a:t>Future Growth</a:t>
+              </a:r>
+              <a:endParaRPr b="1" sz="1100">
+                <a:solidFill>
+                  <a:srgbClr val="10B981"/>
+                </a:solidFill>
+                <a:latin typeface="Inter"/>
+                <a:ea typeface="Inter"/>
+                <a:cs typeface="Inter"/>
+                <a:sym typeface="Inter"/>
+              </a:endParaRPr>
+            </a:p>
+            <a:p>
+              <a:pPr indent="0" lvl="0" marL="0" rtl="0" algn="l">
+                <a:spcBef>
+                  <a:spcPts val="600"/>
+                </a:spcBef>
+                <a:spcAft>
+                  <a:spcPts val="0"/>
+                </a:spcAft>
+                <a:buNone/>
+              </a:pPr>
+              <a:r>
+                <a:rPr b="0" lang="en" sz="1600">
+                  <a:solidFill>
+                    <a:srgbClr val="334155"/>
+                  </a:solidFill>
+                  <a:latin typeface="Inter Medium"/>
+                  <a:ea typeface="Inter Medium"/>
+                  <a:cs typeface="Inter Medium"/>
+                  <a:sym typeface="Inter Medium"/>
+                </a:rPr>
+                <a:t>Ability to go further on your own</a:t>
+              </a:r>
+              <a:endParaRPr b="0" sz="1600">
+                <a:solidFill>
+                  <a:srgbClr val="334155"/>
+                </a:solidFill>
+                <a:latin typeface="Inter Medium"/>
+                <a:ea typeface="Inter Medium"/>
+                <a:cs typeface="Inter Medium"/>
+                <a:sym typeface="Inter Medium"/>
+              </a:endParaRPr>
+            </a:p>
+          </p:txBody>
+        </p:sp>
+      </p:grpSp>
     </p:spTree>
   </p:cSld>
   <p:clrMapOvr>
